--- a/GitHub-Copilot-SDK.pptx
+++ b/GitHub-Copilot-SDK.pptx
@@ -9,33 +9,29 @@
   </p:notesMasterIdLst>
   <p:sldIdLst>
     <p:sldId id="256" r:id="rId2"/>
+    <p:sldId id="262" r:id="rId6"/>
     <p:sldId id="257" r:id="rId3"/>
     <p:sldId id="258" r:id="rId4"/>
     <p:sldId id="261" r:id="rId5"/>
-    <p:sldId id="262" r:id="rId6"/>
-    <p:sldId id="271" r:id="rId7"/>
-    <p:sldId id="272" r:id="rId8"/>
+    <p:sldId id="263" r:id="rId11"/>
+    <p:sldId id="273" r:id="rId22"/>
+    <p:sldId id="275" r:id="rId23"/>
     <p:sldId id="279" r:id="rId9"/>
     <p:sldId id="280" r:id="rId10"/>
-    <p:sldId id="263" r:id="rId11"/>
     <p:sldId id="264" r:id="rId12"/>
+    <p:sldId id="276" r:id="rId27"/>
     <p:sldId id="265" r:id="rId13"/>
+    <p:sldId id="277" r:id="rId24"/>
     <p:sldId id="266" r:id="rId14"/>
+    <p:sldId id="284" r:id="rId16"/>
+    <p:sldId id="274" r:id="rId26"/>
+    <p:sldId id="283" r:id="rId29"/>
     <p:sldId id="267" r:id="rId15"/>
-    <p:sldId id="284" r:id="rId16"/>
     <p:sldId id="268" r:id="rId17"/>
     <p:sldId id="259" r:id="rId18"/>
-    <p:sldId id="260" r:id="rId19"/>
-    <p:sldId id="269" r:id="rId20"/>
+    <p:sldId id="271" r:id="rId7"/>
+    <p:sldId id="278" r:id="rId25"/>
     <p:sldId id="270" r:id="rId21"/>
-    <p:sldId id="273" r:id="rId22"/>
-    <p:sldId id="275" r:id="rId23"/>
-    <p:sldId id="276" r:id="rId27"/>
-    <p:sldId id="277" r:id="rId24"/>
-    <p:sldId id="274" r:id="rId26"/>
-    <p:sldId id="281" r:id="rId28"/>
-    <p:sldId id="283" r:id="rId29"/>
-    <p:sldId id="278" r:id="rId25"/>
   </p:sldIdLst>
   <p:sldSz cx="9144000" cy="5143500" type="screen16x9"/>
   <p:notesSz cx="5143500" cy="9144000"/>
@@ -309,17 +305,7 @@
           <a:lstStyle/>
           <a:p>
             <a:r>
-              <a:t>GitHub Copilot SDK workshop, refreshed against stable Python SDK 1.0.13, released 4 September 2026. Baseline checked 7 September 2026. Six first-party SDKs: TypeScript, Python, Go, .NET, Java and Rust. The runnable workshop prototypes are Python. Snippets omit the main()/asyncio.run wrapper where space requires; use the full example files when running.</a:t>
-            </a:r>
-          </a:p>
-          <a:p>
-            <a:r>
-              <a:t>SOURCE: https://github.com/github/copilot-sdk/releases/tag/v1.0.13</a:t>
-            </a:r>
-          </a:p>
-          <a:p>
-            <a:r>
-              <a:t>SOURCE: https://github.com/github/copilot-sdk/tree/v1.0.13</a:t>
+              <a:t>Stable workshop baseline verified 14 September 2026. SDK 1.0.13 is the latest stable release and pins runtime 1.0.83. The workshop uses Python and eight runnable samples. Current main is newer but unreleased and is not the deck baseline.</a:t>
             </a:r>
           </a:p>
         </p:txBody>
@@ -405,17 +391,7 @@
           <a:lstStyle/>
           <a:p>
             <a:r>
-              <a:t>Python @define_tool infers a schema from the annotated Pydantic parameter model. This illustrative handler returns simulated weather. The complete version is examples/02_custom_tools.py. The snippet assumes an active client and PermissionHandler import. All async snippets belong inside async main(). Version 1.0.13 cancels host-owned async handler tasks when their runtime request ends or session terminates; clean up in finally and let asyncio.CancelledError propagate.</a:t>
-            </a:r>
-          </a:p>
-          <a:p>
-            <a:r>
-              <a:t>SOURCE: https://github.com/github/copilot-sdk/tree/v1.0.13/python#tools</a:t>
-            </a:r>
-          </a:p>
-          <a:p>
-            <a:r>
-              <a:t>SOURCE: https://github.com/github/copilot-sdk/releases/tag/v1.0.13</a:t>
+              <a:t>The model and permission callback are optional for a text-only session. available_tools=[] removes tool exposure. send_and_wait raises on timeout or session error; None means the session became idle without a final assistant message.</a:t>
             </a:r>
           </a:p>
         </p:txBody>
@@ -501,17 +477,7 @@
           <a:lstStyle/>
           <a:p>
             <a:r>
-              <a:t>Run python examples/03_custom_agents.py. It registers researcher and reviewer with custom_agents, starts with agent='researcher', lists them, verifies the active agent, then selects the reviewer using AgentSelectRequest(name='reviewer'). The history stays in the same session. The middle card is the handoff step, not a third custom agent. Both session and agent tool scopes are read-oriented; that is not a sandbox. Check get_current().agent before dereferencing it.</a:t>
-            </a:r>
-          </a:p>
-          <a:p>
-            <a:r>
-              <a:t>SOURCE: https://github.com/github/copilot-sdk/blob/v1.0.13/docs/features/custom-agents.md</a:t>
-            </a:r>
-          </a:p>
-          <a:p>
-            <a:r>
-              <a:t>PROTOTYPE: examples/03_custom_agents.py</a:t>
+              <a:t>Custom agent tools are optional; omitted or null means the session's available tools. This workshop explicitly scopes researcher and reviewer to grep, glob, and view, selects the researcher, then verifies the reviewer after AgentSelectRequest.</a:t>
             </a:r>
           </a:p>
         </p:txBody>
@@ -597,22 +563,7 @@
           <a:lstStyle/>
           <a:p>
             <a:r>
-              <a:t>Run python examples/05_mcp_servers.py. Remote GitHub MCP needs no Node, npx or Docker. github_token() reads environment or gh auth token at runtime. MCP credentials are separate from Copilot authentication. Raw names are list_issues, issue_read and search_issues; session filters are mcp:github-&lt;name&gt;. The slide exposes only list_issues; the full prototype exposes all three and adds X-MCP-Readonly=true. Never log tokens. Check links rather than assuming tools eliminate hallucinations.</a:t>
-            </a:r>
-          </a:p>
-          <a:p>
-            <a:r>
-              <a:t>SOURCE: https://github.com/github/copilot-sdk/blob/v1.0.13/docs/features/mcp.md</a:t>
-            </a:r>
-          </a:p>
-          <a:p>
-            <a:r>
-              <a:t>SOURCE: https://github.com/github/github-mcp-server/blob/v1.12.0/pkg/github/issues.go</a:t>
-            </a:r>
-          </a:p>
-          <a:p>
-            <a:r>
-              <a:t>PROTOTYPE: examples/05_mcp_servers.py</a:t>
+              <a:t>The hosted endpoint is configured as a generic remote MCP server. Copilot CLI sign-in is not copied into arbitrary MCP headers. This sample resolves GITHUB_TOKEN, GH_TOKEN, or gh auth token, scopes v1.12.1 issue tools, sends X-MCP-Readonly, and fails if no matching MCP start event is observed. OAuth via on_mcp_auth_request is an alternative.</a:t>
             </a:r>
           </a:p>
         </p:txBody>
@@ -698,17 +649,7 @@
           <a:lstStyle/>
           <a:p>
             <a:r>
-              <a:t>The overview documents eight hooks: on_session_start, on_user_prompt_submitted, on_user_prompt_transformed, on_pre_tool_use, on_post_tool_use, on_post_tool_use_failure, on_error_occurred and on_session_end. Python additionally exposes on_pre_mcp_tool_call and on_agent_stop. on_post_tool_use is success-only; failed results use on_post_tool_use_failure. None preserves policy. Detaching one owner need not end a shared session: clean up host-owned resources with finally/context managers. Hooks are not a sandbox.</a:t>
-            </a:r>
-          </a:p>
-          <a:p>
-            <a:r>
-              <a:t>SOURCE: https://github.com/github/copilot-sdk/blob/v1.0.13/docs/features/hooks.md</a:t>
-            </a:r>
-          </a:p>
-          <a:p>
-            <a:r>
-              <a:t>SOURCE: https://github.com/github/copilot-sdk/blob/v1.0.13/python/copilot/session.py</a:t>
+              <a:t>Human input, action permission, and sandbox bypass are separate protocol events. The host must validate the request, identify the approving user, keep decisions bounded, and fail closed when no human response is available.</a:t>
             </a:r>
           </a:p>
         </p:txBody>
@@ -794,12 +735,7 @@
           <a:lstStyle/>
           <a:p>
             <a:r>
-              <a:t>This slide lists authentication choices, not a chain to combine. Explicit session github_token and github_token_provider are mutually exclusive. Ambient token precedence is COPILOT_GITHUB_TOKEN, then GH_TOKEN, then GITHUB_TOKEN; stored CLI login and gh credentials can provide fallback depending on client configuration. Direct API tokens are a separate advanced path. The new provider receives initial/refresh requests and returns a tagged token result with positive expiresIn seconds remaining when the callback completes. Cancellation, errors and invalid credentials reject acquisition, not silently fall back.</a:t>
-            </a:r>
-          </a:p>
-          <a:p>
-            <a:r>
-              <a:t>SOURCE: https://github.com/github/copilot-sdk/blob/v1.0.13/docs/auth/authenticate.md</a:t>
+              <a:t>The stable documentation covers signed-in users, explicit per-user tokens, environment tokens, server-to-server installation tokens, and BYOK. Environment precedence is COPILOT_GITHUB_TOKEN, then GH_TOKEN, then GITHUB_TOKEN. Installation tokens are supplied to the runtime environment and are not session github_token values. Generic MCP authentication remains separate.</a:t>
             </a:r>
           </a:p>
         </p:txBody>
@@ -885,17 +821,7 @@
           <a:lstStyle/>
           <a:p>
             <a:r>
-              <a:t>A multi-user host signs users in with GitHub and supplies their session-scoped credentials. OAuth access must have the required Copilot permissions and organizational authorization. The documented Copilot token prefixes include gho_, ghu_ and github_pat_; classic ghp_ tokens are not supported for Copilot authentication. The remote GitHub MCP service has its own token requirements. New github_token_provider allows short-lived session credentials to rotate; do not combine it with static github_token. Always authorize who owns a session before resuming it.</a:t>
-            </a:r>
-          </a:p>
-          <a:p>
-            <a:r>
-              <a:t>SOURCE: https://github.com/github/copilot-sdk/blob/v1.0.13/docs/auth/authenticate.md</a:t>
-            </a:r>
-          </a:p>
-          <a:p>
-            <a:r>
-              <a:t>SOURCE: https://github.com/github/copilot-sdk/blob/v1.0.13/docs/setup/github-oauth.md</a:t>
+              <a:t>Stable 1.0.13 supports ask_user_variant legacy and elicitation. The actual workshop sample verifies the model-facing tool schema contains message and requestedSchema. Runtime 1.0.83 in live validation exposed only the legacy schema, so the sample detaches the unused structured session and creates a validated freeform-only fallback.</a:t>
             </a:r>
           </a:p>
         </p:txBody>
@@ -965,17 +891,7 @@
           <a:lstStyle/>
           <a:p>
             <a:r>
-              <a:t>BYOK directs inference to your selected provider and avoids Copilot subscription billing for those calls. Other traffic, telemetry, tool endpoints and residency still need explicit review; local inference alone does not make an application offline. For Microsoft Foundry /openai/v1/ use type='openai'; native Azure endpoints can use type='azure'. Set the deployment name in FOUNDRY_MODEL and full endpoint in FOUNDRY_MODEL_URL. The snippet uses an API key. Alternatively bearer_token_provider can call Azure Identity for fresh Entra tokens, including managed identity; the dedicated guide uses https://ai.azure.com/.default. Azure Identity is optional and not required for the seven workshop prototypes.</a:t>
-            </a:r>
-          </a:p>
-          <a:p>
-            <a:r>
-              <a:t>SOURCE: https://github.com/github/copilot-sdk/blob/v1.0.13/docs/auth/byok.md</a:t>
-            </a:r>
-          </a:p>
-          <a:p>
-            <a:r>
-              <a:t>SOURCE: https://github.com/github/copilot-sdk/blob/v1.0.13/docs/setup/azure-managed-identity.md</a:t>
+              <a:t>Stable ProviderConfig types are openai, azure, and anthropic. OpenAI-compatible local providers can use type openai. A model is required for custom providers. bearer_token_provider takes precedence over static credentials and supports Entra/managed identity. Local inference alone does not make the whole application offline.</a:t>
             </a:r>
           </a:p>
         </p:txBody>
@@ -1061,12 +977,7 @@
           <a:lstStyle/>
           <a:p>
             <a:r>
-              <a:t>The default client owns a child runtime. RuntimeConnection.for_tcp(port=...) also spawns a child, with a generated connection token by default. For an already-running server use CopilotClient(connection=RuntimeConnection.for_uri('localhost:4321', connection_token=...)); supply its matching secret when required. Legacy cli_url is not accepted in Python 1.0.13. Headless defaults to loopback; remote access needs network protection and authentication. Cleanup detaches one owner, not shared state.</a:t>
-            </a:r>
-          </a:p>
-          <a:p>
-            <a:r>
-              <a:t>SOURCE: https://github.com/github/copilot-sdk/blob/v1.0.13/python/copilot/client.py</a:t>
+              <a:t>The default Python client owns a managed stdio child. RuntimeConnection.for_stdio(path=...) uses an explicit complete runtime bundle. for_uri connects to an already-running server; for_tcp starts an owned TCP child. Protect non-loopback endpoints. Multi-tenant mode empty requires explicit storage and tool opt-in.</a:t>
             </a:r>
           </a:p>
         </p:txBody>
@@ -1344,12 +1255,7 @@
           <a:lstStyle/>
           <a:p>
             <a:r>
-              <a:t>The SDK embeds the Copilot CLI agent runtime into an application. The CLI owns planning and built-in tool execution; custom tools, hooks and permission callbacks execute in your host application. Production deployment still requires authentication, authorization, isolation and observability appropriate to your app.</a:t>
-            </a:r>
-          </a:p>
-          <a:p>
-            <a:r>
-              <a:t>SOURCE: https://github.com/github/copilot-sdk/blob/v1.0.13/docs/features/agent-loop.md</a:t>
+              <a:t>GitHub describes the underlying agent runtime as production-tested. Do not expand that into a guarantee about the host application. The SDK packages the runtime; production identity, authorization, isolation, routing, and UI remain application responsibilities.</a:t>
             </a:r>
           </a:p>
         </p:txBody>
@@ -1435,12 +1341,7 @@
           <a:lstStyle/>
           <a:p>
             <a:r>
-              <a:t>Microsoft Agent Framework is an optional orchestration layer for composing Copilot with other model providers. This conceptual diagram illustrates sequential and concurrent workflows; the seven prototypes use Copilot SDK directly and do not depend on Agent Framework. Check the integration's own current package requirements before adopting it.</a:t>
-            </a:r>
-          </a:p>
-          <a:p>
-            <a:r>
-              <a:t>SOURCE: https://github.com/github/copilot-sdk/blob/v1.0.13/docs/integrations/microsoft-agent-framework.md</a:t>
+              <a:t>The eight samples demonstrate a progression, not a complete production platform. Start with a bounded session, add one capability with visible evidence, then add authorization, isolation, observability, routing, and operational controls appropriate to the host application.</a:t>
             </a:r>
           </a:p>
         </p:txBody>
@@ -1526,22 +1427,7 @@
           <a:lstStyle/>
           <a:p>
             <a:r>
-              <a:t>Run python examples/01_simple_chat.py. The left code registers a typed delta listener; the right uses two async context managers and send_and_wait with a 120-second timeout. The full example supplies optional client_info to demonstrate application identity. send_and_wait listens for idle and errors while user listeners still receive deltas. It raises on timeout or session error; None means no final assistant message. Empty tool exposure keeps this text-only demo scoped. Snippets belong inside async main/asyncio.run; imports and on_event are shared between columns.</a:t>
-            </a:r>
-          </a:p>
-          <a:p>
-            <a:r>
-              <a:t>SOURCE: https://github.com/github/copilot-sdk/blob/v1.0.13/docs/features/streaming-events.md</a:t>
-            </a:r>
-          </a:p>
-          <a:p>
-            <a:r>
-              <a:t>SOURCE: https://github.com/github/copilot-sdk/blob/v1.0.13/docs/features/client-info.md</a:t>
-            </a:r>
-          </a:p>
-          <a:p>
-            <a:r>
-              <a:t>PROTOTYPE: examples/01_simple_chat.py</a:t>
+              <a:t>The full sample declares optional client_info, registers the listener before sending, uses a 60-second turn timeout inside a 180-second overall deadline, checks for an absent final message, and unsubscribes in finally.</a:t>
             </a:r>
           </a:p>
         </p:txBody>
@@ -1627,17 +1513,7 @@
           <a:lstStyle/>
           <a:p>
             <a:r>
-              <a:t>Run python examples/02_custom_tools.py. The async Pydantic-typed tool returns simulated random weather. The agent selects the tool from its schema; it is not a live weather API. Restrict available tools to the registered weather handler. Tool cancellation now tracks request/session lifetime, so propagate cancellation and clean up external resources in finally when adapting the stub. The async block shown belongs inside main; the actual file includes it.</a:t>
-            </a:r>
-          </a:p>
-          <a:p>
-            <a:r>
-              <a:t>SOURCE: https://github.com/github/copilot-sdk/tree/v1.0.13/python#tools</a:t>
-            </a:r>
-          </a:p>
-          <a:p>
-            <a:r>
-              <a:t>PROTOTYPE: examples/02_custom_tools.py</a:t>
+              <a:t>The tool schema comes from the module-level Pydantic model. The handler is async, returns explicitly fictional data, uses a source-qualified ToolSet filter, and propagates cancellation. The real sample checks for a missing final reply.</a:t>
             </a:r>
           </a:p>
         </p:txBody>
@@ -1723,22 +1599,7 @@
           <a:lstStyle/>
           <a:p>
             <a:r>
-              <a:t>Run python examples/06_session_resume.py once, then run it with --resume. The two code blocks illustrate separate processes, not two steps to execute every time. Save session.session_id even when it was randomly generated; a custom ID is only a convenience. Resume needs the same CLI state storage. Re-register callbacks, custom tools, MCP and startup managed policy; an omitted injected policy is cleared. The original model is reused unless overridden. Context-manager exit/disconnect preserves disk state; delete_session permanently removes it. Do not create the same ID as a substitute for resume.</a:t>
-            </a:r>
-          </a:p>
-          <a:p>
-            <a:r>
-              <a:t>SOURCE: https://github.com/github/copilot-sdk/blob/v1.0.13/docs/features/session-persistence.md</a:t>
-            </a:r>
-          </a:p>
-          <a:p>
-            <a:r>
-              <a:t>SOURCE: https://github.com/github/copilot-sdk/releases/tag/v1.0.13</a:t>
-            </a:r>
-          </a:p>
-          <a:p>
-            <a:r>
-              <a:t>PROTOTYPE: examples/06_session_resume.py</a:t>
+              <a:t>Persisted conversation context survives detach and process exit when the same CLI state storage is available. A generated session.session_id is resumable. Cold resume must re-register callbacks and tools and re-supply BYOK credentials, MCP authentication/configuration, and startup-only managed settings where applicable.</a:t>
             </a:r>
           </a:p>
         </p:txBody>
@@ -1824,17 +1685,7 @@
           <a:lstStyle/>
           <a:p>
             <a:r>
-              <a:t>Install pinned dependencies, authenticate, then run examples 01-07 with their guides. SDK 1.0.13 provisions runtime 1.0.83; install interactive Copilot CLI separately for login or securely provision a token/BYOK. MCP has separate credentials. Discover models with client.list_models(). Root .npmrc and devcontainer NPM_CONFIG_REGISTRY point npm to https://packagefeedproxy.microsoft.io/npm/; pip is unaffected and these Python/HTTP examples do not need npm. Both editable PowerPoint and custom scroll-snap HTML decks are refreshed.</a:t>
-            </a:r>
-          </a:p>
-          <a:p>
-            <a:r>
-              <a:t>SOURCE: https://github.com/github/copilot-sdk/releases/tag/v1.0.13</a:t>
-            </a:r>
-          </a:p>
-          <a:p>
-            <a:r>
-              <a:t>WORKSHOP: https://github.com/jeffrey-groneberg/ghcp_sdk</a:t>
+              <a:t>Source priority for this workshop: published v1.0.13 package and tag, generated stable types/tests, official language samples, then live runtime evidence. Current main is ahead and pins runtime 1.0.84-5, but it is not the stable workshop contract.</a:t>
             </a:r>
           </a:p>
         </p:txBody>
@@ -1920,17 +1771,7 @@
           <a:lstStyle/>
           <a:p>
             <a:r>
-              <a:t>Run python examples/07_human_in_the_loop.py. read_answer is its bounded daemon-backed console helper. It expires after 30 seconds and prevents competing reads after failure; a blocked default-executor input thread could delay shutdown. The full on_user_input_request maps numbers to choice labels, respects allowFreeform and bounds retries. Legacy uses on_user_input_request; elicitation needs on_elicitation_request. Unknown permissions are denied. The command prints a fixed literal without interpolating the user's name. Turn timeout: 180 seconds; overall deadline: 240 seconds.</a:t>
-            </a:r>
-          </a:p>
-          <a:p>
-            <a:r>
-              <a:t>SOURCE: https://github.com/github/copilot-sdk/tree/v1.0.13/python#permission-handling</a:t>
-            </a:r>
-          </a:p>
-          <a:p>
-            <a:r>
-              <a:t>PROTOTYPE: examples/07_human_in_the_loop.py</a:t>
+              <a:t>The real sample rejects unexpected permission variants and sandbox-bypass requests, validates the POSIX command with shlex into one exact argument vector, surfaces managed_approval_required, and returns UserNotAvailable when human input is unavailable.</a:t>
             </a:r>
           </a:p>
         </p:txBody>
@@ -2016,17 +1857,7 @@
           <a:lstStyle/>
           <a:p>
             <a:r>
-              <a:t>Run python examples/04_hooks.py. The three callbacks distinguish a tool request, successful tool completion and failed tool completion. None keeps the default behavior. The read-oriented available_tools list limits the demonstration but is not an OS security boundary. The snippet assumes an active client and PermissionHandler imported; the actual file includes client lifecycle. Do not market simple regex redaction or prompt instructions as enterprise-grade secret protection.</a:t>
-            </a:r>
-          </a:p>
-          <a:p>
-            <a:r>
-              <a:t>SOURCE: https://github.com/github/copilot-sdk/blob/v1.0.13/docs/features/hooks.md</a:t>
-            </a:r>
-          </a:p>
-          <a:p>
-            <a:r>
-              <a:t>PROTOTYPE: examples/04_hooks.py</a:t>
+              <a:t>The overview documents eight hooks; Python SessionHooks exposes ten, adding on_pre_mcp_tool_call and on_agent_stop. on_post_tool_use is success-only and failure uses on_post_tool_use_failure. Use context managers/finally for host cleanup because one client detach need not end a shared session.</a:t>
             </a:r>
           </a:p>
         </p:txBody>
@@ -2192,12 +2023,7 @@
           <a:lstStyle/>
           <a:p>
             <a:r>
-              <a:t>System prompt customization is retained in stable 1.0.13. Python uses system_message with mode='customize' and section actions. This example replaces tone and exposes no tools. It assumes a running client and PermissionHandler import. Prompt sections shape model behavior; changing them is not a security control or permission bypass. Managed policy, tool exposure and OS sandboxing are separate mechanisms. This is an optional advanced pattern, not an additional runnable prototype.</a:t>
-            </a:r>
-          </a:p>
-          <a:p>
-            <a:r>
-              <a:t>SOURCE: https://github.com/github/copilot-sdk/tree/v1.0.13/python#system-message-customization</a:t>
+              <a:t>SandboxConfig is experimental in v1.0.13 and is applied through session.options.update. The sample denies a disposable vault and network access, then requires one explicit human decision for a bypass. The sandbox constrains runtime-launched tools, not arbitrary host-side Python handlers. The ToolExecutionComplete sandboxed flag alone is not bypass proof.</a:t>
             </a:r>
           </a:p>
         </p:txBody>
@@ -2267,17 +2093,7 @@
           <a:lstStyle/>
           <a:p>
             <a:r>
-              <a:t>The SDK talks to the CLI using JSON-RPC, normally over stdio to a child process or over TCP to an external server. The SDK is not a tenant isolation boundary or load balancer. Version 1.0.13 changes session.disconnect/context-manager cleanup to session.detach so other owners of a shared session are not torn down. Saved state remains until explicitly deleted.</a:t>
-            </a:r>
-          </a:p>
-          <a:p>
-            <a:r>
-              <a:t>SOURCE: https://github.com/github/copilot-sdk/blob/v1.0.13/docs/getting-started.md</a:t>
-            </a:r>
-          </a:p>
-          <a:p>
-            <a:r>
-              <a:t>SOURCE: https://github.com/github/copilot-sdk/releases/tag/v1.0.13</a:t>
+              <a:t>All six SDKs communicate with the runtime using JSON-RPC. The default Python client owns a child runtime; an application can also connect to an existing server. Models and built-in tools vary by runtime, account, platform, policy, and session configuration.</a:t>
             </a:r>
           </a:p>
         </p:txBody>
@@ -2363,17 +2179,7 @@
           <a:lstStyle/>
           <a:p>
             <a:r>
-              <a:t>Six first-party SDKs live in github/copilot-sdk. Python is pinned to github-copilot-sdk==1.0.13 in this workshop and provisions its matching runtime 1.0.83 on first use. Pip does not add the interactive copilot command to PATH: install it separately for copilot login, or securely supply a token/BYOK. Pre-download with python -m copilot download-runtime. Java and Rust are in the main SDK repository. Follow each language's provisioning guide.</a:t>
-            </a:r>
-          </a:p>
-          <a:p>
-            <a:r>
-              <a:t>SOURCE: https://github.com/github/copilot-sdk/blob/v1.0.13/python/copilot/_cli_download.py</a:t>
-            </a:r>
-          </a:p>
-          <a:p>
-            <a:r>
-              <a:t>SOURCE: https://github.com/github/copilot-sdk/blob/v1.0.13/README.md</a:t>
+              <a:t>The general install uses ordinary PyPI. This repository's devcontainer additionally routes pip through the Microsoft package-feed proxy. Authentication is still required. The SDK-managed runtime is downloaded on first use if it was not pre-downloaded.</a:t>
             </a:r>
           </a:p>
         </p:txBody>
@@ -2459,17 +2265,7 @@
           <a:lstStyle/>
           <a:p>
             <a:r>
-              <a:t>Core capabilities: tools, named agents, MCP servers, skills, hooks, streaming, BYOK and telemetry. Eight hook callbacks now include transformed prompts and failed tool results. BYOK supports both static API keys and refreshing bearer token providers; Microsoft Foundry can use Microsoft Entra/managed identity through Azure Identity. Optional Python telemetry dependencies are separate from the seven basic examples.</a:t>
-            </a:r>
-          </a:p>
-          <a:p>
-            <a:r>
-              <a:t>SOURCE: https://github.com/github/copilot-sdk/blob/v1.0.13/docs/features/hooks.md</a:t>
-            </a:r>
-          </a:p>
-          <a:p>
-            <a:r>
-              <a:t>SOURCE: https://github.com/github/copilot-sdk/blob/v1.0.13/docs/setup/azure-managed-identity.md</a:t>
+              <a:t>The core deck teaches eight runnable Python patterns. Optional integrations and exhaustive catalogues are intentionally excluded from the core narrative. Every sample claim maps to the repository or an official stable source.</a:t>
             </a:r>
           </a:p>
         </p:txBody>
@@ -2555,17 +2351,7 @@
           <a:lstStyle/>
           <a:p>
             <a:r>
-              <a:t>Illustrative use cases, not implemented services or guarantees of complete automation. Pair model-generated changes with review and explicit tool scope. GitHub MCP provides repository context; your own tools can integrate internal systems. Microsoft Agent Framework is an optional orchestration layer, not required by these Python prototypes.</a:t>
-            </a:r>
-          </a:p>
-          <a:p>
-            <a:r>
-              <a:t>SOURCE: https://github.com/github/copilot-sdk/blob/v1.0.13/docs/features/agent-loop.md</a:t>
-            </a:r>
-          </a:p>
-          <a:p>
-            <a:r>
-              <a:t>SOURCE: https://github.com/github/copilot-sdk/blob/v1.0.13/docs/integrations/microsoft-agent-framework.md</a:t>
+              <a:t>The SDK is an agent engine, not a tenant boundary, authorization layer, load balancer, scheduler, or observability backend. Production hosts must provide identity, session ownership, workspace/state isolation, routing/concurrency, logging policy, network controls, and least-privilege credentials.</a:t>
             </a:r>
           </a:p>
         </p:txBody>
@@ -2742,12 +2528,7 @@
           <a:lstStyle/>
           <a:p>
             <a:r>
-              <a:t>The exact built-in tool catalogue depends on CLI version, platform and session settings. These are representative names, not a stable exhaustive list. available_tools restricts exposure and excluded_tools removes tools, but neither is an OS sandbox. session_id is an application/SDK concept, not an agent tool. Permission callbacks and managed permissions are separate policy layers.</a:t>
-            </a:r>
-          </a:p>
-          <a:p>
-            <a:r>
-              <a:t>SOURCE: https://github.com/github/copilot-sdk/tree/v1.0.13/python#session-configuration</a:t>
+              <a:t>The exact runtime tool catalogue is not a stable exhaustive list. session_id is shown under lifecycle, not as a tool. Host custom tool handlers execute in the host process unless separately isolated.</a:t>
             </a:r>
           </a:p>
         </p:txBody>
@@ -2817,17 +2598,7 @@
           <a:lstStyle/>
           <a:p>
             <a:r>
-              <a:t>Three controls: session tool exposure, dynamic hooks and injected managed permissions. Source-qualified filters distinguish builtin:, custom: and mcp: names in the merged catalogue. The generic config exposes only builtin:view; example 03 scopes grep/glob/view. Managed settings must not be paired with approve_all. The injected layer is startup-only: re-supply on resume or it is cleared. CLI 1.0.79-5+ is required. Deny/ask compose restrictively; scope and hooks do not create a sandbox.</a:t>
-            </a:r>
-          </a:p>
-          <a:p>
-            <a:r>
-              <a:t>SOURCE: https://github.com/github/copilot-sdk/blob/v1.0.13/python/test_tool_set.py</a:t>
-            </a:r>
-          </a:p>
-          <a:p>
-            <a:r>
-              <a:t>SOURCE: https://github.com/github/copilot-sdk/releases/tag/v1.0.13</a:t>
+              <a:t>on_permission_request is optional; without a handler, requests remain pending for manual resolution. Managed settings use Python dataclass instances, not the old nested dictionary shown previously. approve_all cannot be combined with managed settings. SandboxConfig is experimental.</a:t>
             </a:r>
           </a:p>
         </p:txBody>
@@ -3289,7 +3060,7 @@
                 <a:ea typeface="Calibri" pitchFamily="34" charset="-122"/>
                 <a:cs typeface="Calibri" pitchFamily="34" charset="-120"/>
               </a:rPr>
-              <a:t>Agents for Every App</a:t>
+              <a:t>Eight verified Python patterns</a:t>
             </a:r>
             <a:endParaRPr lang="en-US" sz="2200" dirty="0"/>
           </a:p>
@@ -3330,7 +3101,7 @@
                 <a:ea typeface="Calibri" pitchFamily="34" charset="-122"/>
                 <a:cs typeface="Calibri" pitchFamily="34" charset="-120"/>
               </a:rPr>
-              <a:t>Embed Copilot's agentic workflows in your application</a:t>
+              <a:t>From a bounded first response to MCP, HITL, persistence, and sandboxing</a:t>
             </a:r>
             <a:endParaRPr lang="en-US" sz="1400" dirty="0"/>
           </a:p>
@@ -3721,7 +3492,7 @@
                 <a:ea typeface="Calibri" pitchFamily="34" charset="-122"/>
                 <a:cs typeface="Calibri" pitchFamily="34" charset="-120"/>
               </a:rPr>
-              <a:t>Stable · v1.0.13 · 4 September 2026</a:t>
+              <a:t>Stable · SDK 1.0.13 · runtime 1.0.83</a:t>
             </a:r>
             <a:endParaRPr lang="en-US" sz="1000" dirty="0"/>
           </a:p>
@@ -3762,7 +3533,7 @@
                 <a:ea typeface="Calibri" pitchFamily="34" charset="-122"/>
                 <a:cs typeface="Calibri" pitchFamily="34" charset="-120"/>
               </a:rPr>
-              <a:t>1 / 28</a:t>
+              <a:t>1 / 24</a:t>
             </a:r>
             <a:endParaRPr lang="en-US" sz="900" dirty="0"/>
           </a:p>
@@ -3836,7 +3607,7 @@
                 <a:ea typeface="Calibri" pitchFamily="34" charset="-122"/>
                 <a:cs typeface="Calibri" pitchFamily="34" charset="-120"/>
               </a:rPr>
-              <a:t>Custom Tools</a:t>
+              <a:t>Canonical Session Skeleton</a:t>
             </a:r>
             <a:endParaRPr lang="en-US" sz="2600" dirty="0"/>
           </a:p>
@@ -3901,7 +3672,7 @@
                 <a:ea typeface="Calibri" pitchFamily="34" charset="-122"/>
                 <a:cs typeface="Calibri" pitchFamily="34" charset="-120"/>
               </a:rPr>
-              <a:t>Define custom functions that Copilot can invoke during conversations</a:t>
+              <a:t>Text-only, bounded, explicit lifecycle; permission callbacks are optional</a:t>
             </a:r>
             <a:endParaRPr lang="en-US" sz="1200" dirty="0"/>
           </a:p>
@@ -4012,13 +3783,13 @@
               </a:spcAft>
             </a:pPr>
             <a:r>
-              <a:rPr sz="1300">
+              <a:rPr sz="1600">
                 <a:solidFill>
                   <a:srgbClr val="E6EDF3"/>
                 </a:solidFill>
                 <a:latin typeface="Courier New"/>
               </a:rPr>
-              <a:t xml:space="preserve">from copilot import define_tool</a:t>
+              <a:t xml:space="preserve">from copilot import CopilotClient</a:t>
             </a:r>
           </a:p>
           <a:p>
@@ -4034,13 +3805,13 @@
               </a:spcAft>
             </a:pPr>
             <a:r>
-              <a:rPr sz="1300">
+              <a:rPr sz="1600">
                 <a:solidFill>
                   <a:srgbClr val="E6EDF3"/>
                 </a:solidFill>
                 <a:latin typeface="Courier New"/>
               </a:rPr>
-              <a:t xml:space="preserve">from pydantic import BaseModel, Field</a:t>
+              <a:t xml:space="preserve">async with CopilotClient() as client:</a:t>
             </a:r>
           </a:p>
           <a:p>
@@ -4056,13 +3827,13 @@
               </a:spcAft>
             </a:pPr>
             <a:r>
-              <a:rPr sz="1300">
+              <a:rPr sz="1600">
                 <a:solidFill>
                   <a:srgbClr val="E6EDF3"/>
                 </a:solidFill>
                 <a:latin typeface="Courier New"/>
               </a:rPr>
-              <a:t xml:space="preserve">class WeatherParams(BaseModel):</a:t>
+              <a:t xml:space="preserve">    async with await client.create_session(</a:t>
             </a:r>
           </a:p>
           <a:p>
@@ -4078,13 +3849,13 @@
               </a:spcAft>
             </a:pPr>
             <a:r>
-              <a:rPr sz="1300">
+              <a:rPr sz="1600">
                 <a:solidFill>
                   <a:srgbClr val="E6EDF3"/>
                 </a:solidFill>
                 <a:latin typeface="Courier New"/>
               </a:rPr>
-              <a:t xml:space="preserve">    city: str = Field(description="City name, e.g. Seattle")</a:t>
+              <a:t xml:space="preserve">        available_tools=[],</a:t>
             </a:r>
           </a:p>
           <a:p>
@@ -4100,13 +3871,13 @@
               </a:spcAft>
             </a:pPr>
             <a:r>
-              <a:rPr sz="1300">
+              <a:rPr sz="1600">
                 <a:solidFill>
                   <a:srgbClr val="E6EDF3"/>
                 </a:solidFill>
                 <a:latin typeface="Courier New"/>
               </a:rPr>
-              <a:t xml:space="preserve">@define_tool(description="Get simulated weather for a city")</a:t>
+              <a:t xml:space="preserve">    ) as session:</a:t>
             </a:r>
           </a:p>
           <a:p>
@@ -4122,13 +3893,13 @@
               </a:spcAft>
             </a:pPr>
             <a:r>
-              <a:rPr sz="1300">
+              <a:rPr sz="1600">
                 <a:solidFill>
                   <a:srgbClr val="E6EDF3"/>
                 </a:solidFill>
                 <a:latin typeface="Courier New"/>
               </a:rPr>
-              <a:t xml:space="preserve">async def get_weather(params: WeatherParams) -&gt; dict:</a:t>
+              <a:t xml:space="preserve">        reply = await session.send_and_wait(</a:t>
             </a:r>
           </a:p>
           <a:p>
@@ -4144,13 +3915,13 @@
               </a:spcAft>
             </a:pPr>
             <a:r>
-              <a:rPr sz="1300">
+              <a:rPr sz="1600">
                 <a:solidFill>
                   <a:srgbClr val="E6EDF3"/>
                 </a:solidFill>
                 <a:latin typeface="Courier New"/>
               </a:rPr>
-              <a:t xml:space="preserve">    return {"city": params.city, "temperature_c": 21, "condition": "sunny"}</a:t>
+              <a:t xml:space="preserve">            "Explain the SDK in 3 sentences.", timeout=60,</a:t>
             </a:r>
           </a:p>
           <a:p>
@@ -4166,13 +3937,13 @@
               </a:spcAft>
             </a:pPr>
             <a:r>
-              <a:rPr sz="1300">
+              <a:rPr sz="1600">
                 <a:solidFill>
                   <a:srgbClr val="E6EDF3"/>
                 </a:solidFill>
                 <a:latin typeface="Courier New"/>
               </a:rPr>
-              <a:t xml:space="preserve">async with await client.create_session(</a:t>
+              <a:t xml:space="preserve">        )</a:t>
             </a:r>
           </a:p>
           <a:p>
@@ -4188,13 +3959,13 @@
               </a:spcAft>
             </a:pPr>
             <a:r>
-              <a:rPr sz="1300">
+              <a:rPr sz="1600">
                 <a:solidFill>
                   <a:srgbClr val="E6EDF3"/>
                 </a:solidFill>
                 <a:latin typeface="Courier New"/>
               </a:rPr>
-              <a:t xml:space="preserve">    model="gpt-5-mini", tools=[get_weather],</a:t>
+              <a:t xml:space="preserve">        if reply is None:</a:t>
             </a:r>
           </a:p>
           <a:p>
@@ -4210,13 +3981,13 @@
               </a:spcAft>
             </a:pPr>
             <a:r>
-              <a:rPr sz="1300">
+              <a:rPr sz="1600">
                 <a:solidFill>
                   <a:srgbClr val="E6EDF3"/>
                 </a:solidFill>
                 <a:latin typeface="Courier New"/>
               </a:rPr>
-              <a:t xml:space="preserve">    available_tools=["custom:get_weather"],</a:t>
+              <a:t xml:space="preserve">            raise RuntimeError("No final message")</a:t>
             </a:r>
           </a:p>
           <a:p>
@@ -4232,13 +4003,13 @@
               </a:spcAft>
             </a:pPr>
             <a:r>
-              <a:rPr sz="1300">
+              <a:rPr sz="1600">
                 <a:solidFill>
                   <a:srgbClr val="E6EDF3"/>
                 </a:solidFill>
                 <a:latin typeface="Courier New"/>
               </a:rPr>
-              <a:t xml:space="preserve">    on_permission_request=PermissionHandler.approve_all,</a:t>
+              <a:t xml:space="preserve">        print(reply.data.content)</a:t>
             </a:r>
           </a:p>
           <a:p>
@@ -4260,7 +4031,7 @@
                 </a:solidFill>
                 <a:latin typeface="Courier New"/>
               </a:rPr>
-              <a:t xml:space="preserve">) as session:</a:t>
+              <a:t xml:space="preserve"/>
             </a:r>
           </a:p>
           <a:p>
@@ -4282,7 +4053,7 @@
                 </a:solidFill>
                 <a:latin typeface="Courier New"/>
               </a:rPr>
-              <a:t xml:space="preserve">    await session.send_and_wait("Weather in Berlin?", timeout=120)</a:t>
+              <a:t xml:space="preserve"/>
             </a:r>
           </a:p>
           <a:p>
@@ -4304,7 +4075,7 @@
                 </a:solidFill>
                 <a:latin typeface="Courier New"/>
               </a:rPr>
-              <a:t xml:space="preserve"># v1.0.13 cancels async tool tasks when their request or session ends.</a:t>
+              <a:t xml:space="preserve"/>
             </a:r>
           </a:p>
         </p:txBody>
@@ -4344,7 +4115,7 @@
                 <a:ea typeface="Calibri" pitchFamily="34" charset="-122"/>
                 <a:cs typeface="Calibri" pitchFamily="34" charset="-120"/>
               </a:rPr>
-              <a:t>10 / 28</a:t>
+              <a:t>6 / 24</a:t>
             </a:r>
             <a:endParaRPr lang="en-US" sz="900" dirty="0"/>
           </a:p>
@@ -4418,7 +4189,7 @@
                 <a:ea typeface="Calibri" pitchFamily="34" charset="-122"/>
                 <a:cs typeface="Calibri" pitchFamily="34" charset="-120"/>
               </a:rPr>
-              <a:t>Example 03: Custom Agents</a:t>
+              <a:t>Example 03 · Custom Agents</a:t>
             </a:r>
             <a:endParaRPr lang="en-US" sz="2600" dirty="0"/>
           </a:p>
@@ -4483,7 +4254,7 @@
                 <a:ea typeface="Calibri" pitchFamily="34" charset="-122"/>
                 <a:cs typeface="Calibri" pitchFamily="34" charset="-120"/>
               </a:rPr>
-              <a:t>Researcher to reviewer: change the active persona without losing conversation history</a:t>
+              <a:t>One conversation, explicit persona handoff; agent selection RPC is experimental</a:t>
             </a:r>
             <a:endParaRPr lang="en-US" sz="1200" dirty="0"/>
           </a:p>
@@ -4931,7 +4702,7 @@
                 <a:ea typeface="Calibri" pitchFamily="34" charset="-122"/>
                 <a:cs typeface="Calibri" pitchFamily="34" charset="-120"/>
               </a:rPr>
-              <a:t>Verify with agent.get_current().</a:t>
+              <a:t>Verify with agent.get_current()</a:t>
             </a:r>
             <a:endParaRPr lang="en-US" sz="1000" dirty="0"/>
           </a:p>
@@ -5249,7 +5020,7 @@
                 <a:ea typeface="Calibri" pitchFamily="34" charset="-122"/>
                 <a:cs typeface="Calibri" pitchFamily="34" charset="-120"/>
               </a:rPr>
-              <a:t xml:space="preserve">Python: </a:t>
+              <a:t xml:space="preserve">Register display_name, prompt, and explicit tool restrictions; start with agent="researcher".</a:t>
             </a:r>
             <a:r>
               <a:rPr lang="en-US" sz="1100" dirty="0">
@@ -5260,7 +5031,7 @@
                 <a:ea typeface="Calibri" pitchFamily="34" charset="-122"/>
                 <a:cs typeface="Calibri" pitchFamily="34" charset="-120"/>
               </a:rPr>
-              <a:t xml:space="preserve">Register custom_agents; start with agent="researcher". Scope tools at session level too.</a:t>
+              <a:t xml:space="preserve"/>
             </a:r>
             <a:r>
               <a:rPr lang="en-US" sz="1100" dirty="0">
@@ -5323,7 +5094,7 @@
                 <a:ea typeface="Calibri" pitchFamily="34" charset="-122"/>
                 <a:cs typeface="Calibri" pitchFamily="34" charset="-120"/>
               </a:rPr>
-              <a:t>11 / 28</a:t>
+              <a:t>11 / 24</a:t>
             </a:r>
             <a:endParaRPr lang="en-US" sz="900" dirty="0"/>
           </a:p>
@@ -5397,7 +5168,7 @@
                 <a:ea typeface="Calibri" pitchFamily="34" charset="-122"/>
                 <a:cs typeface="Calibri" pitchFamily="34" charset="-120"/>
               </a:rPr>
-              <a:t>Example 05: GitHub MCP</a:t>
+              <a:t>Example 05 · Remote GitHub MCP</a:t>
             </a:r>
             <a:endParaRPr lang="en-US" sz="2600" dirty="0"/>
           </a:p>
@@ -5462,7 +5233,7 @@
                 <a:ea typeface="Calibri" pitchFamily="34" charset="-122"/>
                 <a:cs typeface="Calibri" pitchFamily="34" charset="-120"/>
               </a:rPr>
-              <a:t>Model Context Protocol — open standard for connecting AI to external tools</a:t>
+              <a:t>Generic MCP connections own separate authentication; the sample requires a live tool event</a:t>
             </a:r>
             <a:endParaRPr lang="en-US" sz="1200" dirty="0"/>
           </a:p>
@@ -5539,7 +5310,7 @@
                 <a:ea typeface="Calibri" pitchFamily="34" charset="-122"/>
                 <a:cs typeface="Calibri" pitchFamily="34" charset="-120"/>
               </a:rPr>
-              <a:t>Local / Stdio</a:t>
+              <a:t>Connection</a:t>
             </a:r>
             <a:endParaRPr lang="en-US" sz="1400" dirty="0"/>
           </a:p>
@@ -5580,7 +5351,7 @@
                 <a:ea typeface="Calibri" pitchFamily="34" charset="-122"/>
                 <a:cs typeface="Calibri" pitchFamily="34" charset="-120"/>
               </a:rPr>
-              <a:t>Runs as a subprocess, communicates via stdin/stdout</a:t>
+              <a:t>Remote HTTP endpoint</a:t>
             </a:r>
             <a:endParaRPr lang="en-US" sz="1000" dirty="0"/>
           </a:p>
@@ -5621,7 +5392,7 @@
                 <a:ea typeface="Calibri" pitchFamily="34" charset="-122"/>
                 <a:cs typeface="Calibri" pitchFamily="34" charset="-120"/>
               </a:rPr>
-              <a:t>Local tools, file access, scripts</a:t>
+              <a:t>Bearer token in this sample; OAuth is also supported</a:t>
             </a:r>
             <a:endParaRPr lang="en-US" sz="900" dirty="0"/>
           </a:p>
@@ -5698,7 +5469,7 @@
                 <a:ea typeface="Calibri" pitchFamily="34" charset="-122"/>
                 <a:cs typeface="Calibri" pitchFamily="34" charset="-120"/>
               </a:rPr>
-              <a:t>Remote / HTTP</a:t>
+              <a:t>Evidence</a:t>
             </a:r>
             <a:endParaRPr lang="en-US" sz="1400" dirty="0"/>
           </a:p>
@@ -5739,7 +5510,7 @@
                 <a:ea typeface="Calibri" pitchFamily="34" charset="-122"/>
                 <a:cs typeface="Calibri" pitchFamily="34" charset="-120"/>
               </a:rPr>
-              <a:t>Accessed via HTTP endpoint, supports SSE</a:t>
+              <a:t>ToolExecutionStartData</a:t>
             </a:r>
             <a:endParaRPr lang="en-US" sz="1000" dirty="0"/>
           </a:p>
@@ -5780,7 +5551,7 @@
                 <a:ea typeface="Calibri" pitchFamily="34" charset="-122"/>
                 <a:cs typeface="Calibri" pitchFamily="34" charset="-120"/>
               </a:rPr>
-              <a:t>Shared services, cloud tools</a:t>
+              <a:t>No matching event means sample failure</a:t>
             </a:r>
             <a:endParaRPr lang="en-US" sz="900" dirty="0"/>
           </a:p>
@@ -5922,13 +5693,13 @@
               </a:spcAft>
             </a:pPr>
             <a:r>
-              <a:rPr sz="1000">
+              <a:rPr sz="1400">
                 <a:solidFill>
                   <a:srgbClr val="E6EDF3"/>
                 </a:solidFill>
                 <a:latin typeface="Courier New"/>
               </a:rPr>
-              <a:t xml:space="preserve">mcp_servers = {"github": {</a:t>
+              <a:t xml:space="preserve">token = github_token()</a:t>
             </a:r>
           </a:p>
           <a:p>
@@ -5944,13 +5715,13 @@
               </a:spcAft>
             </a:pPr>
             <a:r>
-              <a:rPr sz="1000">
+              <a:rPr sz="1400">
                 <a:solidFill>
                   <a:srgbClr val="E6EDF3"/>
                 </a:solidFill>
                 <a:latin typeface="Courier New"/>
               </a:rPr>
-              <a:t xml:space="preserve">    "type": "http", "url": "https://api.githubcopilot.com/mcp/",</a:t>
+              <a:t xml:space="preserve">mcp_servers = {"github": {</a:t>
             </a:r>
           </a:p>
           <a:p>
@@ -5966,13 +5737,13 @@
               </a:spcAft>
             </a:pPr>
             <a:r>
-              <a:rPr sz="1000">
+              <a:rPr sz="1400">
                 <a:solidFill>
                   <a:srgbClr val="E6EDF3"/>
                 </a:solidFill>
                 <a:latin typeface="Courier New"/>
               </a:rPr>
-              <a:t xml:space="preserve">    "headers": {"Authorization": f"Bearer {github_token()}"},</a:t>
+              <a:t xml:space="preserve">  "type": "http", "url": "https://api.githubcopilot.com/mcp/",</a:t>
             </a:r>
           </a:p>
           <a:p>
@@ -5988,13 +5759,13 @@
               </a:spcAft>
             </a:pPr>
             <a:r>
-              <a:rPr sz="1000">
+              <a:rPr sz="1400">
                 <a:solidFill>
                   <a:srgbClr val="E6EDF3"/>
                 </a:solidFill>
                 <a:latin typeface="Courier New"/>
               </a:rPr>
-              <a:t xml:space="preserve">    "tools": ["list_issues", "issue_read", "search_issues"],</a:t>
+              <a:t xml:space="preserve">  "headers": {"Authorization": f"Bearer {token}",</a:t>
             </a:r>
           </a:p>
           <a:p>
@@ -6010,13 +5781,13 @@
               </a:spcAft>
             </a:pPr>
             <a:r>
-              <a:rPr sz="1000">
+              <a:rPr sz="1400">
                 <a:solidFill>
                   <a:srgbClr val="E6EDF3"/>
                 </a:solidFill>
                 <a:latin typeface="Courier New"/>
               </a:rPr>
-              <a:t xml:space="preserve">}}</a:t>
+              <a:t xml:space="preserve">              "X-MCP-Readonly": "true"},</a:t>
             </a:r>
           </a:p>
           <a:p>
@@ -6032,13 +5803,13 @@
               </a:spcAft>
             </a:pPr>
             <a:r>
-              <a:rPr sz="1000">
+              <a:rPr sz="1400">
                 <a:solidFill>
                   <a:srgbClr val="E6EDF3"/>
                 </a:solidFill>
                 <a:latin typeface="Courier New"/>
               </a:rPr>
-              <a:t xml:space="preserve">async with await client.create_session(</a:t>
+              <a:t xml:space="preserve">  "tools": GITHUB_TOOLS,</a:t>
             </a:r>
           </a:p>
           <a:p>
@@ -6054,13 +5825,13 @@
               </a:spcAft>
             </a:pPr>
             <a:r>
-              <a:rPr sz="1000">
+              <a:rPr sz="1400">
                 <a:solidFill>
                   <a:srgbClr val="E6EDF3"/>
                 </a:solidFill>
                 <a:latin typeface="Courier New"/>
               </a:rPr>
-              <a:t xml:space="preserve">    model="gpt-5-mini", mcp_servers=mcp_servers,</a:t>
+              <a:t xml:space="preserve">}}</a:t>
             </a:r>
           </a:p>
           <a:p>
@@ -6076,13 +5847,13 @@
               </a:spcAft>
             </a:pPr>
             <a:r>
-              <a:rPr sz="1000">
+              <a:rPr sz="1400">
                 <a:solidFill>
                   <a:srgbClr val="E6EDF3"/>
                 </a:solidFill>
                 <a:latin typeface="Courier New"/>
               </a:rPr>
-              <a:t xml:space="preserve">    available_tools=["mcp:github-list_issues"],</a:t>
+              <a:t xml:space="preserve">available = ToolSet().add_mcp("github-list_issues")</a:t>
             </a:r>
           </a:p>
           <a:p>
@@ -6098,13 +5869,13 @@
               </a:spcAft>
             </a:pPr>
             <a:r>
-              <a:rPr sz="1000">
+              <a:rPr sz="1400">
                 <a:solidFill>
                   <a:srgbClr val="E6EDF3"/>
                 </a:solidFill>
                 <a:latin typeface="Courier New"/>
               </a:rPr>
-              <a:t xml:space="preserve">    on_permission_request=PermissionHandler.approve_all,</a:t>
+              <a:t xml:space="preserve">session = await client.create_session(</a:t>
             </a:r>
           </a:p>
           <a:p>
@@ -6120,13 +5891,13 @@
               </a:spcAft>
             </a:pPr>
             <a:r>
-              <a:rPr sz="1000">
+              <a:rPr sz="1400">
                 <a:solidFill>
                   <a:srgbClr val="E6EDF3"/>
                 </a:solidFill>
                 <a:latin typeface="Courier New"/>
               </a:rPr>
-              <a:t xml:space="preserve">) as session:</a:t>
+              <a:t xml:space="preserve">  mcp_servers=mcp_servers, available_tools=available,</a:t>
             </a:r>
           </a:p>
           <a:p>
@@ -6142,13 +5913,13 @@
               </a:spcAft>
             </a:pPr>
             <a:r>
-              <a:rPr sz="1000">
+              <a:rPr sz="1400">
                 <a:solidFill>
                   <a:srgbClr val="E6EDF3"/>
                 </a:solidFill>
                 <a:latin typeface="Courier New"/>
               </a:rPr>
-              <a:t xml:space="preserve">    await session.send_and_wait("List recent issues on github/copilot-sdk.", timeout=180)</a:t>
+              <a:t xml:space="preserve">  on_permission_request=PermissionHandler.approve_all)</a:t>
             </a:r>
           </a:p>
         </p:txBody>
@@ -6188,7 +5959,7 @@
                 <a:ea typeface="Calibri" pitchFamily="34" charset="-122"/>
                 <a:cs typeface="Calibri" pitchFamily="34" charset="-120"/>
               </a:rPr>
-              <a:t>12 / 28</a:t>
+              <a:t>13 / 24</a:t>
             </a:r>
             <a:endParaRPr lang="en-US" sz="900" dirty="0"/>
           </a:p>
@@ -6262,7 +6033,7 @@
                 <a:ea typeface="Calibri" pitchFamily="34" charset="-122"/>
                 <a:cs typeface="Calibri" pitchFamily="34" charset="-120"/>
               </a:rPr>
-              <a:t>Hooks — Documented Lifecycle</a:t>
+              <a:t>HITL Mental Model</a:t>
             </a:r>
             <a:endParaRPr lang="en-US" sz="2600" dirty="0"/>
           </a:p>
@@ -6356,7 +6127,7 @@
                 <a:ea typeface="Consolas" pitchFamily="34" charset="-122"/>
                 <a:cs typeface="Consolas" pitchFamily="34" charset="-120"/>
               </a:rPr>
-              <a:t>on_session_start</a:t>
+              <a:t>Information request</a:t>
             </a:r>
             <a:endParaRPr lang="en-US" sz="1200" dirty="0"/>
           </a:p>
@@ -6397,7 +6168,7 @@
                 <a:ea typeface="Calibri" pitchFamily="34" charset="-122"/>
                 <a:cs typeface="Calibri" pitchFamily="34" charset="-120"/>
               </a:rPr>
-              <a:t>Add context, audit logging</a:t>
+              <a:t>Legacy Q&amp;A or structured elicitation</a:t>
             </a:r>
             <a:endParaRPr lang="en-US" sz="1100" dirty="0"/>
           </a:p>
@@ -6467,7 +6238,7 @@
                 <a:ea typeface="Consolas" pitchFamily="34" charset="-122"/>
                 <a:cs typeface="Consolas" pitchFamily="34" charset="-120"/>
               </a:rPr>
-              <a:t>Prompt hooks (2)</a:t>
+              <a:t>Host validates schema</a:t>
             </a:r>
             <a:endParaRPr lang="en-US" sz="1200" dirty="0"/>
           </a:p>
@@ -6508,7 +6279,7 @@
                 <a:ea typeface="Calibri" pitchFamily="34" charset="-122"/>
                 <a:cs typeface="Calibri" pitchFamily="34" charset="-120"/>
               </a:rPr>
-              <a:t>Submitted input / transformed model prompt</a:t>
+              <a:t>Collect only expected fields</a:t>
             </a:r>
             <a:endParaRPr lang="en-US" sz="1100" dirty="0"/>
           </a:p>
@@ -6578,7 +6349,7 @@
                 <a:ea typeface="Consolas" pitchFamily="34" charset="-122"/>
                 <a:cs typeface="Consolas" pitchFamily="34" charset="-120"/>
               </a:rPr>
-              <a:t>on_pre_tool_use</a:t>
+              <a:t>Action approval</a:t>
             </a:r>
             <a:endParaRPr lang="en-US" sz="1200" dirty="0"/>
           </a:p>
@@ -6619,7 +6390,7 @@
                 <a:ea typeface="Calibri" pitchFamily="34" charset="-122"/>
                 <a:cs typeface="Calibri" pitchFamily="34" charset="-120"/>
               </a:rPr>
-              <a:t>Approve, deny, or modify tool calls</a:t>
+              <a:t>Typed permission request</a:t>
             </a:r>
             <a:endParaRPr lang="en-US" sz="1100" dirty="0"/>
           </a:p>
@@ -6689,7 +6460,7 @@
                 <a:ea typeface="Consolas" pitchFamily="34" charset="-122"/>
                 <a:cs typeface="Consolas" pitchFamily="34" charset="-120"/>
               </a:rPr>
-              <a:t>Tool-result hooks (2)</a:t>
+              <a:t>Policy before prompt</a:t>
             </a:r>
             <a:endParaRPr lang="en-US" sz="1200" dirty="0"/>
           </a:p>
@@ -6730,7 +6501,7 @@
                 <a:ea typeface="Calibri" pitchFamily="34" charset="-122"/>
                 <a:cs typeface="Calibri" pitchFamily="34" charset="-120"/>
               </a:rPr>
-              <a:t>Success / failure are separate callbacks</a:t>
+              <a:t>Approve once, reject, or unavailable</a:t>
             </a:r>
             <a:endParaRPr lang="en-US" sz="1100" dirty="0"/>
           </a:p>
@@ -6800,7 +6571,7 @@
                 <a:ea typeface="Consolas" pitchFamily="34" charset="-122"/>
                 <a:cs typeface="Consolas" pitchFamily="34" charset="-120"/>
               </a:rPr>
-              <a:t>on_error_occurred</a:t>
+              <a:t>Sandbox bypass</a:t>
             </a:r>
             <a:endParaRPr lang="en-US" sz="1200" dirty="0"/>
           </a:p>
@@ -6841,7 +6612,7 @@
                 <a:ea typeface="Calibri" pitchFamily="34" charset="-122"/>
                 <a:cs typeface="Calibri" pitchFamily="34" charset="-120"/>
               </a:rPr>
-              <a:t>Custom error handling, retry logic</a:t>
+              <a:t>Separate request outside containment</a:t>
             </a:r>
             <a:endParaRPr lang="en-US" sz="1100" dirty="0"/>
           </a:p>
@@ -6911,7 +6682,7 @@
                 <a:ea typeface="Consolas" pitchFamily="34" charset="-122"/>
                 <a:cs typeface="Consolas" pitchFamily="34" charset="-120"/>
               </a:rPr>
-              <a:t>on_session_end</a:t>
+              <a:t>Fail closed</a:t>
             </a:r>
             <a:endParaRPr lang="en-US" sz="1200" dirty="0"/>
           </a:p>
@@ -6952,7 +6723,7 @@
                 <a:ea typeface="Calibri" pitchFamily="34" charset="-122"/>
                 <a:cs typeface="Calibri" pitchFamily="34" charset="-120"/>
               </a:rPr>
-              <a:t>Cleanup, finalize audit trail</a:t>
+              <a:t>Timeout and missing human are not approval</a:t>
             </a:r>
             <a:endParaRPr lang="en-US" sz="1100" dirty="0"/>
           </a:p>
@@ -6993,7 +6764,7 @@
                 <a:ea typeface="Calibri" pitchFamily="34" charset="-122"/>
                 <a:cs typeface="Calibri" pitchFamily="34" charset="-120"/>
               </a:rPr>
-              <a:t>Eight overview hooks; Python also exposes on_pre_mcp_tool_call and on_agent_stop.</a:t>
+              <a:t>Never reuse an information answer as action or bypass consent.</a:t>
             </a:r>
             <a:endParaRPr lang="en-US" sz="1000" dirty="0"/>
           </a:p>
@@ -7034,7 +6805,7 @@
                 <a:ea typeface="Calibri" pitchFamily="34" charset="-122"/>
                 <a:cs typeface="Calibri" pitchFamily="34" charset="-120"/>
               </a:rPr>
-              <a:t>13 / 28</a:t>
+              <a:t>15 / 24</a:t>
             </a:r>
             <a:endParaRPr lang="en-US" sz="900" dirty="0"/>
           </a:p>
@@ -7108,7 +6879,7 @@
                 <a:ea typeface="Calibri" pitchFamily="34" charset="-122"/>
                 <a:cs typeface="Calibri" pitchFamily="34" charset="-120"/>
               </a:rPr>
-              <a:t>Authentication Methods</a:t>
+              <a:t>Multi-User Identity</a:t>
             </a:r>
             <a:endParaRPr lang="en-US" sz="2600" dirty="0"/>
           </a:p>
@@ -7189,25 +6960,9 @@
                     <a:bodyPr/>
                     <a:lstStyle/>
                     <a:p>
-                      <a:pPr marL="0" indent="0">
-                        <a:buNone/>
-                      </a:pPr>
                       <a:r>
-                        <a:rPr lang="en-US" sz="1200" b="1" dirty="0">
-                          <a:solidFill>
-                            <a:srgbClr val="FFFFFF"/>
-                          </a:solidFill>
-                          <a:latin typeface="Calibri" pitchFamily="34" charset="0"/>
-                          <a:ea typeface="Calibri" pitchFamily="34" charset="-122"/>
-                          <a:cs typeface="Calibri" pitchFamily="34" charset="-120"/>
-                        </a:rPr>
                         <a:t>Method</a:t>
                       </a:r>
-                      <a:endParaRPr lang="en-US" sz="1200" dirty="0">
-                        <a:latin typeface="Calibri" charset="0"/>
-                        <a:ea typeface="Calibri" charset="0"/>
-                        <a:cs typeface="Calibri" charset="0"/>
-                      </a:endParaRPr>
                     </a:p>
                   </a:txBody>
                   <a:tcPr marL="182880" marR="182880" marT="91440" marB="91440">
@@ -7257,25 +7012,9 @@
                     <a:bodyPr/>
                     <a:lstStyle/>
                     <a:p>
-                      <a:pPr marL="0" indent="0">
-                        <a:buNone/>
-                      </a:pPr>
                       <a:r>
-                        <a:rPr lang="en-US" sz="1200" b="1" dirty="0">
-                          <a:solidFill>
-                            <a:srgbClr val="FFFFFF"/>
-                          </a:solidFill>
-                          <a:latin typeface="Calibri" pitchFamily="34" charset="0"/>
-                          <a:ea typeface="Calibri" pitchFamily="34" charset="-122"/>
-                          <a:cs typeface="Calibri" pitchFamily="34" charset="-120"/>
-                        </a:rPr>
-                        <a:t>Use Case</a:t>
+                        <a:t>Use case</a:t>
                       </a:r>
-                      <a:endParaRPr lang="en-US" sz="1200" dirty="0">
-                        <a:latin typeface="Calibri" charset="0"/>
-                        <a:ea typeface="Calibri" charset="0"/>
-                        <a:cs typeface="Calibri" charset="0"/>
-                      </a:endParaRPr>
                     </a:p>
                   </a:txBody>
                   <a:tcPr marL="182880" marR="182880" marT="91440" marB="91440">
@@ -7325,25 +7064,9 @@
                     <a:bodyPr/>
                     <a:lstStyle/>
                     <a:p>
-                      <a:pPr marL="0" indent="0">
-                        <a:buNone/>
-                      </a:pPr>
                       <a:r>
-                        <a:rPr lang="en-US" sz="1200" b="1" dirty="0">
-                          <a:solidFill>
-                            <a:srgbClr val="FFFFFF"/>
-                          </a:solidFill>
-                          <a:latin typeface="Calibri" pitchFamily="34" charset="0"/>
-                          <a:ea typeface="Calibri" pitchFamily="34" charset="-122"/>
-                          <a:cs typeface="Calibri" pitchFamily="34" charset="-120"/>
-                        </a:rPr>
-                        <a:t>Subscription</a:t>
+                        <a:t>Billing / identity boundary</a:t>
                       </a:r>
-                      <a:endParaRPr lang="en-US" sz="1200" dirty="0">
-                        <a:latin typeface="Calibri" charset="0"/>
-                        <a:ea typeface="Calibri" charset="0"/>
-                        <a:cs typeface="Calibri" charset="0"/>
-                      </a:endParaRPr>
                     </a:p>
                   </a:txBody>
                   <a:tcPr marL="182880" marR="182880" marT="91440" marB="91440">
@@ -7400,25 +7123,9 @@
                     <a:bodyPr/>
                     <a:lstStyle/>
                     <a:p>
-                      <a:pPr marL="0" indent="0">
-                        <a:buNone/>
-                      </a:pPr>
                       <a:r>
-                        <a:rPr lang="en-US" sz="1100" dirty="0">
-                          <a:solidFill>
-                            <a:srgbClr val="C9D1D9"/>
-                          </a:solidFill>
-                          <a:latin typeface="Calibri" pitchFamily="34" charset="0"/>
-                          <a:ea typeface="Calibri" pitchFamily="34" charset="-122"/>
-                          <a:cs typeface="Calibri" pitchFamily="34" charset="-120"/>
-                        </a:rPr>
-                        <a:t>GitHub Signed-in User</a:t>
+                        <a:t>Signed-in user (CLI login)</a:t>
                       </a:r>
-                      <a:endParaRPr lang="en-US" sz="1100" dirty="0">
-                        <a:latin typeface="Calibri" charset="0"/>
-                        <a:ea typeface="Calibri" charset="0"/>
-                        <a:cs typeface="Calibri" charset="0"/>
-                      </a:endParaRPr>
                     </a:p>
                   </a:txBody>
                   <a:tcPr marL="182880" marR="182880" marT="91440" marB="91440">
@@ -7468,25 +7175,9 @@
                     <a:bodyPr/>
                     <a:lstStyle/>
                     <a:p>
-                      <a:pPr marL="0" indent="0">
-                        <a:buNone/>
-                      </a:pPr>
                       <a:r>
-                        <a:rPr lang="en-US" sz="1100" dirty="0">
-                          <a:solidFill>
-                            <a:srgbClr val="C9D1D9"/>
-                          </a:solidFill>
-                          <a:latin typeface="Calibri" pitchFamily="34" charset="0"/>
-                          <a:ea typeface="Calibri" pitchFamily="34" charset="-122"/>
-                          <a:cs typeface="Calibri" pitchFamily="34" charset="-120"/>
-                        </a:rPr>
-                        <a:t>Interactive apps, desktop tools</a:t>
+                        <a:t>Local and desktop</a:t>
                       </a:r>
-                      <a:endParaRPr lang="en-US" sz="1100" dirty="0">
-                        <a:latin typeface="Calibri" charset="0"/>
-                        <a:ea typeface="Calibri" charset="0"/>
-                        <a:cs typeface="Calibri" charset="0"/>
-                      </a:endParaRPr>
                     </a:p>
                   </a:txBody>
                   <a:tcPr marL="182880" marR="182880" marT="91440" marB="91440">
@@ -7536,25 +7227,9 @@
                     <a:bodyPr/>
                     <a:lstStyle/>
                     <a:p>
-                      <a:pPr marL="0" indent="0">
-                        <a:buNone/>
-                      </a:pPr>
                       <a:r>
-                        <a:rPr lang="en-US" sz="1100" b="1" dirty="0">
-                          <a:solidFill>
-                            <a:srgbClr val="F0883E"/>
-                          </a:solidFill>
-                          <a:latin typeface="Calibri" pitchFamily="34" charset="0"/>
-                          <a:ea typeface="Calibri" pitchFamily="34" charset="-122"/>
-                          <a:cs typeface="Calibri" pitchFamily="34" charset="-120"/>
-                        </a:rPr>
-                        <a:t>Required</a:t>
+                        <a:t>User entitlement</a:t>
                       </a:r>
-                      <a:endParaRPr lang="en-US" sz="1100" dirty="0">
-                        <a:latin typeface="Calibri" charset="0"/>
-                        <a:ea typeface="Calibri" charset="0"/>
-                        <a:cs typeface="Calibri" charset="0"/>
-                      </a:endParaRPr>
                     </a:p>
                   </a:txBody>
                   <a:tcPr marL="182880" marR="182880" marT="91440" marB="91440">
@@ -7611,25 +7286,9 @@
                     <a:bodyPr/>
                     <a:lstStyle/>
                     <a:p>
-                      <a:pPr marL="0" indent="0">
-                        <a:buNone/>
-                      </a:pPr>
                       <a:r>
-                        <a:rPr lang="en-US" sz="1100" dirty="0">
-                          <a:solidFill>
-                            <a:srgbClr val="C9D1D9"/>
-                          </a:solidFill>
-                          <a:latin typeface="Calibri" pitchFamily="34" charset="0"/>
-                          <a:ea typeface="Calibri" pitchFamily="34" charset="-122"/>
-                          <a:cs typeface="Calibri" pitchFamily="34" charset="-120"/>
-                        </a:rPr>
-                        <a:t>OAuth GitHub App</a:t>
+                        <a:t>OAuth App / GitHub App user token</a:t>
                       </a:r>
-                      <a:endParaRPr lang="en-US" sz="1100" dirty="0">
-                        <a:latin typeface="Calibri" charset="0"/>
-                        <a:ea typeface="Calibri" charset="0"/>
-                        <a:cs typeface="Calibri" charset="0"/>
-                      </a:endParaRPr>
                     </a:p>
                   </a:txBody>
                   <a:tcPr marL="182880" marR="182880" marT="91440" marB="91440">
@@ -7679,25 +7338,9 @@
                     <a:bodyPr/>
                     <a:lstStyle/>
                     <a:p>
-                      <a:pPr marL="0" indent="0">
-                        <a:buNone/>
-                      </a:pPr>
                       <a:r>
-                        <a:rPr lang="en-US" sz="1100" dirty="0">
-                          <a:solidFill>
-                            <a:srgbClr val="C9D1D9"/>
-                          </a:solidFill>
-                          <a:latin typeface="Calibri" pitchFamily="34" charset="0"/>
-                          <a:ea typeface="Calibri" pitchFamily="34" charset="-122"/>
-                          <a:cs typeface="Calibri" pitchFamily="34" charset="-120"/>
-                        </a:rPr>
-                        <a:t>Web apps, SaaS platforms</a:t>
+                        <a:t>Multi-user SaaS</a:t>
                       </a:r>
-                      <a:endParaRPr lang="en-US" sz="1100" dirty="0">
-                        <a:latin typeface="Calibri" charset="0"/>
-                        <a:ea typeface="Calibri" charset="0"/>
-                        <a:cs typeface="Calibri" charset="0"/>
-                      </a:endParaRPr>
                     </a:p>
                   </a:txBody>
                   <a:tcPr marL="182880" marR="182880" marT="91440" marB="91440">
@@ -7747,25 +7390,9 @@
                     <a:bodyPr/>
                     <a:lstStyle/>
                     <a:p>
-                      <a:pPr marL="0" indent="0">
-                        <a:buNone/>
-                      </a:pPr>
                       <a:r>
-                        <a:rPr lang="en-US" sz="1100" b="1" dirty="0">
-                          <a:solidFill>
-                            <a:srgbClr val="F0883E"/>
-                          </a:solidFill>
-                          <a:latin typeface="Calibri" pitchFamily="34" charset="0"/>
-                          <a:ea typeface="Calibri" pitchFamily="34" charset="-122"/>
-                          <a:cs typeface="Calibri" pitchFamily="34" charset="-120"/>
-                        </a:rPr>
-                        <a:t>Required</a:t>
+                        <a:t>User + organization</a:t>
                       </a:r>
-                      <a:endParaRPr lang="en-US" sz="1100" dirty="0">
-                        <a:latin typeface="Calibri" charset="0"/>
-                        <a:ea typeface="Calibri" charset="0"/>
-                        <a:cs typeface="Calibri" charset="0"/>
-                      </a:endParaRPr>
                     </a:p>
                   </a:txBody>
                   <a:tcPr marL="182880" marR="182880" marT="91440" marB="91440">
@@ -7822,25 +7449,9 @@
                     <a:bodyPr/>
                     <a:lstStyle/>
                     <a:p>
-                      <a:pPr marL="0" indent="0">
-                        <a:buNone/>
-                      </a:pPr>
                       <a:r>
-                        <a:rPr lang="en-US" sz="1100" dirty="0">
-                          <a:solidFill>
-                            <a:srgbClr val="C9D1D9"/>
-                          </a:solidFill>
-                          <a:latin typeface="Calibri" pitchFamily="34" charset="0"/>
-                          <a:ea typeface="Calibri" pitchFamily="34" charset="-122"/>
-                          <a:cs typeface="Calibri" pitchFamily="34" charset="-120"/>
-                        </a:rPr>
-                        <a:t>Environment Variables</a:t>
+                        <a:t>Environment / installation token</a:t>
                       </a:r>
-                      <a:endParaRPr lang="en-US" sz="1100" dirty="0">
-                        <a:latin typeface="Calibri" charset="0"/>
-                        <a:ea typeface="Calibri" charset="0"/>
-                        <a:cs typeface="Calibri" charset="0"/>
-                      </a:endParaRPr>
                     </a:p>
                   </a:txBody>
                   <a:tcPr marL="182880" marR="182880" marT="91440" marB="91440">
@@ -7890,25 +7501,9 @@
                     <a:bodyPr/>
                     <a:lstStyle/>
                     <a:p>
-                      <a:pPr marL="0" indent="0">
-                        <a:buNone/>
-                      </a:pPr>
                       <a:r>
-                        <a:rPr lang="en-US" sz="1100" dirty="0">
-                          <a:solidFill>
-                            <a:srgbClr val="C9D1D9"/>
-                          </a:solidFill>
-                          <a:latin typeface="Calibri" pitchFamily="34" charset="0"/>
-                          <a:ea typeface="Calibri" pitchFamily="34" charset="-122"/>
-                          <a:cs typeface="Calibri" pitchFamily="34" charset="-120"/>
-                        </a:rPr>
-                        <a:t>CI/CD, automation, server-to-server</a:t>
+                        <a:t>Automation / backend</a:t>
                       </a:r>
-                      <a:endParaRPr lang="en-US" sz="1100" dirty="0">
-                        <a:latin typeface="Calibri" charset="0"/>
-                        <a:ea typeface="Calibri" charset="0"/>
-                        <a:cs typeface="Calibri" charset="0"/>
-                      </a:endParaRPr>
                     </a:p>
                   </a:txBody>
                   <a:tcPr marL="182880" marR="182880" marT="91440" marB="91440">
@@ -7958,25 +7553,9 @@
                     <a:bodyPr/>
                     <a:lstStyle/>
                     <a:p>
-                      <a:pPr marL="0" indent="0">
-                        <a:buNone/>
-                      </a:pPr>
                       <a:r>
-                        <a:rPr lang="en-US" sz="1100" b="1" dirty="0">
-                          <a:solidFill>
-                            <a:srgbClr val="F0883E"/>
-                          </a:solidFill>
-                          <a:latin typeface="Calibri" pitchFamily="34" charset="0"/>
-                          <a:ea typeface="Calibri" pitchFamily="34" charset="-122"/>
-                          <a:cs typeface="Calibri" pitchFamily="34" charset="-120"/>
-                        </a:rPr>
-                        <a:t>Required</a:t>
+                        <a:t>Token owner + organization policy</a:t>
                       </a:r>
-                      <a:endParaRPr lang="en-US" sz="1100" dirty="0">
-                        <a:latin typeface="Calibri" charset="0"/>
-                        <a:ea typeface="Calibri" charset="0"/>
-                        <a:cs typeface="Calibri" charset="0"/>
-                      </a:endParaRPr>
                     </a:p>
                   </a:txBody>
                   <a:tcPr marL="182880" marR="182880" marT="91440" marB="91440">
@@ -8033,25 +7612,9 @@
                     <a:bodyPr/>
                     <a:lstStyle/>
                     <a:p>
-                      <a:pPr marL="0" indent="0">
-                        <a:buNone/>
-                      </a:pPr>
                       <a:r>
-                        <a:rPr lang="en-US" sz="1100" dirty="0">
-                          <a:solidFill>
-                            <a:srgbClr val="C9D1D9"/>
-                          </a:solidFill>
-                          <a:latin typeface="Calibri" pitchFamily="34" charset="0"/>
-                          <a:ea typeface="Calibri" pitchFamily="34" charset="-122"/>
-                          <a:cs typeface="Calibri" pitchFamily="34" charset="-120"/>
-                        </a:rPr>
-                        <a:t>BYOK (Bring Your Own Key)</a:t>
+                        <a:t>BYOK provider</a:t>
                       </a:r>
-                      <a:endParaRPr lang="en-US" sz="1100" dirty="0">
-                        <a:latin typeface="Calibri" charset="0"/>
-                        <a:ea typeface="Calibri" charset="0"/>
-                        <a:cs typeface="Calibri" charset="0"/>
-                      </a:endParaRPr>
                     </a:p>
                   </a:txBody>
                   <a:tcPr marL="182880" marR="182880" marT="91440" marB="91440">
@@ -8101,25 +7664,9 @@
                     <a:bodyPr/>
                     <a:lstStyle/>
                     <a:p>
-                      <a:pPr marL="0" indent="0">
-                        <a:buNone/>
-                      </a:pPr>
                       <a:r>
-                        <a:rPr lang="en-US" sz="1100" dirty="0">
-                          <a:solidFill>
-                            <a:srgbClr val="C9D1D9"/>
-                          </a:solidFill>
-                          <a:latin typeface="Calibri" pitchFamily="34" charset="0"/>
-                          <a:ea typeface="Calibri" pitchFamily="34" charset="-122"/>
-                          <a:cs typeface="Calibri" pitchFamily="34" charset="-120"/>
-                        </a:rPr>
-                        <a:t>Own API keys (OpenAI, Azure, Anthropic)</a:t>
+                        <a:t>Custom inference</a:t>
                       </a:r>
-                      <a:endParaRPr lang="en-US" sz="1100" dirty="0">
-                        <a:latin typeface="Calibri" charset="0"/>
-                        <a:ea typeface="Calibri" charset="0"/>
-                        <a:cs typeface="Calibri" charset="0"/>
-                      </a:endParaRPr>
                     </a:p>
                   </a:txBody>
                   <a:tcPr marL="182880" marR="182880" marT="91440" marB="91440">
@@ -8169,25 +7716,9 @@
                     <a:bodyPr/>
                     <a:lstStyle/>
                     <a:p>
-                      <a:pPr marL="0" indent="0">
-                        <a:buNone/>
-                      </a:pPr>
                       <a:r>
-                        <a:rPr lang="en-US" sz="1100" b="1" dirty="0">
-                          <a:solidFill>
-                            <a:srgbClr val="3FB950"/>
-                          </a:solidFill>
-                          <a:latin typeface="Calibri" pitchFamily="34" charset="0"/>
-                          <a:ea typeface="Calibri" pitchFamily="34" charset="-122"/>
-                          <a:cs typeface="Calibri" pitchFamily="34" charset="-120"/>
-                        </a:rPr>
-                        <a:t>Not Required</a:t>
+                        <a:t>Provider billing</a:t>
                       </a:r>
-                      <a:endParaRPr lang="en-US" sz="1100" dirty="0">
-                        <a:latin typeface="Calibri" charset="0"/>
-                        <a:ea typeface="Calibri" charset="0"/>
-                        <a:cs typeface="Calibri" charset="0"/>
-                      </a:endParaRPr>
                     </a:p>
                   </a:txBody>
                   <a:tcPr marL="182880" marR="182880" marT="91440" marB="91440">
@@ -8277,7 +7808,7 @@
                 <a:ea typeface="Calibri" pitchFamily="34" charset="-122"/>
                 <a:cs typeface="Calibri" pitchFamily="34" charset="-120"/>
               </a:rPr>
-              <a:t>Authentication choices:</a:t>
+              <a:t>Rotation: github_token_provider for Copilot identity · bearer_token_provider for BYOK</a:t>
             </a:r>
             <a:endParaRPr lang="en-US" sz="1200" dirty="0"/>
           </a:p>
@@ -8347,7 +7878,7 @@
                 <a:ea typeface="Calibri" pitchFamily="34" charset="-122"/>
                 <a:cs typeface="Calibri" pitchFamily="34" charset="-120"/>
               </a:rPr>
-              <a:t>Static token</a:t>
+              <a:t/>
             </a:r>
             <a:endParaRPr lang="en-US" sz="850" dirty="0"/>
           </a:p>
@@ -8388,7 +7919,7 @@
                 <a:ea typeface="Calibri" pitchFamily="34" charset="-122"/>
                 <a:cs typeface="Calibri" pitchFamily="34" charset="-120"/>
               </a:rPr>
-              <a:t>/</a:t>
+              <a:t/>
             </a:r>
             <a:endParaRPr lang="en-US" sz="1200" dirty="0"/>
           </a:p>
@@ -8458,7 +7989,7 @@
                 <a:ea typeface="Calibri" pitchFamily="34" charset="-122"/>
                 <a:cs typeface="Calibri" pitchFamily="34" charset="-120"/>
               </a:rPr>
-              <a:t>Token provider</a:t>
+              <a:t/>
             </a:r>
             <a:endParaRPr lang="en-US" sz="850" dirty="0"/>
           </a:p>
@@ -8499,7 +8030,7 @@
                 <a:ea typeface="Calibri" pitchFamily="34" charset="-122"/>
                 <a:cs typeface="Calibri" pitchFamily="34" charset="-120"/>
               </a:rPr>
-              <a:t>/</a:t>
+              <a:t/>
             </a:r>
             <a:endParaRPr lang="en-US" sz="1200" dirty="0"/>
           </a:p>
@@ -8569,7 +8100,7 @@
                 <a:ea typeface="Calibri" pitchFamily="34" charset="-122"/>
                 <a:cs typeface="Calibri" pitchFamily="34" charset="-120"/>
               </a:rPr>
-              <a:t>API token</a:t>
+              <a:t/>
             </a:r>
             <a:endParaRPr lang="en-US" sz="850" dirty="0"/>
           </a:p>
@@ -8610,7 +8141,7 @@
                 <a:ea typeface="Calibri" pitchFamily="34" charset="-122"/>
                 <a:cs typeface="Calibri" pitchFamily="34" charset="-120"/>
               </a:rPr>
-              <a:t>/</a:t>
+              <a:t/>
             </a:r>
             <a:endParaRPr lang="en-US" sz="1200" dirty="0"/>
           </a:p>
@@ -8680,7 +8211,7 @@
                 <a:ea typeface="Calibri" pitchFamily="34" charset="-122"/>
                 <a:cs typeface="Calibri" pitchFamily="34" charset="-120"/>
               </a:rPr>
-              <a:t>Env tokens</a:t>
+              <a:t/>
             </a:r>
             <a:endParaRPr lang="en-US" sz="850" dirty="0"/>
           </a:p>
@@ -8721,7 +8252,7 @@
                 <a:ea typeface="Calibri" pitchFamily="34" charset="-122"/>
                 <a:cs typeface="Calibri" pitchFamily="34" charset="-120"/>
               </a:rPr>
-              <a:t>/</a:t>
+              <a:t/>
             </a:r>
             <a:endParaRPr lang="en-US" sz="1200" dirty="0"/>
           </a:p>
@@ -8791,7 +8322,7 @@
                 <a:ea typeface="Calibri" pitchFamily="34" charset="-122"/>
                 <a:cs typeface="Calibri" pitchFamily="34" charset="-120"/>
               </a:rPr>
-              <a:t>CLI login</a:t>
+              <a:t/>
             </a:r>
             <a:endParaRPr lang="en-US" sz="850" dirty="0"/>
           </a:p>
@@ -8832,7 +8363,7 @@
                 <a:ea typeface="Calibri" pitchFamily="34" charset="-122"/>
                 <a:cs typeface="Calibri" pitchFamily="34" charset="-120"/>
               </a:rPr>
-              <a:t>/</a:t>
+              <a:t/>
             </a:r>
             <a:endParaRPr lang="en-US" sz="1200" dirty="0"/>
           </a:p>
@@ -8902,7 +8433,7 @@
                 <a:ea typeface="Calibri" pitchFamily="34" charset="-122"/>
                 <a:cs typeface="Calibri" pitchFamily="34" charset="-120"/>
               </a:rPr>
-              <a:t>gh auth</a:t>
+              <a:t/>
             </a:r>
             <a:endParaRPr lang="en-US" sz="850" dirty="0"/>
           </a:p>
@@ -8943,7 +8474,7 @@
                 <a:ea typeface="Calibri" pitchFamily="34" charset="-122"/>
                 <a:cs typeface="Calibri" pitchFamily="34" charset="-120"/>
               </a:rPr>
-              <a:t>14 / 28</a:t>
+              <a:t>19 / 24</a:t>
             </a:r>
             <a:endParaRPr lang="en-US" sz="900" dirty="0"/>
           </a:p>
@@ -9103,7 +8634,7 @@
                   <a:srgbClr val="C9D1D9"/>
                 </a:solidFill>
               </a:rPr>
-              <a:t>OAuth GitHub App Integration</a:t>
+              <a:t>Example 07A · Structured Elicitation</a:t>
             </a:r>
           </a:p>
         </p:txBody>
@@ -9136,7 +8667,7 @@
                   <a:srgbClr val="8B949E"/>
                 </a:solidFill>
               </a:rPr>
-              <a:t>Session-scoped identity; rotate short-lived tokens with github_token_provider</a:t>
+              <a:t>Prefer the structured ask_user schema; detect runtime mismatch and fall back explicitly</a:t>
             </a:r>
           </a:p>
         </p:txBody>
@@ -9174,7 +8705,7 @@
                   <a:srgbClr val="58A6FF"/>
                 </a:solidFill>
               </a:rPr>
-              <a:t xml:space="preserve">1. </a:t>
+              <a:t xml:space="preserve">1. Request ask_user_variant="elicitation"</a:t>
             </a:r>
             <a:r>
               <a:rPr sz="1300" b="0" dirty="0">
@@ -9182,7 +8713,7 @@
                   <a:srgbClr val="C9D1D9"/>
                 </a:solidFill>
               </a:rPr>
-              <a:t xml:space="preserve">User clicks </a:t>
+              <a:t xml:space="preserve"/>
             </a:r>
             <a:r>
               <a:rPr sz="1300" b="1" dirty="0">
@@ -9190,7 +8721,7 @@
                   <a:srgbClr val="3FB950"/>
                 </a:solidFill>
               </a:rPr>
-              <a:t>Sign in with GitHub</a:t>
+              <a:t/>
             </a:r>
           </a:p>
           <a:p>
@@ -9205,7 +8736,7 @@
                   <a:srgbClr val="58A6FF"/>
                 </a:solidFill>
               </a:rPr>
-              <a:t xml:space="preserve">2. </a:t>
+              <a:t xml:space="preserve">2. Register on_elicitation_request</a:t>
             </a:r>
             <a:r>
               <a:rPr sz="1300" b="0" dirty="0">
@@ -9213,7 +8744,7 @@
                   <a:srgbClr val="C9D1D9"/>
                 </a:solidFill>
               </a:rPr>
-              <a:t xml:space="preserve">Redirect to </a:t>
+              <a:t xml:space="preserve"/>
             </a:r>
             <a:r>
               <a:rPr sz="1300" b="1" dirty="0">
@@ -9221,7 +8752,7 @@
                   <a:srgbClr val="3FB950"/>
                 </a:solidFill>
               </a:rPr>
-              <a:t>GitHub OAuth consent screen</a:t>
+              <a:t/>
             </a:r>
           </a:p>
           <a:p>
@@ -9236,7 +8767,7 @@
                   <a:srgbClr val="58A6FF"/>
                 </a:solidFill>
               </a:rPr>
-              <a:t xml:space="preserve">3. </a:t>
+              <a:t xml:space="preserve">3. Validate type, properties, and required fields</a:t>
             </a:r>
             <a:r>
               <a:rPr sz="1300" b="0" dirty="0">
@@ -9244,7 +8775,7 @@
                   <a:srgbClr val="C9D1D9"/>
                 </a:solidFill>
               </a:rPr>
-              <a:t xml:space="preserve">Exchange code for </a:t>
+              <a:t xml:space="preserve"/>
             </a:r>
             <a:r>
               <a:rPr sz="1300" b="1" dirty="0" err="1">
@@ -9252,7 +8783,7 @@
                   <a:srgbClr val="3FB950"/>
                 </a:solidFill>
               </a:rPr>
-              <a:t>gho</a:t>
+              <a:t/>
             </a:r>
             <a:r>
               <a:rPr sz="1300" b="1" dirty="0">
@@ -9260,7 +8791,7 @@
                   <a:srgbClr val="3FB950"/>
                 </a:solidFill>
               </a:rPr>
-              <a:t>_ token</a:t>
+              <a:t/>
             </a:r>
           </a:p>
           <a:p>
@@ -9275,7 +8806,7 @@
                   <a:srgbClr val="58A6FF"/>
                 </a:solidFill>
               </a:rPr>
-              <a:t xml:space="preserve">4. </a:t>
+              <a:t xml:space="preserve">4. Return accept, decline, or cancel</a:t>
             </a:r>
             <a:r>
               <a:rPr sz="1300" b="0" dirty="0">
@@ -9283,7 +8814,7 @@
                   <a:srgbClr val="C9D1D9"/>
                 </a:solidFill>
               </a:rPr>
-              <a:t xml:space="preserve">Pass token to SDK via </a:t>
+              <a:t xml:space="preserve"/>
             </a:r>
             <a:r>
               <a:rPr sz="1300" b="1" dirty="0" err="1">
@@ -9291,7 +8822,7 @@
                   <a:srgbClr val="3FB950"/>
                 </a:solidFill>
               </a:rPr>
-              <a:t>githubToken</a:t>
+              <a:t/>
             </a:r>
             <a:endParaRPr sz="1300" b="1" dirty="0">
               <a:solidFill>
@@ -9311,7 +8842,7 @@
                   <a:srgbClr val="58A6FF"/>
                 </a:solidFill>
               </a:rPr>
-              <a:t xml:space="preserve">5. </a:t>
+              <a:t xml:space="preserve">5. Bound terminal/UI waiting to 120 seconds</a:t>
             </a:r>
             <a:r>
               <a:rPr sz="1300" b="0" dirty="0">
@@ -9319,7 +8850,7 @@
                   <a:srgbClr val="C9D1D9"/>
                 </a:solidFill>
               </a:rPr>
-              <a:t xml:space="preserve">Requests made </a:t>
+              <a:t xml:space="preserve"/>
             </a:r>
             <a:r>
               <a:rPr sz="1300" b="1" dirty="0">
@@ -9327,7 +8858,7 @@
                   <a:srgbClr val="3FB950"/>
                 </a:solidFill>
               </a:rPr>
-              <a:t>as that user</a:t>
+              <a:t/>
             </a:r>
           </a:p>
         </p:txBody>
@@ -9360,7 +8891,7 @@
                   <a:srgbClr val="58A6FF"/>
                 </a:solidFill>
               </a:rPr>
-              <a:t>Supported Token Prefixes</a:t>
+              <a:t>Runtime capability check</a:t>
             </a:r>
           </a:p>
           <a:p>
@@ -9375,7 +8906,7 @@
                   <a:srgbClr val="C9D1D9"/>
                 </a:solidFill>
               </a:rPr>
-              <a:t xml:space="preserve">  </a:t>
+              <a:t xml:space="preserve">ask_user schema contains message</a:t>
             </a:r>
             <a:r>
               <a:rPr sz="1300" b="0" dirty="0" err="1">
@@ -9383,7 +8914,7 @@
                   <a:srgbClr val="C9D1D9"/>
                 </a:solidFill>
               </a:rPr>
-              <a:t>gho</a:t>
+              <a:t/>
             </a:r>
             <a:r>
               <a:rPr sz="1300" b="0" dirty="0">
@@ -9391,7 +8922,7 @@
                   <a:srgbClr val="C9D1D9"/>
                 </a:solidFill>
               </a:rPr>
-              <a:t xml:space="preserve">_  </a:t>
+              <a:t xml:space="preserve"/>
             </a:r>
             <a:r>
               <a:rPr sz="1300" b="1" dirty="0">
@@ -9399,7 +8930,7 @@
                   <a:srgbClr val="3FB950"/>
                 </a:solidFill>
               </a:rPr>
-              <a:t>✅</a:t>
+              <a:t/>
             </a:r>
           </a:p>
           <a:p>
@@ -9414,7 +8945,7 @@
                   <a:srgbClr val="C9D1D9"/>
                 </a:solidFill>
               </a:rPr>
-              <a:t xml:space="preserve">  </a:t>
+              <a:t xml:space="preserve">and requestedSchema</a:t>
             </a:r>
             <a:r>
               <a:rPr sz="1300" b="0" dirty="0" err="1">
@@ -9422,7 +8953,7 @@
                   <a:srgbClr val="C9D1D9"/>
                 </a:solidFill>
               </a:rPr>
-              <a:t>ghu</a:t>
+              <a:t/>
             </a:r>
             <a:r>
               <a:rPr sz="1300" b="0" dirty="0">
@@ -9430,7 +8961,7 @@
                   <a:srgbClr val="C9D1D9"/>
                 </a:solidFill>
               </a:rPr>
-              <a:t xml:space="preserve">_  </a:t>
+              <a:t xml:space="preserve"/>
             </a:r>
             <a:r>
               <a:rPr sz="1300" b="1" dirty="0">
@@ -9438,7 +8969,7 @@
                   <a:srgbClr val="3FB950"/>
                 </a:solidFill>
               </a:rPr>
-              <a:t>✅</a:t>
+              <a:t/>
             </a:r>
           </a:p>
           <a:p>
@@ -9453,7 +8984,7 @@
                   <a:srgbClr val="C9D1D9"/>
                 </a:solidFill>
               </a:rPr>
-              <a:t xml:space="preserve">  </a:t>
+              <a:t xml:space="preserve">Otherwise detach the unused session</a:t>
             </a:r>
             <a:r>
               <a:rPr sz="1300" b="0" dirty="0" err="1">
@@ -9461,7 +8992,7 @@
                   <a:srgbClr val="C9D1D9"/>
                 </a:solidFill>
               </a:rPr>
-              <a:t>github_pat</a:t>
+              <a:t/>
             </a:r>
             <a:r>
               <a:rPr sz="1300" b="0" dirty="0">
@@ -9469,7 +9000,7 @@
                   <a:srgbClr val="C9D1D9"/>
                 </a:solidFill>
               </a:rPr>
-              <a:t xml:space="preserve">_  </a:t>
+              <a:t xml:space="preserve"/>
             </a:r>
             <a:r>
               <a:rPr sz="1300" b="1" dirty="0">
@@ -9477,7 +9008,7 @@
                   <a:srgbClr val="3FB950"/>
                 </a:solidFill>
               </a:rPr>
-              <a:t>✅</a:t>
+              <a:t/>
             </a:r>
           </a:p>
           <a:p>
@@ -9492,7 +9023,7 @@
                   <a:srgbClr val="C9D1D9"/>
                 </a:solidFill>
               </a:rPr>
-              <a:t xml:space="preserve">  </a:t>
+              <a:t xml:space="preserve">Create a narrowly validated legacy callback session</a:t>
             </a:r>
             <a:r>
               <a:rPr sz="1300" b="0" dirty="0" err="1">
@@ -9500,7 +9031,7 @@
                   <a:srgbClr val="C9D1D9"/>
                 </a:solidFill>
               </a:rPr>
-              <a:t>ghp</a:t>
+              <a:t/>
             </a:r>
             <a:r>
               <a:rPr sz="1300" b="0" dirty="0">
@@ -9508,7 +9039,7 @@
                   <a:srgbClr val="C9D1D9"/>
                 </a:solidFill>
               </a:rPr>
-              <a:t xml:space="preserve">_  </a:t>
+              <a:t xml:space="preserve"/>
             </a:r>
             <a:r>
               <a:rPr sz="1300" b="1" dirty="0">
@@ -9516,7 +9047,7 @@
                   <a:srgbClr val="F85149"/>
                 </a:solidFill>
               </a:rPr>
-              <a:t>❌</a:t>
+              <a:t/>
             </a:r>
           </a:p>
         </p:txBody>
@@ -9548,7 +9079,7 @@
                   <a:srgbClr val="8B949E"/>
                 </a:solidFill>
               </a:rPr>
-              <a:t>15 / 28</a:t>
+              <a:t>16 / 24</a:t>
             </a:r>
           </a:p>
         </p:txBody>
@@ -9621,7 +9152,7 @@
                 <a:ea typeface="Calibri" pitchFamily="34" charset="-122"/>
                 <a:cs typeface="Calibri" pitchFamily="34" charset="-120"/>
               </a:rPr>
-              <a:t>BYOK — Bring Your Own Key</a:t>
+              <a:t>BYOK · Bring Your Own Provider</a:t>
             </a:r>
             <a:endParaRPr lang="en-US" sz="2600" dirty="0"/>
           </a:p>
@@ -9686,7 +9217,7 @@
                 <a:ea typeface="Calibri" pitchFamily="34" charset="-122"/>
                 <a:cs typeface="Calibri" pitchFamily="34" charset="-120"/>
               </a:rPr>
-              <a:t>Your provider, your bill — API keys or refreshing Entra tokens; no Copilot subscription required</a:t>
+              <a:t>Your provider, model, billing, residency, and access policy; keys are optional</a:t>
             </a:r>
             <a:endParaRPr lang="en-US" sz="1200" dirty="0"/>
           </a:p>
@@ -10740,7 +10271,7 @@
               </a:spcAft>
             </a:pPr>
             <a:r>
-              <a:rPr sz="1000">
+              <a:rPr sz="1400">
                 <a:solidFill>
                   <a:srgbClr val="E6EDF3"/>
                 </a:solidFill>
@@ -10762,7 +10293,7 @@
               </a:spcAft>
             </a:pPr>
             <a:r>
-              <a:rPr sz="1000">
+              <a:rPr sz="1400">
                 <a:solidFill>
                   <a:srgbClr val="E6EDF3"/>
                 </a:solidFill>
@@ -10784,13 +10315,13 @@
               </a:spcAft>
             </a:pPr>
             <a:r>
-              <a:rPr sz="1000">
+              <a:rPr sz="1400">
                 <a:solidFill>
                   <a:srgbClr val="E6EDF3"/>
                 </a:solidFill>
                 <a:latin typeface="Courier New"/>
               </a:rPr>
-              <a:t xml:space="preserve">    on_permission_request=PermissionHandler.approve_all,</a:t>
+              <a:t xml:space="preserve">    provider={"type": "openai", "wire_api": "responses",</a:t>
             </a:r>
           </a:p>
           <a:p>
@@ -10806,13 +10337,13 @@
               </a:spcAft>
             </a:pPr>
             <a:r>
-              <a:rPr sz="1000">
+              <a:rPr sz="1400">
                 <a:solidFill>
                   <a:srgbClr val="E6EDF3"/>
                 </a:solidFill>
                 <a:latin typeface="Courier New"/>
               </a:rPr>
-              <a:t xml:space="preserve">    provider={"type": "openai", "wire_api": "responses",</a:t>
+              <a:t xml:space="preserve">              "base_url": os.environ["FOUNDRY_MODEL_URL"],</a:t>
             </a:r>
           </a:p>
           <a:p>
@@ -10828,13 +10359,13 @@
               </a:spcAft>
             </a:pPr>
             <a:r>
-              <a:rPr sz="1000">
+              <a:rPr sz="1400">
                 <a:solidFill>
                   <a:srgbClr val="E6EDF3"/>
                 </a:solidFill>
                 <a:latin typeface="Courier New"/>
               </a:rPr>
-              <a:t xml:space="preserve">              "base_url": os.environ["FOUNDRY_MODEL_URL"],</a:t>
+              <a:t xml:space="preserve">              "api_key": os.environ["FOUNDRY_API_KEY"]},</a:t>
             </a:r>
           </a:p>
           <a:p>
@@ -10850,13 +10381,13 @@
               </a:spcAft>
             </a:pPr>
             <a:r>
-              <a:rPr sz="1000">
+              <a:rPr sz="1400">
                 <a:solidFill>
                   <a:srgbClr val="E6EDF3"/>
                 </a:solidFill>
                 <a:latin typeface="Courier New"/>
               </a:rPr>
-              <a:t xml:space="preserve">              "api_key": os.environ["FOUNDRY_API_KEY"]},</a:t>
+              <a:t xml:space="preserve">) as session:</a:t>
             </a:r>
           </a:p>
           <a:p>
@@ -10872,13 +10403,13 @@
               </a:spcAft>
             </a:pPr>
             <a:r>
-              <a:rPr sz="1000">
+              <a:rPr sz="1400">
                 <a:solidFill>
                   <a:srgbClr val="E6EDF3"/>
                 </a:solidFill>
                 <a:latin typeface="Courier New"/>
               </a:rPr>
-              <a:t xml:space="preserve">) as session:</a:t>
+              <a:t xml:space="preserve">    await session.send_and_wait("Hi", timeout=120)</a:t>
             </a:r>
           </a:p>
           <a:p>
@@ -10900,7 +10431,7 @@
                 </a:solidFill>
                 <a:latin typeface="Courier New"/>
               </a:rPr>
-              <a:t xml:space="preserve">    await session.send_and_wait("Hi", timeout=120)</a:t>
+              <a:t xml:space="preserve"/>
             </a:r>
           </a:p>
         </p:txBody>
@@ -10940,7 +10471,7 @@
                 <a:ea typeface="Calibri" pitchFamily="34" charset="-122"/>
                 <a:cs typeface="Calibri" pitchFamily="34" charset="-120"/>
               </a:rPr>
-              <a:t>16 / 28</a:t>
+              <a:t>20 / 24</a:t>
             </a:r>
             <a:endParaRPr lang="en-US" sz="900" dirty="0"/>
           </a:p>
@@ -11106,7 +10637,7 @@
                 <a:ea typeface="Calibri" pitchFamily="34" charset="-122"/>
                 <a:cs typeface="Calibri" pitchFamily="34" charset="-120"/>
               </a:rPr>
-              <a:t>How the SDK Talks to the CLI</a:t>
+              <a:t>Deployment Choices</a:t>
             </a:r>
             <a:endParaRPr lang="en-US" sz="2600" dirty="0"/>
           </a:p>
@@ -11171,7 +10702,7 @@
                 <a:ea typeface="Calibri" pitchFamily="34" charset="-122"/>
                 <a:cs typeface="Calibri" pitchFamily="34" charset="-120"/>
               </a:rPr>
-              <a:t>All SDKs communicate via JSON-RPC — the SDK manages the CLI process lifecycle automatically</a:t>
+              <a:t>All SDKs use JSON-RPC; choose who owns the runtime process and state</a:t>
             </a:r>
             <a:endParaRPr lang="en-US" sz="1200" dirty="0"/>
           </a:p>
@@ -11248,7 +10779,7 @@
                 <a:ea typeface="Calibri" pitchFamily="34" charset="-122"/>
                 <a:cs typeface="Calibri" pitchFamily="34" charset="-120"/>
               </a:rPr>
-              <a:t>Mode 1: stdio (Auto-Managed)</a:t>
+              <a:t>Mode 1: Managed stdio child</a:t>
             </a:r>
             <a:endParaRPr lang="en-US" sz="1400" dirty="0"/>
           </a:p>
@@ -11289,7 +10820,7 @@
                 <a:ea typeface="Calibri" pitchFamily="34" charset="-122"/>
                 <a:cs typeface="Calibri" pitchFamily="34" charset="-120"/>
               </a:rPr>
-              <a:t>SDK spawns CLI as a child process</a:t>
+              <a:t>SDK provisions runtime 1.0.83 and owns lifecycle</a:t>
             </a:r>
             <a:endParaRPr lang="en-US" sz="1000" dirty="0"/>
           </a:p>
@@ -11629,7 +11160,7 @@
                 <a:ea typeface="Calibri" pitchFamily="34" charset="-122"/>
                 <a:cs typeface="Calibri" pitchFamily="34" charset="-120"/>
               </a:rPr>
-              <a:t>Client exit stops its child CLI</a:t>
+              <a:t>Client exit stops its owned child</a:t>
             </a:r>
             <a:endParaRPr lang="en-US" sz="950" dirty="0"/>
           </a:p>
@@ -11694,7 +11225,7 @@
                 <a:ea typeface="Calibri" pitchFamily="34" charset="-122"/>
                 <a:cs typeface="Calibri" pitchFamily="34" charset="-120"/>
               </a:rPr>
-              <a:t>Best for: local dev, desktop apps</a:t>
+              <a:t>Best for local apps and workshops</a:t>
             </a:r>
             <a:endParaRPr lang="en-US" sz="950" dirty="0"/>
           </a:p>
@@ -11771,7 +11302,7 @@
                 <a:ea typeface="Calibri" pitchFamily="34" charset="-122"/>
                 <a:cs typeface="Calibri" pitchFamily="34" charset="-120"/>
               </a:rPr>
-              <a:t>Mode 2: TCP (External Server)</a:t>
+              <a:t>Mode 2: Existing runtime URI</a:t>
             </a:r>
             <a:endParaRPr lang="en-US" sz="1400" dirty="0"/>
           </a:p>
@@ -11812,7 +11343,7 @@
                 <a:ea typeface="Calibri" pitchFamily="34" charset="-122"/>
                 <a:cs typeface="Calibri" pitchFamily="34" charset="-120"/>
               </a:rPr>
-              <a:t>CLI runs as a headless server on a port</a:t>
+              <a:t>Host runs and protects the service endpoint</a:t>
             </a:r>
             <a:endParaRPr lang="en-US" sz="1000" dirty="0"/>
           </a:p>
@@ -11952,7 +11483,7 @@
                 <a:ea typeface="Calibri" pitchFamily="34" charset="-122"/>
                 <a:cs typeface="Calibri" pitchFamily="34" charset="-120"/>
               </a:rPr>
-              <a:t>JSON-RPC over TCP (:4321)</a:t>
+              <a:t>JSON-RPC over protected TCP/URI</a:t>
             </a:r>
             <a:endParaRPr lang="en-US" sz="1000" dirty="0"/>
           </a:p>
@@ -12087,7 +11618,7 @@
                 <a:ea typeface="Consolas" pitchFamily="34" charset="-122"/>
                 <a:cs typeface="Consolas" pitchFamily="34" charset="-120"/>
               </a:rPr>
-              <a:t>copilot --headless --port 4321</a:t>
+              <a:t>RuntimeConnection.for_uri("localhost:4321")</a:t>
             </a:r>
             <a:endParaRPr lang="en-US" sz="950" dirty="0"/>
           </a:p>
@@ -12152,7 +11683,7 @@
                 <a:ea typeface="Calibri" pitchFamily="34" charset="-122"/>
                 <a:cs typeface="Calibri" pitchFamily="34" charset="-120"/>
               </a:rPr>
-              <a:t>Independent lifecycle, multi-client</a:t>
+              <a:t>Independent lifecycle; multi-client capable</a:t>
             </a:r>
             <a:endParaRPr lang="en-US" sz="950" dirty="0"/>
           </a:p>
@@ -12217,7 +11748,7 @@
                 <a:ea typeface="Calibri" pitchFamily="34" charset="-122"/>
                 <a:cs typeface="Calibri" pitchFamily="34" charset="-120"/>
               </a:rPr>
-              <a:t>Private endpoint; protect remote access</a:t>
+              <a:t>Shared/multi-user hosts: mode="empty" plus explicit storage</a:t>
             </a:r>
             <a:endParaRPr lang="en-US" sz="950" dirty="0"/>
           </a:p>
@@ -12258,7 +11789,7 @@
                 <a:ea typeface="Calibri" pitchFamily="34" charset="-122"/>
                 <a:cs typeface="Calibri" pitchFamily="34" charset="-120"/>
               </a:rPr>
-              <a:t>17 / 28</a:t>
+              <a:t>21 / 24</a:t>
             </a:r>
             <a:endParaRPr lang="en-US" sz="900" dirty="0"/>
           </a:p>
@@ -14587,7 +14118,7 @@
                 <a:ea typeface="Calibri" pitchFamily="34" charset="-122"/>
                 <a:cs typeface="Calibri" pitchFamily="34" charset="-120"/>
               </a:rPr>
-              <a:t>What is the GitHub Copilot SDK?</a:t>
+              <a:t>Why the GitHub Copilot SDK?</a:t>
             </a:r>
             <a:endParaRPr lang="en-US" sz="2600" dirty="0"/>
           </a:p>
@@ -14664,7 +14195,7 @@
                 <a:ea typeface="Calibri" pitchFamily="34" charset="-122"/>
                 <a:cs typeface="Calibri" pitchFamily="34" charset="-120"/>
               </a:rPr>
-              <a:t>A programmable SDK that brings Copilot’s agent runtime into your application — no orchestration to build.</a:t>
+              <a:t>Embed the same agent runtime behind Copilot CLI in your application.</a:t>
             </a:r>
             <a:endParaRPr lang="en-US" sz="1600" dirty="0"/>
           </a:p>
@@ -14681,7 +14212,7 @@
                 <a:ea typeface="Calibri" pitchFamily="34" charset="-122"/>
                 <a:cs typeface="Calibri" pitchFamily="34" charset="-120"/>
               </a:rPr>
-              <a:t>A production-tested agent runtime you can invoke programmatically. No need to build your own orchestration — you define agent behavior, Copilot handles planning, tool invocation, file edits, and more.</a:t>
+              <a:t>The runtime handles planning and tool execution; your host still owns identity, authorization, isolation, routing, and UI.</a:t>
             </a:r>
             <a:endParaRPr lang="en-US" sz="1600" dirty="0"/>
           </a:p>
@@ -14813,7 +14344,7 @@
                 <a:ea typeface="Calibri" pitchFamily="34" charset="-122"/>
                 <a:cs typeface="Calibri" pitchFamily="34" charset="-120"/>
               </a:rPr>
-              <a:t>Production-Tested</a:t>
+              <a:t>Shared Runtime</a:t>
             </a:r>
             <a:endParaRPr lang="en-US" sz="1400" dirty="0"/>
           </a:p>
@@ -14854,7 +14385,7 @@
                 <a:ea typeface="Calibri" pitchFamily="34" charset="-122"/>
                 <a:cs typeface="Calibri" pitchFamily="34" charset="-120"/>
               </a:rPr>
-              <a:t>Same runtime behind Copilot CLI, battle-tested at scale</a:t>
+              <a:t>Same engine as Copilot CLI; models and tools remain account- and configuration-dependent</a:t>
             </a:r>
             <a:endParaRPr lang="en-US" sz="1100" dirty="0"/>
           </a:p>
@@ -14986,7 +14517,7 @@
                 <a:ea typeface="Calibri" pitchFamily="34" charset="-122"/>
                 <a:cs typeface="Calibri" pitchFamily="34" charset="-120"/>
               </a:rPr>
-              <a:t>Multi-Language</a:t>
+              <a:t>Six SDKs</a:t>
             </a:r>
             <a:endParaRPr lang="en-US" sz="1400" dirty="0"/>
           </a:p>
@@ -15027,7 +14558,7 @@
                 <a:ea typeface="Calibri" pitchFamily="34" charset="-122"/>
                 <a:cs typeface="Calibri" pitchFamily="34" charset="-120"/>
               </a:rPr>
-              <a:t>TypeScript, Python, Go, .NET, Java and Rust</a:t>
+              <a:t>TypeScript, Python, Go, .NET, Java, and Rust</a:t>
             </a:r>
             <a:endParaRPr lang="en-US" sz="1100" dirty="0"/>
           </a:p>
@@ -15200,7 +14731,7 @@
                 <a:ea typeface="Calibri" pitchFamily="34" charset="-122"/>
                 <a:cs typeface="Calibri" pitchFamily="34" charset="-120"/>
               </a:rPr>
-              <a:t>Custom tools, agents, MCP servers, hooks, and skills</a:t>
+              <a:t>Typed events, custom tools and agents, MCP, hooks, persistence, and BYOK</a:t>
             </a:r>
             <a:endParaRPr lang="en-US" sz="1100" dirty="0"/>
           </a:p>
@@ -15241,7 +14772,7 @@
                 <a:ea typeface="Calibri" pitchFamily="34" charset="-122"/>
                 <a:cs typeface="Calibri" pitchFamily="34" charset="-120"/>
               </a:rPr>
-              <a:t>2 / 28</a:t>
+              <a:t>3 / 24</a:t>
             </a:r>
             <a:endParaRPr lang="en-US" sz="900" dirty="0"/>
           </a:p>
@@ -15315,7 +14846,7 @@
                 <a:ea typeface="Calibri" pitchFamily="34" charset="-122"/>
                 <a:cs typeface="Calibri" pitchFamily="34" charset="-120"/>
               </a:rPr>
-              <a:t>Microsoft Agent Framework Integration</a:t>
+              <a:t>Build One Verified Path</a:t>
             </a:r>
             <a:endParaRPr lang="en-US" sz="2600" dirty="0"/>
           </a:p>
@@ -15380,7 +14911,7 @@
                 <a:ea typeface="Calibri" pitchFamily="34" charset="-122"/>
                 <a:cs typeface="Calibri" pitchFamily="34" charset="-120"/>
               </a:rPr>
-              <a:t>Compose Copilot alongside Azure OpenAI, Anthropic, and others in orchestrated workflows</a:t>
+              <a:t>Start small. Add only what you can observe, authorize, and contain.</a:t>
             </a:r>
             <a:endParaRPr lang="en-US" sz="1200" dirty="0"/>
           </a:p>
@@ -15421,7 +14952,7 @@
                 <a:ea typeface="Calibri" pitchFamily="34" charset="-122"/>
                 <a:cs typeface="Calibri" pitchFamily="34" charset="-120"/>
               </a:rPr>
-              <a:t>Sequential Workflow</a:t>
+              <a:t>1. Build</a:t>
             </a:r>
             <a:endParaRPr lang="en-US" sz="1400" dirty="0"/>
           </a:p>
@@ -15491,7 +15022,7 @@
                 <a:ea typeface="Calibri" pitchFamily="34" charset="-122"/>
                 <a:cs typeface="Calibri" pitchFamily="34" charset="-120"/>
               </a:rPr>
-              <a:t>Copilot Agent</a:t>
+              <a:t>Bounded session</a:t>
             </a:r>
             <a:endParaRPr lang="en-US" sz="1100" dirty="0"/>
           </a:p>
@@ -15532,7 +15063,7 @@
                 <a:ea typeface="Calibri" pitchFamily="34" charset="-122"/>
                 <a:cs typeface="Calibri" pitchFamily="34" charset="-120"/>
               </a:rPr>
-              <a:t>Code Review</a:t>
+              <a:t>Visible result</a:t>
             </a:r>
             <a:endParaRPr lang="en-US" sz="900" dirty="0"/>
           </a:p>
@@ -15643,7 +15174,7 @@
                 <a:ea typeface="Calibri" pitchFamily="34" charset="-122"/>
                 <a:cs typeface="Calibri" pitchFamily="34" charset="-120"/>
               </a:rPr>
-              <a:t>Azure Agent</a:t>
+              <a:t>2. Extend</a:t>
             </a:r>
             <a:endParaRPr lang="en-US" sz="1100" dirty="0"/>
           </a:p>
@@ -15684,7 +15215,7 @@
                 <a:ea typeface="Calibri" pitchFamily="34" charset="-122"/>
                 <a:cs typeface="Calibri" pitchFamily="34" charset="-120"/>
               </a:rPr>
-              <a:t>Documentation</a:t>
+              <a:t>One capability</a:t>
             </a:r>
             <a:endParaRPr lang="en-US" sz="900" dirty="0"/>
           </a:p>
@@ -15795,7 +15326,7 @@
                 <a:ea typeface="Calibri" pitchFamily="34" charset="-122"/>
                 <a:cs typeface="Calibri" pitchFamily="34" charset="-120"/>
               </a:rPr>
-              <a:t>Combined</a:t>
+              <a:t>3. Control</a:t>
             </a:r>
             <a:endParaRPr lang="en-US" sz="1100" dirty="0"/>
           </a:p>
@@ -15836,7 +15367,7 @@
                 <a:ea typeface="Calibri" pitchFamily="34" charset="-122"/>
                 <a:cs typeface="Calibri" pitchFamily="34" charset="-120"/>
               </a:rPr>
-              <a:t>Final Output</a:t>
+              <a:t>Permissions + sandbox</a:t>
             </a:r>
             <a:endParaRPr lang="en-US" sz="900" dirty="0"/>
           </a:p>
@@ -15877,7 +15408,7 @@
                 <a:ea typeface="Calibri" pitchFamily="34" charset="-122"/>
                 <a:cs typeface="Calibri" pitchFamily="34" charset="-120"/>
               </a:rPr>
-              <a:t>Concurrent Workflow</a:t>
+              <a:t>Then ship responsibly</a:t>
             </a:r>
             <a:endParaRPr lang="en-US" sz="1400" dirty="0"/>
           </a:p>
@@ -15947,7 +15478,7 @@
                 <a:ea typeface="Calibri" pitchFamily="34" charset="-122"/>
                 <a:cs typeface="Calibri" pitchFamily="34" charset="-120"/>
               </a:rPr>
-              <a:t>Security Reviewer</a:t>
+              <a:t>Identity</a:t>
             </a:r>
             <a:endParaRPr lang="en-US" sz="1100" dirty="0"/>
           </a:p>
@@ -16017,7 +15548,7 @@
                 <a:ea typeface="Calibri" pitchFamily="34" charset="-122"/>
                 <a:cs typeface="Calibri" pitchFamily="34" charset="-120"/>
               </a:rPr>
-              <a:t>Performance Reviewer</a:t>
+              <a:t>Workspace isolation</a:t>
             </a:r>
             <a:endParaRPr lang="en-US" sz="1100" dirty="0"/>
           </a:p>
@@ -16128,7 +15659,7 @@
                 <a:ea typeface="Calibri" pitchFamily="34" charset="-122"/>
                 <a:cs typeface="Calibri" pitchFamily="34" charset="-120"/>
               </a:rPr>
-              <a:t>Aggregated Result</a:t>
+              <a:t>Observability</a:t>
             </a:r>
             <a:endParaRPr lang="en-US" sz="1100" dirty="0"/>
           </a:p>
@@ -16193,7 +15724,7 @@
                 <a:ea typeface="Calibri" pitchFamily="34" charset="-122"/>
                 <a:cs typeface="Calibri" pitchFamily="34" charset="-120"/>
               </a:rPr>
-              <a:t>Unified successor to Semantic Kernel and AutoGen</a:t>
+              <a:t>Eight runnable samples</a:t>
             </a:r>
             <a:endParaRPr lang="en-US" sz="1100" dirty="0"/>
           </a:p>
@@ -16258,7 +15789,7 @@
                 <a:ea typeface="Calibri" pitchFamily="34" charset="-122"/>
                 <a:cs typeface="Calibri" pitchFamily="34" charset="-120"/>
               </a:rPr>
-              <a:t>Available for .NET and Python</a:t>
+              <a:t>Stable SDK 1.0.13</a:t>
             </a:r>
             <a:endParaRPr lang="en-US" sz="1100" dirty="0"/>
           </a:p>
@@ -16323,7 +15854,7 @@
                 <a:ea typeface="Calibri" pitchFamily="34" charset="-122"/>
                 <a:cs typeface="Calibri" pitchFamily="34" charset="-120"/>
               </a:rPr>
-              <a:t>Supports A2A (Agent-to-Agent) protocol</a:t>
+              <a:t>Runtime 1.0.83</a:t>
             </a:r>
             <a:endParaRPr lang="en-US" sz="1100" dirty="0"/>
           </a:p>
@@ -16388,7 +15919,7 @@
                 <a:ea typeface="Calibri" pitchFamily="34" charset="-122"/>
                 <a:cs typeface="Calibri" pitchFamily="34" charset="-120"/>
               </a:rPr>
-              <a:t>Full streaming support with delta events</a:t>
+              <a:t>Verified 14 September 2026</a:t>
             </a:r>
             <a:endParaRPr lang="en-US" sz="1100" dirty="0"/>
           </a:p>
@@ -16429,7 +15960,7 @@
                 <a:ea typeface="Calibri" pitchFamily="34" charset="-122"/>
                 <a:cs typeface="Calibri" pitchFamily="34" charset="-120"/>
               </a:rPr>
-              <a:t>20 / 28</a:t>
+              <a:t>24 / 24</a:t>
             </a:r>
             <a:endParaRPr lang="en-US" sz="900" dirty="0"/>
           </a:p>
@@ -16503,7 +16034,7 @@
                 <a:ea typeface="Calibri" pitchFamily="34" charset="-122"/>
                 <a:cs typeface="Calibri" pitchFamily="34" charset="-120"/>
               </a:rPr>
-              <a:t>Example 01: Streaming Chat</a:t>
+              <a:t>Example 01 · Streaming Chat</a:t>
             </a:r>
             <a:endParaRPr lang="en-US" sz="2600" dirty="0"/>
           </a:p>
@@ -16568,7 +16099,7 @@
                 <a:ea typeface="Calibri" pitchFamily="34" charset="-122"/>
                 <a:cs typeface="Calibri" pitchFamily="34" charset="-120"/>
               </a:rPr>
-              <a:t>Typed delta events for output; send_and_wait for bounded completion and error propagation</a:t>
+              <a:t>Typed deltas for output; send_and_wait for bounded completion and propagated errors</a:t>
             </a:r>
             <a:endParaRPr lang="en-US" sz="1200" dirty="0"/>
           </a:p>
@@ -16710,13 +16241,13 @@
               </a:spcAft>
             </a:pPr>
             <a:r>
-              <a:rPr sz="950">
+              <a:rPr sz="1500">
                 <a:solidFill>
                   <a:srgbClr val="E6EDF3"/>
                 </a:solidFill>
                 <a:latin typeface="Courier New"/>
               </a:rPr>
-              <a:t xml:space="preserve">from copilot import CopilotClient</a:t>
+              <a:t xml:space="preserve">from copilot.session_events import AssistantMessageDeltaData</a:t>
             </a:r>
           </a:p>
           <a:p>
@@ -16732,13 +16263,13 @@
               </a:spcAft>
             </a:pPr>
             <a:r>
-              <a:rPr sz="950">
+              <a:rPr sz="1500">
                 <a:solidFill>
                   <a:srgbClr val="E6EDF3"/>
                 </a:solidFill>
                 <a:latin typeface="Courier New"/>
               </a:rPr>
-              <a:t xml:space="preserve">from copilot.session import (</a:t>
+              <a:t xml:space="preserve">def on_event(event):</a:t>
             </a:r>
           </a:p>
           <a:p>
@@ -16754,13 +16285,13 @@
               </a:spcAft>
             </a:pPr>
             <a:r>
-              <a:rPr sz="950">
+              <a:rPr sz="1500">
                 <a:solidFill>
                   <a:srgbClr val="E6EDF3"/>
                 </a:solidFill>
                 <a:latin typeface="Courier New"/>
               </a:rPr>
-              <a:t xml:space="preserve">    PermissionHandler,</a:t>
+              <a:t xml:space="preserve">    match event.data:</a:t>
             </a:r>
           </a:p>
           <a:p>
@@ -16776,13 +16307,13 @@
               </a:spcAft>
             </a:pPr>
             <a:r>
-              <a:rPr sz="950">
+              <a:rPr sz="1500">
                 <a:solidFill>
                   <a:srgbClr val="E6EDF3"/>
                 </a:solidFill>
                 <a:latin typeface="Courier New"/>
               </a:rPr>
-              <a:t xml:space="preserve">)</a:t>
+              <a:t xml:space="preserve">        case AssistantMessageDeltaData(delta_content=d):</a:t>
             </a:r>
           </a:p>
           <a:p>
@@ -16798,13 +16329,13 @@
               </a:spcAft>
             </a:pPr>
             <a:r>
-              <a:rPr sz="950">
+              <a:rPr sz="1500">
                 <a:solidFill>
                   <a:srgbClr val="E6EDF3"/>
                 </a:solidFill>
                 <a:latin typeface="Courier New"/>
               </a:rPr>
-              <a:t xml:space="preserve">from copilot.session_events import (</a:t>
+              <a:t xml:space="preserve">            print(d or "", end="", flush=True)</a:t>
             </a:r>
           </a:p>
           <a:p>
@@ -16826,7 +16357,7 @@
                 </a:solidFill>
                 <a:latin typeface="Courier New"/>
               </a:rPr>
-              <a:t xml:space="preserve">    AssistantMessageDeltaData,</a:t>
+              <a:t xml:space="preserve"/>
             </a:r>
           </a:p>
           <a:p>
@@ -16848,7 +16379,7 @@
                 </a:solidFill>
                 <a:latin typeface="Courier New"/>
               </a:rPr>
-              <a:t xml:space="preserve">)</a:t>
+              <a:t xml:space="preserve"/>
             </a:r>
           </a:p>
           <a:p>
@@ -16870,7 +16401,7 @@
                 </a:solidFill>
                 <a:latin typeface="Courier New"/>
               </a:rPr>
-              <a:t xml:space="preserve">def on_event(event):</a:t>
+              <a:t xml:space="preserve"/>
             </a:r>
           </a:p>
           <a:p>
@@ -16892,7 +16423,7 @@
                 </a:solidFill>
                 <a:latin typeface="Courier New"/>
               </a:rPr>
-              <a:t xml:space="preserve">    match event.data:</a:t>
+              <a:t xml:space="preserve"/>
             </a:r>
           </a:p>
           <a:p>
@@ -16914,7 +16445,7 @@
                 </a:solidFill>
                 <a:latin typeface="Courier New"/>
               </a:rPr>
-              <a:t xml:space="preserve">        case AssistantMessageDeltaData() as d:</a:t>
+              <a:t xml:space="preserve"/>
             </a:r>
           </a:p>
           <a:p>
@@ -16936,7 +16467,7 @@
                 </a:solidFill>
                 <a:latin typeface="Courier New"/>
               </a:rPr>
-              <a:t xml:space="preserve">            print(d.delta_content or "",</a:t>
+              <a:t xml:space="preserve"/>
             </a:r>
           </a:p>
           <a:p>
@@ -16958,7 +16489,7 @@
                 </a:solidFill>
                 <a:latin typeface="Courier New"/>
               </a:rPr>
-              <a:t xml:space="preserve">                  end="", flush=True)</a:t>
+              <a:t xml:space="preserve"/>
             </a:r>
           </a:p>
         </p:txBody>
@@ -17099,7 +16630,7 @@
               </a:spcAft>
             </a:pPr>
             <a:r>
-              <a:rPr sz="1050">
+              <a:rPr sz="1500">
                 <a:solidFill>
                   <a:srgbClr val="E6EDF3"/>
                 </a:solidFill>
@@ -17121,7 +16652,7 @@
               </a:spcAft>
             </a:pPr>
             <a:r>
-              <a:rPr sz="1050">
+              <a:rPr sz="1500">
                 <a:solidFill>
                   <a:srgbClr val="E6EDF3"/>
                 </a:solidFill>
@@ -17143,13 +16674,13 @@
               </a:spcAft>
             </a:pPr>
             <a:r>
-              <a:rPr sz="1050">
+              <a:rPr sz="1500">
                 <a:solidFill>
                   <a:srgbClr val="E6EDF3"/>
                 </a:solidFill>
                 <a:latin typeface="Courier New"/>
               </a:rPr>
-              <a:t xml:space="preserve">        model="gpt-5-mini",</a:t>
+              <a:t xml:space="preserve">        streaming=True, available_tools=[],</a:t>
             </a:r>
           </a:p>
           <a:p>
@@ -17165,13 +16696,13 @@
               </a:spcAft>
             </a:pPr>
             <a:r>
-              <a:rPr sz="1050">
+              <a:rPr sz="1500">
                 <a:solidFill>
                   <a:srgbClr val="E6EDF3"/>
                 </a:solidFill>
                 <a:latin typeface="Courier New"/>
               </a:rPr>
-              <a:t xml:space="preserve">        streaming=True,</a:t>
+              <a:t xml:space="preserve">        on_permission_request=PermissionHandler.approve_all,</a:t>
             </a:r>
           </a:p>
           <a:p>
@@ -17187,13 +16718,13 @@
               </a:spcAft>
             </a:pPr>
             <a:r>
-              <a:rPr sz="1050">
+              <a:rPr sz="1500">
                 <a:solidFill>
                   <a:srgbClr val="E6EDF3"/>
                 </a:solidFill>
                 <a:latin typeface="Courier New"/>
               </a:rPr>
-              <a:t xml:space="preserve">        available_tools=[],</a:t>
+              <a:t xml:space="preserve">    ) as session:</a:t>
             </a:r>
           </a:p>
           <a:p>
@@ -17209,13 +16740,13 @@
               </a:spcAft>
             </a:pPr>
             <a:r>
-              <a:rPr sz="1050">
+              <a:rPr sz="1500">
                 <a:solidFill>
                   <a:srgbClr val="E6EDF3"/>
                 </a:solidFill>
                 <a:latin typeface="Courier New"/>
               </a:rPr>
-              <a:t xml:space="preserve">        on_permission_request=</a:t>
+              <a:t xml:space="preserve">        unsubscribe = session.on(on_event)</a:t>
             </a:r>
           </a:p>
           <a:p>
@@ -17231,13 +16762,13 @@
               </a:spcAft>
             </a:pPr>
             <a:r>
-              <a:rPr sz="1050">
+              <a:rPr sz="1500">
                 <a:solidFill>
                   <a:srgbClr val="E6EDF3"/>
                 </a:solidFill>
                 <a:latin typeface="Courier New"/>
               </a:rPr>
-              <a:t xml:space="preserve">            PermissionHandler.approve_all,</a:t>
+              <a:t xml:space="preserve">        reply = await session.send_and_wait(</a:t>
             </a:r>
           </a:p>
           <a:p>
@@ -17253,13 +16784,13 @@
               </a:spcAft>
             </a:pPr>
             <a:r>
-              <a:rPr sz="1050">
+              <a:rPr sz="1500">
                 <a:solidFill>
                   <a:srgbClr val="E6EDF3"/>
                 </a:solidFill>
                 <a:latin typeface="Courier New"/>
               </a:rPr>
-              <a:t xml:space="preserve">    ) as session:</a:t>
+              <a:t xml:space="preserve">            "Explain the SDK briefly.", timeout=60)</a:t>
             </a:r>
           </a:p>
           <a:p>
@@ -17275,13 +16806,13 @@
               </a:spcAft>
             </a:pPr>
             <a:r>
-              <a:rPr sz="1050">
+              <a:rPr sz="1500">
                 <a:solidFill>
                   <a:srgbClr val="E6EDF3"/>
                 </a:solidFill>
                 <a:latin typeface="Courier New"/>
               </a:rPr>
-              <a:t xml:space="preserve">        session.on(on_event)</a:t>
+              <a:t xml:space="preserve">        if reply is None: raise RuntimeError("No reply")</a:t>
             </a:r>
           </a:p>
           <a:p>
@@ -17297,13 +16828,13 @@
               </a:spcAft>
             </a:pPr>
             <a:r>
-              <a:rPr sz="1050">
+              <a:rPr sz="1500">
                 <a:solidFill>
                   <a:srgbClr val="E6EDF3"/>
                 </a:solidFill>
                 <a:latin typeface="Courier New"/>
               </a:rPr>
-              <a:t xml:space="preserve">        await session.send_and_wait(</a:t>
+              <a:t xml:space="preserve">        unsubscribe()</a:t>
             </a:r>
           </a:p>
           <a:p>
@@ -17325,7 +16856,7 @@
                 </a:solidFill>
                 <a:latin typeface="Courier New"/>
               </a:rPr>
-              <a:t xml:space="preserve">            "Explain the SDK briefly.",</a:t>
+              <a:t xml:space="preserve"/>
             </a:r>
           </a:p>
           <a:p>
@@ -17347,7 +16878,7 @@
                 </a:solidFill>
                 <a:latin typeface="Courier New"/>
               </a:rPr>
-              <a:t xml:space="preserve">            timeout=120,</a:t>
+              <a:t xml:space="preserve"/>
             </a:r>
           </a:p>
           <a:p>
@@ -17369,7 +16900,7 @@
                 </a:solidFill>
                 <a:latin typeface="Courier New"/>
               </a:rPr>
-              <a:t xml:space="preserve">        )</a:t>
+              <a:t xml:space="preserve"/>
             </a:r>
           </a:p>
           <a:p>
@@ -17391,7 +16922,7 @@
                 </a:solidFill>
                 <a:latin typeface="Courier New"/>
               </a:rPr>
-              <a:t xml:space="preserve">        print()</a:t>
+              <a:t xml:space="preserve"/>
             </a:r>
           </a:p>
           <a:p>
@@ -17413,7 +16944,7 @@
                 </a:solidFill>
                 <a:latin typeface="Courier New"/>
               </a:rPr>
-              <a:t xml:space="preserve"># Run inside asyncio.run(main()).</a:t>
+              <a:t xml:space="preserve"/>
             </a:r>
           </a:p>
         </p:txBody>
@@ -17482,7 +17013,7 @@
                 <a:ea typeface="Calibri" pitchFamily="34" charset="-122"/>
                 <a:cs typeface="Calibri" pitchFamily="34" charset="-120"/>
               </a:rPr>
-              <a:t xml:space="preserve">Run: </a:t>
+              <a:t xml:space="preserve">Run: python examples/01_simple_chat.py · Expected: streamed text and exit code 0</a:t>
             </a:r>
             <a:r>
               <a:rPr lang="en-US" sz="1000" dirty="0">
@@ -17493,7 +17024,7 @@
                 <a:ea typeface="Calibri" pitchFamily="34" charset="-122"/>
                 <a:cs typeface="Calibri" pitchFamily="34" charset="-120"/>
               </a:rPr>
-              <a:t>python examples/01_simple_chat.py. The full prototype also declares optional client_info.</a:t>
+              <a:t/>
             </a:r>
             <a:endParaRPr lang="en-US" sz="1000" dirty="0"/>
           </a:p>
@@ -17534,7 +17065,7 @@
                 <a:ea typeface="Calibri" pitchFamily="34" charset="-122"/>
                 <a:cs typeface="Calibri" pitchFamily="34" charset="-120"/>
               </a:rPr>
-              <a:t>21 / 28</a:t>
+              <a:t>7 / 24</a:t>
             </a:r>
             <a:endParaRPr lang="en-US" sz="900" dirty="0"/>
           </a:p>
@@ -17608,7 +17139,7 @@
                 <a:ea typeface="Calibri" pitchFamily="34" charset="-122"/>
                 <a:cs typeface="Calibri" pitchFamily="34" charset="-120"/>
               </a:rPr>
-              <a:t>Example 02: Custom Weather Tool</a:t>
+              <a:t>Example 02 · Fictional Weather Tool</a:t>
             </a:r>
             <a:endParaRPr lang="en-US" sz="2600" dirty="0"/>
           </a:p>
@@ -17673,7 +17204,7 @@
                 <a:ea typeface="Calibri" pitchFamily="34" charset="-122"/>
                 <a:cs typeface="Calibri" pitchFamily="34" charset="-120"/>
               </a:rPr>
-              <a:t>A Pydantic schema plus an async handler; simulated weather, not a live weather service</a:t>
+              <a:t>Pydantic schema, async host handler, ToolSet filter; explicitly not a live weather service</a:t>
             </a:r>
             <a:endParaRPr lang="en-US" sz="1200" dirty="0"/>
           </a:p>
@@ -17815,13 +17346,13 @@
               </a:spcAft>
             </a:pPr>
             <a:r>
-              <a:rPr sz="1050">
+              <a:rPr sz="1500">
                 <a:solidFill>
                   <a:srgbClr val="E6EDF3"/>
                 </a:solidFill>
                 <a:latin typeface="Courier New"/>
               </a:rPr>
-              <a:t xml:space="preserve">import random</a:t>
+              <a:t xml:space="preserve">class WeatherParams(BaseModel):</a:t>
             </a:r>
           </a:p>
           <a:p>
@@ -17837,13 +17368,13 @@
               </a:spcAft>
             </a:pPr>
             <a:r>
-              <a:rPr sz="1050">
+              <a:rPr sz="1500">
                 <a:solidFill>
                   <a:srgbClr val="E6EDF3"/>
                 </a:solidFill>
                 <a:latin typeface="Courier New"/>
               </a:rPr>
-              <a:t xml:space="preserve">from copilot import CopilotClient, define_tool</a:t>
+              <a:t xml:space="preserve">    city: str = Field(min_length=1)</a:t>
             </a:r>
           </a:p>
           <a:p>
@@ -17859,13 +17390,13 @@
               </a:spcAft>
             </a:pPr>
             <a:r>
-              <a:rPr sz="1050">
+              <a:rPr sz="1500">
                 <a:solidFill>
                   <a:srgbClr val="E6EDF3"/>
                 </a:solidFill>
                 <a:latin typeface="Courier New"/>
               </a:rPr>
-              <a:t xml:space="preserve">from copilot.session import PermissionHandler</a:t>
+              <a:t xml:space="preserve">@define_tool(description="Generate fictional demo weather")</a:t>
             </a:r>
           </a:p>
           <a:p>
@@ -17881,13 +17412,13 @@
               </a:spcAft>
             </a:pPr>
             <a:r>
-              <a:rPr sz="1050">
+              <a:rPr sz="1500">
                 <a:solidFill>
                   <a:srgbClr val="E6EDF3"/>
                 </a:solidFill>
                 <a:latin typeface="Courier New"/>
               </a:rPr>
-              <a:t xml:space="preserve">from pydantic import BaseModel, Field</a:t>
+              <a:t xml:space="preserve">async def get_weather(params: WeatherParams) -&gt; dict:</a:t>
             </a:r>
           </a:p>
           <a:p>
@@ -17903,13 +17434,13 @@
               </a:spcAft>
             </a:pPr>
             <a:r>
-              <a:rPr sz="1050">
+              <a:rPr sz="1500">
                 <a:solidFill>
                   <a:srgbClr val="E6EDF3"/>
                 </a:solidFill>
                 <a:latin typeface="Courier New"/>
               </a:rPr>
-              <a:t xml:space="preserve">class WeatherParams(BaseModel):</a:t>
+              <a:t xml:space="preserve">    return {"city": params.city, "source": "fictional demo"}</a:t>
             </a:r>
           </a:p>
           <a:p>
@@ -17925,13 +17456,13 @@
               </a:spcAft>
             </a:pPr>
             <a:r>
-              <a:rPr sz="1050">
+              <a:rPr sz="1500">
                 <a:solidFill>
                   <a:srgbClr val="E6EDF3"/>
                 </a:solidFill>
                 <a:latin typeface="Courier New"/>
               </a:rPr>
-              <a:t xml:space="preserve">    city: str = Field(description="City name, e.g. Seattle")</a:t>
+              <a:t xml:space="preserve">async with CopilotClient() as client:</a:t>
             </a:r>
           </a:p>
           <a:p>
@@ -17947,13 +17478,13 @@
               </a:spcAft>
             </a:pPr>
             <a:r>
-              <a:rPr sz="1050">
+              <a:rPr sz="1500">
                 <a:solidFill>
                   <a:srgbClr val="E6EDF3"/>
                 </a:solidFill>
                 <a:latin typeface="Courier New"/>
               </a:rPr>
-              <a:t xml:space="preserve">@define_tool(description="Get simulated weather for a city")</a:t>
+              <a:t xml:space="preserve">    async with await client.create_session(</a:t>
             </a:r>
           </a:p>
           <a:p>
@@ -17969,13 +17500,13 @@
               </a:spcAft>
             </a:pPr>
             <a:r>
-              <a:rPr sz="1050">
+              <a:rPr sz="1500">
                 <a:solidFill>
                   <a:srgbClr val="E6EDF3"/>
                 </a:solidFill>
                 <a:latin typeface="Courier New"/>
               </a:rPr>
-              <a:t xml:space="preserve">async def get_weather(params: WeatherParams) -&gt; dict:</a:t>
+              <a:t xml:space="preserve">        tools=[get_weather],</a:t>
             </a:r>
           </a:p>
           <a:p>
@@ -17991,13 +17522,13 @@
               </a:spcAft>
             </a:pPr>
             <a:r>
-              <a:rPr sz="1050">
+              <a:rPr sz="1500">
                 <a:solidFill>
                   <a:srgbClr val="E6EDF3"/>
                 </a:solidFill>
                 <a:latin typeface="Courier New"/>
               </a:rPr>
-              <a:t xml:space="preserve">    return {"city": params.city, "temperature_c": random.randint(-5, 35),</a:t>
+              <a:t xml:space="preserve">        available_tools=ToolSet().add_custom("get_weather"),</a:t>
             </a:r>
           </a:p>
           <a:p>
@@ -18013,13 +17544,13 @@
               </a:spcAft>
             </a:pPr>
             <a:r>
-              <a:rPr sz="1050">
+              <a:rPr sz="1500">
                 <a:solidFill>
                   <a:srgbClr val="E6EDF3"/>
                 </a:solidFill>
                 <a:latin typeface="Courier New"/>
               </a:rPr>
-              <a:t xml:space="preserve">            "condition": random.choice(["sunny", "cloudy", "rainy"])}</a:t>
+              <a:t xml:space="preserve">        on_permission_request=PermissionHandler.approve_all,</a:t>
             </a:r>
           </a:p>
           <a:p>
@@ -18035,13 +17566,13 @@
               </a:spcAft>
             </a:pPr>
             <a:r>
-              <a:rPr sz="1050">
+              <a:rPr sz="1500">
                 <a:solidFill>
                   <a:srgbClr val="E6EDF3"/>
                 </a:solidFill>
                 <a:latin typeface="Courier New"/>
               </a:rPr>
-              <a:t xml:space="preserve">async with CopilotClient() as client:</a:t>
+              <a:t xml:space="preserve">    ) as session:</a:t>
             </a:r>
           </a:p>
           <a:p>
@@ -18057,13 +17588,13 @@
               </a:spcAft>
             </a:pPr>
             <a:r>
-              <a:rPr sz="1050">
+              <a:rPr sz="1500">
                 <a:solidFill>
                   <a:srgbClr val="E6EDF3"/>
                 </a:solidFill>
                 <a:latin typeface="Courier New"/>
               </a:rPr>
-              <a:t xml:space="preserve">    async with await client.create_session(</a:t>
+              <a:t xml:space="preserve">        reply = await session.send_and_wait(</a:t>
             </a:r>
           </a:p>
           <a:p>
@@ -18079,13 +17610,13 @@
               </a:spcAft>
             </a:pPr>
             <a:r>
-              <a:rPr sz="1050">
+              <a:rPr sz="1500">
                 <a:solidFill>
                   <a:srgbClr val="E6EDF3"/>
                 </a:solidFill>
                 <a:latin typeface="Courier New"/>
               </a:rPr>
-              <a:t xml:space="preserve">        model="gpt-5-mini", tools=[get_weather],</a:t>
+              <a:t xml:space="preserve">            "Fictional weather in Tokyo and Berlin.", timeout=60)</a:t>
             </a:r>
           </a:p>
           <a:p>
@@ -18107,7 +17638,7 @@
                 </a:solidFill>
                 <a:latin typeface="Courier New"/>
               </a:rPr>
-              <a:t xml:space="preserve">        available_tools=["custom:get_weather"],</a:t>
+              <a:t xml:space="preserve"/>
             </a:r>
           </a:p>
           <a:p>
@@ -18129,7 +17660,7 @@
                 </a:solidFill>
                 <a:latin typeface="Courier New"/>
               </a:rPr>
-              <a:t xml:space="preserve">        on_permission_request=PermissionHandler.approve_all,</a:t>
+              <a:t xml:space="preserve"/>
             </a:r>
           </a:p>
           <a:p>
@@ -18151,7 +17682,7 @@
                 </a:solidFill>
                 <a:latin typeface="Courier New"/>
               </a:rPr>
-              <a:t xml:space="preserve">    ) as session:</a:t>
+              <a:t xml:space="preserve"/>
             </a:r>
           </a:p>
           <a:p>
@@ -18173,7 +17704,7 @@
                 </a:solidFill>
                 <a:latin typeface="Courier New"/>
               </a:rPr>
-              <a:t xml:space="preserve">        reply = await session.send_and_wait(</a:t>
+              <a:t xml:space="preserve"/>
             </a:r>
           </a:p>
           <a:p>
@@ -18195,7 +17726,7 @@
                 </a:solidFill>
                 <a:latin typeface="Courier New"/>
               </a:rPr>
-              <a:t xml:space="preserve">            "Weather in Tokyo and Berlin?", timeout=120,</a:t>
+              <a:t xml:space="preserve"/>
             </a:r>
           </a:p>
           <a:p>
@@ -18217,7 +17748,7 @@
                 </a:solidFill>
                 <a:latin typeface="Courier New"/>
               </a:rPr>
-              <a:t xml:space="preserve">        )</a:t>
+              <a:t xml:space="preserve"/>
             </a:r>
           </a:p>
           <a:p>
@@ -18239,7 +17770,7 @@
                 </a:solidFill>
                 <a:latin typeface="Courier New"/>
               </a:rPr>
-              <a:t xml:space="preserve">        if reply:</a:t>
+              <a:t xml:space="preserve"/>
             </a:r>
           </a:p>
           <a:p>
@@ -18261,7 +17792,7 @@
                 </a:solidFill>
                 <a:latin typeface="Courier New"/>
               </a:rPr>
-              <a:t xml:space="preserve">            print(reply.data.content)</a:t>
+              <a:t xml:space="preserve"/>
             </a:r>
           </a:p>
         </p:txBody>
@@ -18301,7 +17832,7 @@
                 <a:ea typeface="Calibri" pitchFamily="34" charset="-122"/>
                 <a:cs typeface="Calibri" pitchFamily="34" charset="-120"/>
               </a:rPr>
-              <a:t>22 / 28</a:t>
+              <a:t>8 / 24</a:t>
             </a:r>
             <a:endParaRPr lang="en-US" sz="900" dirty="0"/>
           </a:p>
@@ -18375,7 +17906,7 @@
                 <a:ea typeface="Calibri" pitchFamily="34" charset="-122"/>
                 <a:cs typeface="Calibri" pitchFamily="34" charset="-120"/>
               </a:rPr>
-              <a:t>Example 06: Session Persistence</a:t>
+              <a:t>Example 06 · Session Persistence</a:t>
             </a:r>
             <a:endParaRPr lang="en-US" sz="2600" dirty="0"/>
           </a:p>
@@ -18440,7 +17971,7 @@
                 <a:ea typeface="Calibri" pitchFamily="34" charset="-122"/>
                 <a:cs typeface="Calibri" pitchFamily="34" charset="-120"/>
               </a:rPr>
-              <a:t>Create once, then resume against the same CLI state storage; session exit detaches</a:t>
+              <a:t>New process, same persisted conversation context; host configuration must be supplied again</a:t>
             </a:r>
             <a:endParaRPr lang="en-US" sz="1200" dirty="0"/>
           </a:p>
@@ -18582,13 +18113,13 @@
               </a:spcAft>
             </a:pPr>
             <a:r>
-              <a:rPr sz="1100">
+              <a:rPr sz="1500">
                 <a:solidFill>
                   <a:srgbClr val="E6EDF3"/>
                 </a:solidFill>
                 <a:latin typeface="Courier New"/>
               </a:rPr>
-              <a:t xml:space="preserve">from copilot import CopilotClient</a:t>
+              <a:t xml:space="preserve">SESSION_ID = "demo-session-resume"</a:t>
             </a:r>
           </a:p>
           <a:p>
@@ -18604,13 +18135,13 @@
               </a:spcAft>
             </a:pPr>
             <a:r>
-              <a:rPr sz="1100">
+              <a:rPr sz="1500">
                 <a:solidFill>
                   <a:srgbClr val="E6EDF3"/>
                 </a:solidFill>
                 <a:latin typeface="Courier New"/>
               </a:rPr>
-              <a:t xml:space="preserve">from copilot.session import PermissionHandler</a:t>
+              <a:t xml:space="preserve"># First process</a:t>
             </a:r>
           </a:p>
           <a:p>
@@ -18626,13 +18157,13 @@
               </a:spcAft>
             </a:pPr>
             <a:r>
-              <a:rPr sz="1100">
+              <a:rPr sz="1500">
                 <a:solidFill>
                   <a:srgbClr val="E6EDF3"/>
                 </a:solidFill>
                 <a:latin typeface="Courier New"/>
               </a:rPr>
-              <a:t xml:space="preserve">SESSION_ID = "demo-session-resume"</a:t>
+              <a:t xml:space="preserve">session = await client.create_session(</a:t>
             </a:r>
           </a:p>
           <a:p>
@@ -18648,13 +18179,13 @@
               </a:spcAft>
             </a:pPr>
             <a:r>
-              <a:rPr sz="1100">
+              <a:rPr sz="1500">
                 <a:solidFill>
                   <a:srgbClr val="E6EDF3"/>
                 </a:solidFill>
                 <a:latin typeface="Courier New"/>
               </a:rPr>
-              <a:t xml:space="preserve"># First run: create and remember facts.</a:t>
+              <a:t xml:space="preserve">    session_id=SESSION_ID, available_tools=[])</a:t>
             </a:r>
           </a:p>
           <a:p>
@@ -18670,13 +18201,13 @@
               </a:spcAft>
             </a:pPr>
             <a:r>
-              <a:rPr sz="1100">
+              <a:rPr sz="1500">
                 <a:solidFill>
                   <a:srgbClr val="E6EDF3"/>
                 </a:solidFill>
                 <a:latin typeface="Courier New"/>
               </a:rPr>
-              <a:t xml:space="preserve">async with CopilotClient() as client:</a:t>
+              <a:t xml:space="preserve">await session.send_and_wait("Remember my name.", timeout=60)</a:t>
             </a:r>
           </a:p>
           <a:p>
@@ -18692,13 +18223,13 @@
               </a:spcAft>
             </a:pPr>
             <a:r>
-              <a:rPr sz="1100">
+              <a:rPr sz="1500">
                 <a:solidFill>
                   <a:srgbClr val="E6EDF3"/>
                 </a:solidFill>
                 <a:latin typeface="Courier New"/>
               </a:rPr>
-              <a:t xml:space="preserve">    async with await client.create_session(</a:t>
+              <a:t xml:space="preserve">await session.disconnect()  # detach, do not delete</a:t>
             </a:r>
           </a:p>
           <a:p>
@@ -18714,13 +18245,13 @@
               </a:spcAft>
             </a:pPr>
             <a:r>
-              <a:rPr sz="1100">
+              <a:rPr sz="1500">
                 <a:solidFill>
                   <a:srgbClr val="E6EDF3"/>
                 </a:solidFill>
                 <a:latin typeface="Courier New"/>
               </a:rPr>
-              <a:t xml:space="preserve">        session_id=SESSION_ID, model="gpt-5-mini",</a:t>
+              <a:t xml:space="preserve"># Later process: re-supply callbacks, tools, auth, policy</a:t>
             </a:r>
           </a:p>
           <a:p>
@@ -18736,13 +18267,13 @@
               </a:spcAft>
             </a:pPr>
             <a:r>
-              <a:rPr sz="1100">
+              <a:rPr sz="1500">
                 <a:solidFill>
                   <a:srgbClr val="E6EDF3"/>
                 </a:solidFill>
                 <a:latin typeface="Courier New"/>
               </a:rPr>
-              <a:t xml:space="preserve">        available_tools=[], on_permission_request=PermissionHandler.approve_all,</a:t>
+              <a:t xml:space="preserve">session = await client.resume_session(</a:t>
             </a:r>
           </a:p>
           <a:p>
@@ -18758,13 +18289,13 @@
               </a:spcAft>
             </a:pPr>
             <a:r>
-              <a:rPr sz="1100">
+              <a:rPr sz="1500">
                 <a:solidFill>
                   <a:srgbClr val="E6EDF3"/>
                 </a:solidFill>
                 <a:latin typeface="Courier New"/>
               </a:rPr>
-              <a:t xml:space="preserve">    ) as session:</a:t>
+              <a:t xml:space="preserve">    SESSION_ID, available_tools=[])</a:t>
             </a:r>
           </a:p>
           <a:p>
@@ -18780,13 +18311,13 @@
               </a:spcAft>
             </a:pPr>
             <a:r>
-              <a:rPr sz="1100">
+              <a:rPr sz="1500">
                 <a:solidFill>
                   <a:srgbClr val="E6EDF3"/>
                 </a:solidFill>
                 <a:latin typeface="Courier New"/>
               </a:rPr>
-              <a:t xml:space="preserve">        await session.send_and_wait("My name is Jeffrey. Remember it.", timeout=120)</a:t>
+              <a:t xml:space="preserve">reply = await session.send_and_wait("What is my name?", timeout=60)</a:t>
             </a:r>
           </a:p>
           <a:p>
@@ -18802,13 +18333,13 @@
               </a:spcAft>
             </a:pPr>
             <a:r>
-              <a:rPr sz="1100">
+              <a:rPr sz="1500">
                 <a:solidFill>
                   <a:srgbClr val="E6EDF3"/>
                 </a:solidFill>
                 <a:latin typeface="Courier New"/>
               </a:rPr>
-              <a:t xml:space="preserve"># Later process: resume, rather than create the same ID again.</a:t>
+              <a:t xml:space="preserve">print(reply.data.content if reply else "No final message")</a:t>
             </a:r>
           </a:p>
           <a:p>
@@ -18830,7 +18361,7 @@
                 </a:solidFill>
                 <a:latin typeface="Courier New"/>
               </a:rPr>
-              <a:t xml:space="preserve">async with CopilotClient() as client:</a:t>
+              <a:t xml:space="preserve"/>
             </a:r>
           </a:p>
           <a:p>
@@ -18852,7 +18383,7 @@
                 </a:solidFill>
                 <a:latin typeface="Courier New"/>
               </a:rPr>
-              <a:t xml:space="preserve">    async with await client.resume_session(</a:t>
+              <a:t xml:space="preserve"/>
             </a:r>
           </a:p>
           <a:p>
@@ -18874,7 +18405,7 @@
                 </a:solidFill>
                 <a:latin typeface="Courier New"/>
               </a:rPr>
-              <a:t xml:space="preserve">        SESSION_ID, available_tools=[],</a:t>
+              <a:t xml:space="preserve"/>
             </a:r>
           </a:p>
           <a:p>
@@ -18896,7 +18427,7 @@
                 </a:solidFill>
                 <a:latin typeface="Courier New"/>
               </a:rPr>
-              <a:t xml:space="preserve">        on_permission_request=PermissionHandler.approve_all,</a:t>
+              <a:t xml:space="preserve"/>
             </a:r>
           </a:p>
           <a:p>
@@ -18918,7 +18449,7 @@
                 </a:solidFill>
                 <a:latin typeface="Courier New"/>
               </a:rPr>
-              <a:t xml:space="preserve">    ) as session:</a:t>
+              <a:t xml:space="preserve"/>
             </a:r>
           </a:p>
           <a:p>
@@ -18940,7 +18471,7 @@
                 </a:solidFill>
                 <a:latin typeface="Courier New"/>
               </a:rPr>
-              <a:t xml:space="preserve">        reply = await session.send_and_wait("What is my name?", timeout=120)</a:t>
+              <a:t xml:space="preserve"/>
             </a:r>
           </a:p>
           <a:p>
@@ -18962,7 +18493,7 @@
                 </a:solidFill>
                 <a:latin typeface="Courier New"/>
               </a:rPr>
-              <a:t xml:space="preserve">        if reply:</a:t>
+              <a:t xml:space="preserve"/>
             </a:r>
           </a:p>
           <a:p>
@@ -18984,7 +18515,7 @@
                 </a:solidFill>
                 <a:latin typeface="Courier New"/>
               </a:rPr>
-              <a:t xml:space="preserve">            print(reply.data.content)</a:t>
+              <a:t xml:space="preserve"/>
             </a:r>
           </a:p>
           <a:p>
@@ -19006,7 +18537,7 @@
                 </a:solidFill>
                 <a:latin typeface="Courier New"/>
               </a:rPr>
-              <a:t xml:space="preserve"># Exit detaches; saved history survives. delete_session permanently erases it.</a:t>
+              <a:t xml:space="preserve"/>
             </a:r>
           </a:p>
         </p:txBody>
@@ -19046,7 +18577,7 @@
                 <a:ea typeface="Calibri" pitchFamily="34" charset="-122"/>
                 <a:cs typeface="Calibri" pitchFamily="34" charset="-120"/>
               </a:rPr>
-              <a:t>24 / 28</a:t>
+              <a:t>14 / 24</a:t>
             </a:r>
             <a:endParaRPr lang="en-US" sz="900" dirty="0"/>
           </a:p>
@@ -19120,7 +18651,7 @@
                 <a:ea typeface="Calibri" pitchFamily="34" charset="-122"/>
                 <a:cs typeface="Calibri" pitchFamily="34" charset="-120"/>
               </a:rPr>
-              <a:t>Get Started Today</a:t>
+              <a:t>Source of Truth</a:t>
             </a:r>
             <a:endParaRPr lang="en-US" sz="2600" dirty="0"/>
           </a:p>
@@ -19257,7 +18788,7 @@
                 <a:ea typeface="Calibri" pitchFamily="34" charset="-122"/>
                 <a:cs typeface="Calibri" pitchFamily="34" charset="-120"/>
               </a:rPr>
-              <a:t>Install the Pinned SDK</a:t>
+              <a:t>Published stable release</a:t>
             </a:r>
             <a:endParaRPr lang="en-US" sz="1400" dirty="0"/>
           </a:p>
@@ -19298,7 +18829,7 @@
                 <a:ea typeface="Calibri" pitchFamily="34" charset="-122"/>
                 <a:cs typeface="Calibri" pitchFamily="34" charset="-120"/>
               </a:rPr>
-              <a:t>pip install -r requirements.txt</a:t>
+              <a:t>v1.0.13 package and tag; not unreleased main</a:t>
             </a:r>
             <a:endParaRPr lang="en-US" sz="1100" dirty="0"/>
           </a:p>
@@ -19411,7 +18942,7 @@
                 <a:ea typeface="Calibri" pitchFamily="34" charset="-122"/>
                 <a:cs typeface="Calibri" pitchFamily="34" charset="-120"/>
               </a:rPr>
-              <a:t>Authenticate</a:t>
+              <a:t>Generated types and tests</a:t>
             </a:r>
             <a:endParaRPr lang="en-US" sz="1400" dirty="0"/>
           </a:p>
@@ -19452,7 +18983,7 @@
                 <a:ea typeface="Calibri" pitchFamily="34" charset="-122"/>
                 <a:cs typeface="Calibri" pitchFamily="34" charset="-120"/>
               </a:rPr>
-              <a:t>Separate CLI login, eligible token or BYOK</a:t>
+              <a:t>Exact signatures and wire shapes beat stale prose</a:t>
             </a:r>
             <a:endParaRPr lang="en-US" sz="1100" dirty="0"/>
           </a:p>
@@ -19565,7 +19096,7 @@
                 <a:ea typeface="Calibri" pitchFamily="34" charset="-122"/>
                 <a:cs typeface="Calibri" pitchFamily="34" charset="-120"/>
               </a:rPr>
-              <a:t>Create Your First Session</a:t>
+              <a:t>Official language samples</a:t>
             </a:r>
             <a:endParaRPr lang="en-US" sz="1400" dirty="0"/>
           </a:p>
@@ -19606,7 +19137,7 @@
                 <a:ea typeface="Calibri" pitchFamily="34" charset="-122"/>
                 <a:cs typeface="Calibri" pitchFamily="34" charset="-120"/>
               </a:rPr>
-              <a:t>python examples/01_simple_chat.py</a:t>
+              <a:t>Use idiomatic patterns, then verify with the bundled runtime</a:t>
             </a:r>
             <a:endParaRPr lang="en-US" sz="1100" dirty="0"/>
           </a:p>
@@ -19719,7 +19250,7 @@
                 <a:ea typeface="Calibri" pitchFamily="34" charset="-122"/>
                 <a:cs typeface="Calibri" pitchFamily="34" charset="-120"/>
               </a:rPr>
-              <a:t>Add Custom Tools &amp; Agents</a:t>
+              <a:t>Live events and results</a:t>
             </a:r>
             <a:endParaRPr lang="en-US" sz="1400" dirty="0"/>
           </a:p>
@@ -19760,7 +19291,7 @@
                 <a:ea typeface="Calibri" pitchFamily="34" charset="-122"/>
                 <a:cs typeface="Calibri" pitchFamily="34" charset="-120"/>
               </a:rPr>
-              <a:t>Work through examples/01–07 and their guides</a:t>
+              <a:t>A plausible model answer is not proof that a tool ran</a:t>
             </a:r>
             <a:endParaRPr lang="en-US" sz="1100" dirty="0"/>
           </a:p>
@@ -19830,7 +19361,7 @@
                 <a:ea typeface="Calibri" pitchFamily="34" charset="-122"/>
                 <a:cs typeface="Calibri" pitchFamily="34" charset="-120"/>
               </a:rPr>
-              <a:t>Resources</a:t>
+              <a:t>Primary References</a:t>
             </a:r>
             <a:endParaRPr lang="en-US" sz="1600" dirty="0"/>
           </a:p>
@@ -19871,7 +19402,7 @@
                 <a:ea typeface="Calibri" pitchFamily="34" charset="-122"/>
                 <a:cs typeface="Calibri" pitchFamily="34" charset="-120"/>
               </a:rPr>
-              <a:t>SDK Repository</a:t>
+              <a:t>Official SDK</a:t>
             </a:r>
             <a:endParaRPr lang="en-US" sz="1000" dirty="0"/>
           </a:p>
@@ -19953,7 +19484,7 @@
                 <a:ea typeface="Calibri" pitchFamily="34" charset="-122"/>
                 <a:cs typeface="Calibri" pitchFamily="34" charset="-120"/>
               </a:rPr>
-              <a:t>Documentation</a:t>
+              <a:t>Official Python samples</a:t>
             </a:r>
             <a:endParaRPr lang="en-US" sz="1000" dirty="0"/>
           </a:p>
@@ -19994,7 +19525,7 @@
                 <a:ea typeface="Calibri" pitchFamily="34" charset="-122"/>
                 <a:cs typeface="Calibri" pitchFamily="34" charset="-120"/>
               </a:rPr>
-              <a:t>docs/ in the repository</a:t>
+              <a:t>chat.py + manual_tool_resume.py</a:t>
             </a:r>
             <a:endParaRPr lang="en-US" sz="800" dirty="0"/>
           </a:p>
@@ -20035,7 +19566,7 @@
                 <a:ea typeface="Calibri" pitchFamily="34" charset="-122"/>
                 <a:cs typeface="Calibri" pitchFamily="34" charset="-120"/>
               </a:rPr>
-              <a:t>Cookbook &amp; Recipes</a:t>
+              <a:t>This workshop</a:t>
             </a:r>
             <a:endParaRPr lang="en-US" sz="1000" dirty="0"/>
           </a:p>
@@ -20076,7 +19607,7 @@
                 <a:ea typeface="Calibri" pitchFamily="34" charset="-122"/>
                 <a:cs typeface="Calibri" pitchFamily="34" charset="-120"/>
               </a:rPr>
-              <a:t>github.com/github/awesome-copilot</a:t>
+              <a:t>github.com/jeffrey-groneberg/ghcp_sdk</a:t>
             </a:r>
             <a:endParaRPr lang="en-US" sz="800" dirty="0"/>
           </a:p>
@@ -20117,7 +19648,7 @@
                 <a:ea typeface="Calibri" pitchFamily="34" charset="-122"/>
                 <a:cs typeface="Calibri" pitchFamily="34" charset="-120"/>
               </a:rPr>
-              <a:t>This Workshop</a:t>
+              <a:t>GitHub MCP server</a:t>
             </a:r>
             <a:endParaRPr lang="en-US" sz="1000" dirty="0"/>
           </a:p>
@@ -20158,7 +19689,7 @@
                 <a:ea typeface="Calibri" pitchFamily="34" charset="-122"/>
                 <a:cs typeface="Calibri" pitchFamily="34" charset="-120"/>
               </a:rPr>
-              <a:t>github.com/jeffrey-groneberg/ghcp_sdk</a:t>
+              <a:t>github.com/github/github-mcp-server</a:t>
             </a:r>
             <a:endParaRPr lang="en-US" sz="800" dirty="0"/>
           </a:p>
@@ -20199,7 +19730,7 @@
                 <a:ea typeface="Calibri" pitchFamily="34" charset="-122"/>
                 <a:cs typeface="Calibri" pitchFamily="34" charset="-120"/>
               </a:rPr>
-              <a:t>GitHub MCP Server</a:t>
+              <a:t>Stable baseline</a:t>
             </a:r>
             <a:endParaRPr lang="en-US" sz="1000" dirty="0"/>
           </a:p>
@@ -20240,7 +19771,7 @@
                 <a:ea typeface="Calibri" pitchFamily="34" charset="-122"/>
                 <a:cs typeface="Calibri" pitchFamily="34" charset="-120"/>
               </a:rPr>
-              <a:t>github.com/github/github-mcp-server</a:t>
+              <a:t>SDK 1.0.13 · runtime 1.0.83 · verified 14 Sep 2026</a:t>
             </a:r>
             <a:endParaRPr lang="en-US" sz="800" dirty="0"/>
           </a:p>
@@ -20281,7 +19812,7 @@
                 <a:ea typeface="Calibri" pitchFamily="34" charset="-122"/>
                 <a:cs typeface="Calibri" pitchFamily="34" charset="-120"/>
               </a:rPr>
-              <a:t>MAF Integration</a:t>
+              <a:t>Current main</a:t>
             </a:r>
             <a:endParaRPr lang="en-US" sz="1000" dirty="0"/>
           </a:p>
@@ -20322,7 +19853,7 @@
                 <a:ea typeface="Calibri" pitchFamily="34" charset="-122"/>
                 <a:cs typeface="Calibri" pitchFamily="34" charset="-120"/>
               </a:rPr>
-              <a:t>learn.microsoft.com</a:t>
+              <a:t>Preview only; runtime 1.0.84-5 is unreleased</a:t>
             </a:r>
             <a:endParaRPr lang="en-US" sz="800" dirty="0"/>
           </a:p>
@@ -20396,7 +19927,7 @@
                 <a:ea typeface="Calibri" pitchFamily="34" charset="-122"/>
                 <a:cs typeface="Calibri" pitchFamily="34" charset="-120"/>
               </a:rPr>
-              <a:t>Agents for Every App — Start building with the Copilot SDK today!</a:t>
+              <a:t>When prose disagrees, generated stable types and tests win.</a:t>
             </a:r>
             <a:endParaRPr lang="en-US" sz="1400" dirty="0"/>
           </a:p>
@@ -20437,7 +19968,7 @@
                 <a:ea typeface="Calibri" pitchFamily="34" charset="-122"/>
                 <a:cs typeface="Calibri" pitchFamily="34" charset="-120"/>
               </a:rPr>
-              <a:t>28 / 28</a:t>
+              <a:t>23 / 24</a:t>
             </a:r>
             <a:endParaRPr lang="en-US" sz="900" dirty="0"/>
           </a:p>
@@ -20511,7 +20042,7 @@
                 <a:ea typeface="Calibri" pitchFamily="34" charset="-122"/>
                 <a:cs typeface="Calibri" pitchFamily="34" charset="-120"/>
               </a:rPr>
-              <a:t>Example 07: Human in the Loop</a:t>
+              <a:t>Example 07B · Exact-Action Approval</a:t>
             </a:r>
             <a:endParaRPr lang="en-US" sz="2600" dirty="0"/>
           </a:p>
@@ -20576,7 +20107,7 @@
                 <a:ea typeface="Calibri" pitchFamily="34" charset="-122"/>
                 <a:cs typeface="Calibri" pitchFamily="34" charset="-120"/>
               </a:rPr>
-              <a:t>Legacy questions use on_user_input_request; structured forms need an elicitation handler</a:t>
+              <a:t>Validate one harmless command first; ask the human second; approve once only</a:t>
             </a:r>
             <a:endParaRPr lang="en-US" sz="1200" dirty="0"/>
           </a:p>
@@ -20718,13 +20249,13 @@
               </a:spcAft>
             </a:pPr>
             <a:r>
-              <a:rPr sz="1100">
+              <a:rPr sz="1500">
                 <a:solidFill>
                   <a:srgbClr val="E6EDF3"/>
                 </a:solidFill>
                 <a:latin typeface="Courier New"/>
               </a:rPr>
-              <a:t xml:space="preserve"># read_answer is the bounded helper in example 07.</a:t>
+              <a:t xml:space="preserve">from copilot.rpc import (</a:t>
             </a:r>
           </a:p>
           <a:p>
@@ -20740,13 +20271,13 @@
               </a:spcAft>
             </a:pPr>
             <a:r>
-              <a:rPr sz="1100">
+              <a:rPr sz="1500">
                 <a:solidFill>
                   <a:srgbClr val="E6EDF3"/>
                 </a:solidFill>
                 <a:latin typeface="Courier New"/>
               </a:rPr>
-              <a:t xml:space="preserve">from copilot.rpc import PermissionDecisionApproveOnce, PermissionDecisionReject</a:t>
+              <a:t xml:space="preserve">    PermissionDecisionApproveOnce, PermissionDecisionReject)</a:t>
             </a:r>
           </a:p>
           <a:p>
@@ -20762,7 +20293,7 @@
               </a:spcAft>
             </a:pPr>
             <a:r>
-              <a:rPr sz="1100">
+              <a:rPr sz="1500">
                 <a:solidFill>
                   <a:srgbClr val="E6EDF3"/>
                 </a:solidFill>
@@ -20784,7 +20315,7 @@
               </a:spcAft>
             </a:pPr>
             <a:r>
-              <a:rPr sz="1100">
+              <a:rPr sz="1500">
                 <a:solidFill>
                   <a:srgbClr val="E6EDF3"/>
                 </a:solidFill>
@@ -20806,7 +20337,7 @@
               </a:spcAft>
             </a:pPr>
             <a:r>
-              <a:rPr sz="1100">
+              <a:rPr sz="1500">
                 <a:solidFill>
                   <a:srgbClr val="E6EDF3"/>
                 </a:solidFill>
@@ -20828,13 +20359,13 @@
               </a:spcAft>
             </a:pPr>
             <a:r>
-              <a:rPr sz="1100">
+              <a:rPr sz="1500">
                 <a:solidFill>
                   <a:srgbClr val="E6EDF3"/>
                 </a:solidFill>
                 <a:latin typeface="Courier New"/>
               </a:rPr>
-              <a:t xml:space="preserve">        case PermissionRequestShell(full_command_text=command):</a:t>
+              <a:t xml:space="preserve">        case PermissionRequestShell(full_command_text=cmd):</a:t>
             </a:r>
           </a:p>
           <a:p>
@@ -20850,13 +20381,13 @@
               </a:spcAft>
             </a:pPr>
             <a:r>
-              <a:rPr sz="1100">
+              <a:rPr sz="1500">
                 <a:solidFill>
                   <a:srgbClr val="E6EDF3"/>
                 </a:solidFill>
                 <a:latin typeface="Courier New"/>
               </a:rPr>
-              <a:t xml:space="preserve">            answer = await read_answer(f"Run {command}? [y/N]: ")</a:t>
+              <a:t xml:space="preserve">            if not is_expected_command(cmd):</a:t>
             </a:r>
           </a:p>
           <a:p>
@@ -20872,13 +20403,13 @@
               </a:spcAft>
             </a:pPr>
             <a:r>
-              <a:rPr sz="1100">
+              <a:rPr sz="1500">
                 <a:solidFill>
                   <a:srgbClr val="E6EDF3"/>
                 </a:solidFill>
                 <a:latin typeface="Courier New"/>
               </a:rPr>
-              <a:t xml:space="preserve">            if answer.strip().lower() == "y":</a:t>
+              <a:t xml:space="preserve">                return PermissionDecisionReject()</a:t>
             </a:r>
           </a:p>
           <a:p>
@@ -20894,13 +20425,13 @@
               </a:spcAft>
             </a:pPr>
             <a:r>
-              <a:rPr sz="1100">
+              <a:rPr sz="1500">
                 <a:solidFill>
                   <a:srgbClr val="E6EDF3"/>
                 </a:solidFill>
                 <a:latin typeface="Courier New"/>
               </a:rPr>
-              <a:t xml:space="preserve">                return PermissionDecisionApproveOnce()</a:t>
+              <a:t xml:space="preserve">            answer = await read_answer("Approve once? [y/N]: ", timeout=120)</a:t>
             </a:r>
           </a:p>
           <a:p>
@@ -20916,13 +20447,13 @@
               </a:spcAft>
             </a:pPr>
             <a:r>
-              <a:rPr sz="1100">
+              <a:rPr sz="1500">
                 <a:solidFill>
                   <a:srgbClr val="E6EDF3"/>
                 </a:solidFill>
                 <a:latin typeface="Courier New"/>
               </a:rPr>
-              <a:t xml:space="preserve">    return PermissionDecisionReject(feedback="Not approved by the user.")</a:t>
+              <a:t xml:space="preserve">            if answer.lower() == "y":</a:t>
             </a:r>
           </a:p>
           <a:p>
@@ -20938,13 +20469,13 @@
               </a:spcAft>
             </a:pPr>
             <a:r>
-              <a:rPr sz="1100">
+              <a:rPr sz="1500">
                 <a:solidFill>
                   <a:srgbClr val="E6EDF3"/>
                 </a:solidFill>
                 <a:latin typeface="Courier New"/>
               </a:rPr>
-              <a:t xml:space="preserve">async with await client.create_session(</a:t>
+              <a:t xml:space="preserve">                return PermissionDecisionApproveOnce()</a:t>
             </a:r>
           </a:p>
           <a:p>
@@ -20960,13 +20491,13 @@
               </a:spcAft>
             </a:pPr>
             <a:r>
-              <a:rPr sz="1100">
+              <a:rPr sz="1500">
                 <a:solidFill>
                   <a:srgbClr val="E6EDF3"/>
                 </a:solidFill>
                 <a:latin typeface="Courier New"/>
               </a:rPr>
-              <a:t xml:space="preserve">    model="gpt-5-mini",</a:t>
+              <a:t xml:space="preserve">    return PermissionDecisionReject()</a:t>
             </a:r>
           </a:p>
           <a:p>
@@ -20988,7 +20519,7 @@
                 </a:solidFill>
                 <a:latin typeface="Courier New"/>
               </a:rPr>
-              <a:t xml:space="preserve">    on_permission_request=on_permission_request,</a:t>
+              <a:t xml:space="preserve"/>
             </a:r>
           </a:p>
           <a:p>
@@ -21010,7 +20541,7 @@
                 </a:solidFill>
                 <a:latin typeface="Courier New"/>
               </a:rPr>
-              <a:t xml:space="preserve">    ask_user_variant="legacy", on_user_input_request=on_user_input_request,</a:t>
+              <a:t xml:space="preserve"/>
             </a:r>
           </a:p>
           <a:p>
@@ -21032,7 +20563,7 @@
                 </a:solidFill>
                 <a:latin typeface="Courier New"/>
               </a:rPr>
-              <a:t xml:space="preserve">) as session:</a:t>
+              <a:t xml:space="preserve"/>
             </a:r>
           </a:p>
           <a:p>
@@ -21054,7 +20585,7 @@
                 </a:solidFill>
                 <a:latin typeface="Courier New"/>
               </a:rPr>
-              <a:t xml:space="preserve">    await session.send_and_wait(</a:t>
+              <a:t xml:space="preserve"/>
             </a:r>
           </a:p>
           <a:p>
@@ -21076,7 +20607,7 @@
                 </a:solidFill>
                 <a:latin typeface="Courier New"/>
               </a:rPr>
-              <a:t xml:space="preserve">        "Ask my name; run a fixed greeting without putting my name in shell code.",</a:t>
+              <a:t xml:space="preserve"/>
             </a:r>
           </a:p>
           <a:p>
@@ -21098,7 +20629,7 @@
                 </a:solidFill>
                 <a:latin typeface="Courier New"/>
               </a:rPr>
-              <a:t xml:space="preserve">        timeout=180,</a:t>
+              <a:t xml:space="preserve"/>
             </a:r>
           </a:p>
           <a:p>
@@ -21120,7 +20651,7 @@
                 </a:solidFill>
                 <a:latin typeface="Courier New"/>
               </a:rPr>
-              <a:t xml:space="preserve">    )</a:t>
+              <a:t xml:space="preserve"/>
             </a:r>
           </a:p>
           <a:p>
@@ -21142,7 +20673,7 @@
                 </a:solidFill>
                 <a:latin typeface="Courier New"/>
               </a:rPr>
-              <a:t xml:space="preserve"># Full prototype validates choices/freeform answers and bounds terminal input.</a:t>
+              <a:t xml:space="preserve"/>
             </a:r>
           </a:p>
         </p:txBody>
@@ -21182,7 +20713,7 @@
                 <a:ea typeface="Calibri" pitchFamily="34" charset="-122"/>
                 <a:cs typeface="Calibri" pitchFamily="34" charset="-120"/>
               </a:rPr>
-              <a:t>25 / 28</a:t>
+              <a:t>17 / 24</a:t>
             </a:r>
             <a:endParaRPr lang="en-US" sz="900" dirty="0"/>
           </a:p>
@@ -21256,7 +20787,7 @@
                 <a:ea typeface="Calibri" pitchFamily="34" charset="-122"/>
                 <a:cs typeface="Calibri" pitchFamily="34" charset="-120"/>
               </a:rPr>
-              <a:t>Example 04: Observe Tool Calls</a:t>
+              <a:t>Example 04 · Hooks</a:t>
             </a:r>
             <a:endParaRPr lang="en-US" sz="2600" dirty="0"/>
           </a:p>
@@ -21321,7 +20852,7 @@
                 <a:ea typeface="Calibri" pitchFamily="34" charset="-122"/>
                 <a:cs typeface="Calibri" pitchFamily="34" charset="-120"/>
               </a:rPr>
-              <a:t>Pre-tool, successful-result and failed-result callbacks; hooks are not a security sandbox</a:t>
+              <a:t>Pre-call, success, and failure callbacks for audit and defense-in-depth; not isolation</a:t>
             </a:r>
             <a:endParaRPr lang="en-US" sz="1200" dirty="0"/>
           </a:p>
@@ -21623,7 +21154,7 @@
                 </a:solidFill>
                 <a:latin typeface="Courier New"/>
               </a:rPr>
-              <a:t xml:space="preserve">    model="gpt-5-mini", available_tools=["builtin:glob", "builtin:view"],</a:t>
+              <a:t xml:space="preserve">    available_tools=ToolSet().add_builtin(["glob", "view"]),</a:t>
             </a:r>
           </a:p>
           <a:p>
@@ -21883,7 +21414,7 @@
                 <a:ea typeface="Calibri" pitchFamily="34" charset="-122"/>
                 <a:cs typeface="Calibri" pitchFamily="34" charset="-120"/>
               </a:rPr>
-              <a:t>23 / 28</a:t>
+              <a:t>12 / 24</a:t>
             </a:r>
             <a:endParaRPr lang="en-US" sz="900" dirty="0"/>
           </a:p>
@@ -23208,7 +22739,7 @@
                 </a:solidFill>
                 <a:latin typeface="Calibri"/>
               </a:rPr>
-              <a:t>System Prompt Customization</a:t>
+              <a:t>Example 08 · Explicit Sandbox Configuration</a:t>
             </a:r>
           </a:p>
         </p:txBody>
@@ -23250,7 +22781,7 @@
                 </a:solidFill>
                 <a:latin typeface="Calibri"/>
               </a:rPr>
-              <a:t>Available in v1.0.13 — prompt sections guide behavior; they do not enforce security policy</a:t>
+              <a:t>Experimental and backend-dependent; the sample enables containment before requesting one bypass</a:t>
             </a:r>
           </a:p>
         </p:txBody>
@@ -23338,7 +22869,7 @@
                 </a:solidFill>
                 <a:latin typeface="Consolas"/>
               </a:rPr>
-              <a:t>identity</a:t>
+              <a:t>Enable</a:t>
             </a:r>
           </a:p>
         </p:txBody>
@@ -23426,7 +22957,7 @@
                 </a:solidFill>
                 <a:latin typeface="Consolas"/>
               </a:rPr>
-              <a:t>tone</a:t>
+              <a:t>SandboxConfig</a:t>
             </a:r>
           </a:p>
         </p:txBody>
@@ -23514,7 +23045,7 @@
                 </a:solidFill>
                 <a:latin typeface="Consolas"/>
               </a:rPr>
-              <a:t>tool_efficiency</a:t>
+              <a:t>Filesystem</a:t>
             </a:r>
           </a:p>
         </p:txBody>
@@ -23602,7 +23133,7 @@
                 </a:solidFill>
                 <a:latin typeface="Consolas"/>
               </a:rPr>
-              <a:t>environment_context</a:t>
+              <a:t>deny demo vault</a:t>
             </a:r>
           </a:p>
         </p:txBody>
@@ -23690,7 +23221,7 @@
                 </a:solidFill>
                 <a:latin typeface="Consolas"/>
               </a:rPr>
-              <a:t>code_change_rules</a:t>
+              <a:t>Network</a:t>
             </a:r>
           </a:p>
         </p:txBody>
@@ -23778,7 +23309,7 @@
                 </a:solidFill>
                 <a:latin typeface="Consolas"/>
               </a:rPr>
-              <a:t>guidelines</a:t>
+              <a:t>deny outbound + loopback</a:t>
             </a:r>
           </a:p>
         </p:txBody>
@@ -23866,7 +23397,7 @@
                 </a:solidFill>
                 <a:latin typeface="Consolas"/>
               </a:rPr>
-              <a:t>safety</a:t>
+              <a:t>Bypass</a:t>
             </a:r>
           </a:p>
         </p:txBody>
@@ -23954,7 +23485,7 @@
                 </a:solidFill>
                 <a:latin typeface="Consolas"/>
               </a:rPr>
-              <a:t>tool_instructions</a:t>
+              <a:t>allow_bypass=True</a:t>
             </a:r>
           </a:p>
         </p:txBody>
@@ -24042,7 +23573,7 @@
                 </a:solidFill>
                 <a:latin typeface="Consolas"/>
               </a:rPr>
-              <a:t>custom_instructions</a:t>
+              <a:t>Human gate</a:t>
             </a:r>
           </a:p>
         </p:txBody>
@@ -24130,7 +23661,7 @@
                 </a:solidFill>
                 <a:latin typeface="Consolas"/>
               </a:rPr>
-              <a:t>last_instructions</a:t>
+              <a:t>one approve-once decision</a:t>
             </a:r>
           </a:p>
         </p:txBody>
@@ -24218,7 +23749,7 @@
                 </a:solidFill>
                 <a:latin typeface="Calibri"/>
               </a:rPr>
-              <a:t>Actions per Section</a:t>
+              <a:t>Boundary</a:t>
             </a:r>
           </a:p>
         </p:txBody>
@@ -24260,7 +23791,7 @@
                 </a:solidFill>
                 <a:latin typeface="Consolas"/>
               </a:rPr>
-              <a:t>replace</a:t>
+              <a:t>Runtime tools</a:t>
             </a:r>
           </a:p>
         </p:txBody>
@@ -24302,7 +23833,7 @@
                 </a:solidFill>
                 <a:latin typeface="Calibri"/>
               </a:rPr>
-              <a:t>Replace entire section content</a:t>
+              <a:t>Constrained by policy</a:t>
             </a:r>
           </a:p>
         </p:txBody>
@@ -24344,7 +23875,7 @@
                 </a:solidFill>
                 <a:latin typeface="Consolas"/>
               </a:rPr>
-              <a:t>append</a:t>
+              <a:t>Host tools</a:t>
             </a:r>
           </a:p>
         </p:txBody>
@@ -24386,7 +23917,7 @@
                 </a:solidFill>
                 <a:latin typeface="Calibri"/>
               </a:rPr>
-              <a:t>Add content after the section</a:t>
+              <a:t>Need separate isolation</a:t>
             </a:r>
           </a:p>
         </p:txBody>
@@ -24428,7 +23959,7 @@
                 </a:solidFill>
                 <a:latin typeface="Consolas"/>
               </a:rPr>
-              <a:t>prepend</a:t>
+              <a:t>Experimental</a:t>
             </a:r>
           </a:p>
         </p:txBody>
@@ -24470,7 +24001,7 @@
                 </a:solidFill>
                 <a:latin typeface="Calibri"/>
               </a:rPr>
-              <a:t>Add content before the section</a:t>
+              <a:t>Backend/platform dependent</a:t>
             </a:r>
           </a:p>
         </p:txBody>
@@ -24512,7 +24043,7 @@
                 </a:solidFill>
                 <a:latin typeface="Consolas"/>
               </a:rPr>
-              <a:t>remove</a:t>
+              <a:t>Evidence</a:t>
             </a:r>
           </a:p>
         </p:txBody>
@@ -24554,7 +24085,7 @@
                 </a:solidFill>
                 <a:latin typeface="Calibri"/>
               </a:rPr>
-              <a:t>Remove the section entirely</a:t>
+              <a:t>Correlate request + result</a:t>
             </a:r>
           </a:p>
         </p:txBody>
@@ -24596,7 +24127,7 @@
                 </a:solidFill>
                 <a:latin typeface="Consolas"/>
               </a:rPr>
-              <a:t>transform</a:t>
+              <a:t>Not a VM</a:t>
             </a:r>
           </a:p>
         </p:txBody>
@@ -24638,7 +24169,7 @@
                 </a:solidFill>
                 <a:latin typeface="Calibri"/>
               </a:rPr>
-              <a:t>Callback — receives text, returns modified</a:t>
+              <a:t>Not a tenant boundary</a:t>
             </a:r>
           </a:p>
         </p:txBody>
@@ -24809,13 +24340,13 @@
               </a:spcAft>
             </a:pPr>
             <a:r>
-              <a:rPr sz="950">
+              <a:rPr sz="1400">
                 <a:solidFill>
                   <a:srgbClr val="E6EDF3"/>
                 </a:solidFill>
                 <a:latin typeface="Courier New"/>
               </a:rPr>
-              <a:t xml:space="preserve">s = await client.create_session(</a:t>
+              <a:t xml:space="preserve">updated = await session.rpc.options.update(</a:t>
             </a:r>
           </a:p>
           <a:p>
@@ -24831,13 +24362,13 @@
               </a:spcAft>
             </a:pPr>
             <a:r>
-              <a:rPr sz="950">
+              <a:rPr sz="1400">
                 <a:solidFill>
                   <a:srgbClr val="E6EDF3"/>
                 </a:solidFill>
                 <a:latin typeface="Courier New"/>
               </a:rPr>
-              <a:t xml:space="preserve">  model="gpt-5-mini", available_tools=[],</a:t>
+              <a:t xml:space="preserve">  SessionUpdateOptionsParams(</a:t>
             </a:r>
           </a:p>
           <a:p>
@@ -24853,13 +24384,13 @@
               </a:spcAft>
             </a:pPr>
             <a:r>
-              <a:rPr sz="950">
+              <a:rPr sz="1400">
                 <a:solidFill>
                   <a:srgbClr val="E6EDF3"/>
                 </a:solidFill>
                 <a:latin typeface="Courier New"/>
               </a:rPr>
-              <a:t xml:space="preserve">  on_permission_request=</a:t>
+              <a:t xml:space="preserve">    sandbox_config=SandboxConfig(</a:t>
             </a:r>
           </a:p>
           <a:p>
@@ -24875,13 +24406,13 @@
               </a:spcAft>
             </a:pPr>
             <a:r>
-              <a:rPr sz="950">
+              <a:rPr sz="1400">
                 <a:solidFill>
                   <a:srgbClr val="E6EDF3"/>
                 </a:solidFill>
                 <a:latin typeface="Courier New"/>
               </a:rPr>
-              <a:t xml:space="preserve">    PermissionHandler.approve_all,</a:t>
+              <a:t xml:space="preserve">      enabled=True, allow_bypass=True,</a:t>
             </a:r>
           </a:p>
           <a:p>
@@ -24897,13 +24428,13 @@
               </a:spcAft>
             </a:pPr>
             <a:r>
-              <a:rPr sz="950">
+              <a:rPr sz="1400">
                 <a:solidFill>
                   <a:srgbClr val="E6EDF3"/>
                 </a:solidFill>
                 <a:latin typeface="Courier New"/>
               </a:rPr>
-              <a:t xml:space="preserve">  system_message={"mode": "customize",</a:t>
+              <a:t xml:space="preserve">      add_current_working_directory=True,</a:t>
             </a:r>
           </a:p>
           <a:p>
@@ -24919,13 +24450,13 @@
               </a:spcAft>
             </a:pPr>
             <a:r>
-              <a:rPr sz="950">
+              <a:rPr sz="1400">
                 <a:solidFill>
                   <a:srgbClr val="E6EDF3"/>
                 </a:solidFill>
                 <a:latin typeface="Courier New"/>
               </a:rPr>
-              <a:t xml:space="preserve">    "sections": {"tone": {</a:t>
+              <a:t xml:space="preserve">      user_policy=SandboxConfigUserPolicy(</a:t>
             </a:r>
           </a:p>
           <a:p>
@@ -24941,13 +24472,13 @@
               </a:spcAft>
             </a:pPr>
             <a:r>
-              <a:rPr sz="950">
+              <a:rPr sz="1400">
                 <a:solidFill>
                   <a:srgbClr val="E6EDF3"/>
                 </a:solidFill>
                 <a:latin typeface="Courier New"/>
               </a:rPr>
-              <a:t xml:space="preserve">      "action": "replace",</a:t>
+              <a:t xml:space="preserve">        filesystem=..., network=...,</a:t>
             </a:r>
           </a:p>
           <a:p>
@@ -24963,13 +24494,13 @@
               </a:spcAft>
             </a:pPr>
             <a:r>
-              <a:rPr sz="950">
+              <a:rPr sz="1400">
                 <a:solidFill>
                   <a:srgbClr val="E6EDF3"/>
                 </a:solidFill>
                 <a:latin typeface="Courier New"/>
               </a:rPr>
-              <a:t xml:space="preserve">      "content": "Be concise.",</a:t>
+              <a:t xml:space="preserve">      ),</a:t>
             </a:r>
           </a:p>
           <a:p>
@@ -24985,13 +24516,13 @@
               </a:spcAft>
             </a:pPr>
             <a:r>
-              <a:rPr sz="950">
+              <a:rPr sz="1400">
                 <a:solidFill>
                   <a:srgbClr val="E6EDF3"/>
                 </a:solidFill>
                 <a:latin typeface="Courier New"/>
               </a:rPr>
-              <a:t xml:space="preserve">    }}},</a:t>
+              <a:t xml:space="preserve">    )</a:t>
             </a:r>
           </a:p>
           <a:p>
@@ -25007,13 +24538,13 @@
               </a:spcAft>
             </a:pPr>
             <a:r>
-              <a:rPr sz="950">
+              <a:rPr sz="1400">
                 <a:solidFill>
                   <a:srgbClr val="E6EDF3"/>
                 </a:solidFill>
                 <a:latin typeface="Courier New"/>
               </a:rPr>
-              <a:t xml:space="preserve">)</a:t>
+              <a:t xml:space="preserve">  ))</a:t>
             </a:r>
           </a:p>
         </p:txBody>
@@ -25101,7 +24632,7 @@
                 </a:solidFill>
                 <a:latin typeface="Calibri"/>
               </a:rPr>
-              <a:t>How it works:</a:t>
+              <a:t>Bypass evidence</a:t>
             </a:r>
           </a:p>
         </p:txBody>
@@ -25189,8 +24720,7 @@
                 </a:solidFill>
                 <a:latin typeface="Calibri"/>
               </a:rPr>
-              <a:t>Default Copilot
-System Prompt</a:t>
+              <a:t>request_sandbox_bypass=True</a:t>
             </a:r>
           </a:p>
         </p:txBody>
@@ -25320,8 +24850,7 @@
                 </a:solidFill>
                 <a:latin typeface="Calibri"/>
               </a:rPr>
-              <a:t>Your Section
-Overrides</a:t>
+              <a:t>Human approves once</a:t>
             </a:r>
           </a:p>
         </p:txBody>
@@ -25451,8 +24980,7 @@
                 </a:solidFill>
                 <a:latin typeface="Calibri"/>
               </a:rPr>
-              <a:t>Final Customized
-Prompt Sent to LLM</a:t>
+              <a:t>Denied marker becomes readable</a:t>
             </a:r>
           </a:p>
         </p:txBody>
@@ -25484,7 +25012,7 @@
                   <a:srgbClr val="8B949E"/>
                 </a:solidFill>
               </a:rPr>
-              <a:t>27 / 28</a:t>
+              <a:t>18 / 24</a:t>
             </a:r>
           </a:p>
         </p:txBody>
@@ -25557,7 +25085,7 @@
                 <a:ea typeface="Calibri" pitchFamily="34" charset="-122"/>
                 <a:cs typeface="Calibri" pitchFamily="34" charset="-120"/>
               </a:rPr>
-              <a:t>Architecture</a:t>
+              <a:t>Architecture and Boundaries</a:t>
             </a:r>
             <a:endParaRPr lang="en-US" sz="2600" dirty="0"/>
           </a:p>
@@ -26238,7 +25766,7 @@
                 <a:ea typeface="Calibri" pitchFamily="34" charset="-122"/>
                 <a:cs typeface="Calibri" pitchFamily="34" charset="-120"/>
               </a:rPr>
-              <a:t>Auto-managed or external CLI</a:t>
+              <a:t>Managed child or external runtime</a:t>
             </a:r>
             <a:endParaRPr lang="en-US" sz="1000" dirty="0"/>
           </a:p>
@@ -26303,7 +25831,7 @@
                 <a:ea typeface="Calibri" pitchFamily="34" charset="-122"/>
                 <a:cs typeface="Calibri" pitchFamily="34" charset="-120"/>
               </a:rPr>
-              <a:t>Shared sessions; detach per client</a:t>
+              <a:t>Detach per owner; persisted state remains</a:t>
             </a:r>
             <a:endParaRPr lang="en-US" sz="1000" dirty="0"/>
           </a:p>
@@ -26368,7 +25896,7 @@
                 <a:ea typeface="Calibri" pitchFamily="34" charset="-122"/>
                 <a:cs typeface="Calibri" pitchFamily="34" charset="-120"/>
               </a:rPr>
-              <a:t>Typed streaming events</a:t>
+              <a:t>Typed events and callbacks</a:t>
             </a:r>
             <a:endParaRPr lang="en-US" sz="1000" dirty="0"/>
           </a:p>
@@ -26433,7 +25961,7 @@
                 <a:ea typeface="Calibri" pitchFamily="34" charset="-122"/>
                 <a:cs typeface="Calibri" pitchFamily="34" charset="-120"/>
               </a:rPr>
-              <a:t>Session persistence</a:t>
+              <a:t>Resume when the same state storage is available</a:t>
             </a:r>
             <a:endParaRPr lang="en-US" sz="1000" dirty="0"/>
           </a:p>
@@ -26498,7 +26026,7 @@
                 <a:ea typeface="Calibri" pitchFamily="34" charset="-122"/>
                 <a:cs typeface="Calibri" pitchFamily="34" charset="-120"/>
               </a:rPr>
-              <a:t>App-owned isolation and routing</a:t>
+              <a:t>App-owned identity, isolation, and routing</a:t>
             </a:r>
             <a:endParaRPr lang="en-US" sz="1000" dirty="0"/>
           </a:p>
@@ -26563,7 +26091,7 @@
                 <a:ea typeface="Calibri" pitchFamily="34" charset="-122"/>
                 <a:cs typeface="Calibri" pitchFamily="34" charset="-120"/>
               </a:rPr>
-              <a:t>OpenTelemetry tracing</a:t>
+              <a:t>Optional OpenTelemetry tracing</a:t>
             </a:r>
             <a:endParaRPr lang="en-US" sz="1000" dirty="0"/>
           </a:p>
@@ -26604,7 +26132,7 @@
                 <a:ea typeface="Calibri" pitchFamily="34" charset="-122"/>
                 <a:cs typeface="Calibri" pitchFamily="34" charset="-120"/>
               </a:rPr>
-              <a:t>3 / 28</a:t>
+              <a:t>4 / 24</a:t>
             </a:r>
             <a:endParaRPr lang="en-US" sz="900" dirty="0"/>
           </a:p>
@@ -26678,7 +26206,7 @@
                 <a:ea typeface="Calibri" pitchFamily="34" charset="-122"/>
                 <a:cs typeface="Calibri" pitchFamily="34" charset="-120"/>
               </a:rPr>
-              <a:t>Available SDKs</a:t>
+              <a:t>Get to Green</a:t>
             </a:r>
             <a:endParaRPr lang="en-US" sz="2600" dirty="0"/>
           </a:p>
@@ -26748,7 +26276,7 @@
                 <a:ea typeface="Calibri" pitchFamily="34" charset="-122"/>
                 <a:cs typeface="Calibri" pitchFamily="34" charset="-120"/>
               </a:rPr>
-              <a:t>Node.js / TypeScript</a:t>
+              <a:t>1. Install</a:t>
             </a:r>
             <a:endParaRPr lang="en-US" sz="1400" dirty="0"/>
           </a:p>
@@ -26818,7 +26346,7 @@
                 <a:ea typeface="Consolas" pitchFamily="34" charset="-122"/>
                 <a:cs typeface="Consolas" pitchFamily="34" charset="-120"/>
               </a:rPr>
-              <a:t>npm install @github/copilot-sdk</a:t>
+              <a:t>pip install github-copilot-sdk==1.0.13</a:t>
             </a:r>
             <a:endParaRPr lang="en-US" sz="1000" dirty="0"/>
           </a:p>
@@ -26888,7 +26416,7 @@
                 <a:ea typeface="Calibri" pitchFamily="34" charset="-122"/>
                 <a:cs typeface="Calibri" pitchFamily="34" charset="-120"/>
               </a:rPr>
-              <a:t>Python</a:t>
+              <a:t>2. Authenticate</a:t>
             </a:r>
             <a:endParaRPr lang="en-US" sz="1400" dirty="0"/>
           </a:p>
@@ -26958,7 +26486,7 @@
                 <a:ea typeface="Consolas" pitchFamily="34" charset="-122"/>
                 <a:cs typeface="Consolas" pitchFamily="34" charset="-120"/>
               </a:rPr>
-              <a:t>pip install github-copilot-sdk==1.0.13</a:t>
+              <a:t>copilot login or eligible token / BYOK</a:t>
             </a:r>
             <a:endParaRPr lang="en-US" sz="1000" dirty="0"/>
           </a:p>
@@ -27028,7 +26556,7 @@
                 <a:ea typeface="Calibri" pitchFamily="34" charset="-122"/>
                 <a:cs typeface="Calibri" pitchFamily="34" charset="-120"/>
               </a:rPr>
-              <a:t>Go</a:t>
+              <a:t>3. Verify runtime</a:t>
             </a:r>
             <a:endParaRPr lang="en-US" sz="1400" dirty="0"/>
           </a:p>
@@ -27098,7 +26626,7 @@
                 <a:ea typeface="Consolas" pitchFamily="34" charset="-122"/>
                 <a:cs typeface="Consolas" pitchFamily="34" charset="-120"/>
               </a:rPr>
-              <a:t>go get github.com/github/copilot-sdk/go</a:t>
+              <a:t>python -m copilot download-runtime  # optional</a:t>
             </a:r>
             <a:endParaRPr lang="en-US" sz="1000" dirty="0"/>
           </a:p>
@@ -27168,7 +26696,7 @@
                 <a:ea typeface="Calibri" pitchFamily="34" charset="-122"/>
                 <a:cs typeface="Calibri" pitchFamily="34" charset="-120"/>
               </a:rPr>
-              <a:t>.NET</a:t>
+              <a:t>4. Run</a:t>
             </a:r>
             <a:endParaRPr lang="en-US" sz="1400" dirty="0"/>
           </a:p>
@@ -27238,7 +26766,7 @@
                 <a:ea typeface="Consolas" pitchFamily="34" charset="-122"/>
                 <a:cs typeface="Consolas" pitchFamily="34" charset="-120"/>
               </a:rPr>
-              <a:t>dotnet add package GitHub.Copilot.SDK</a:t>
+              <a:t>python examples/01_simple_chat.py</a:t>
             </a:r>
             <a:endParaRPr lang="en-US" sz="1000" dirty="0"/>
           </a:p>
@@ -27308,7 +26836,7 @@
                 <a:ea typeface="Calibri" pitchFamily="34" charset="-122"/>
                 <a:cs typeface="Calibri" pitchFamily="34" charset="-120"/>
               </a:rPr>
-              <a:t>Java</a:t>
+              <a:t>Success</a:t>
             </a:r>
             <a:endParaRPr lang="en-US" sz="1400" dirty="0"/>
           </a:p>
@@ -27378,7 +26906,7 @@
                 <a:ea typeface="Consolas" pitchFamily="34" charset="-122"/>
                 <a:cs typeface="Consolas" pitchFamily="34" charset="-120"/>
               </a:rPr>
-              <a:t>com.github:copilot-sdk-java (Maven/Gradle)</a:t>
+              <a:t>Streamed response and exit code 0</a:t>
             </a:r>
             <a:endParaRPr lang="en-US" sz="1000" dirty="0"/>
           </a:p>
@@ -27419,7 +26947,7 @@
                 <a:ea typeface="Calibri" pitchFamily="34" charset="-122"/>
                 <a:cs typeface="Calibri" pitchFamily="34" charset="-120"/>
               </a:rPr>
-              <a:t>Rust is now first-party too: cargo add github-copilot-sdk</a:t>
+              <a:t>Six SDKs share the runtime protocol; this workshop uses Python.</a:t>
             </a:r>
             <a:endParaRPr lang="en-US" sz="1000" dirty="0"/>
           </a:p>
@@ -27460,7 +26988,7 @@
                 <a:ea typeface="Calibri" pitchFamily="34" charset="-122"/>
                 <a:cs typeface="Calibri" pitchFamily="34" charset="-120"/>
               </a:rPr>
-              <a:t>4 / 28</a:t>
+              <a:t>5 / 24</a:t>
             </a:r>
             <a:endParaRPr lang="en-US" sz="900" dirty="0"/>
           </a:p>
@@ -27534,7 +27062,7 @@
                 <a:ea typeface="Calibri" pitchFamily="34" charset="-122"/>
                 <a:cs typeface="Calibri" pitchFamily="34" charset="-120"/>
               </a:rPr>
-              <a:t>Key Features</a:t>
+              <a:t>Workshop Contract</a:t>
             </a:r>
             <a:endParaRPr lang="en-US" sz="2600" dirty="0"/>
           </a:p>
@@ -27635,7 +27163,7 @@
                 <a:ea typeface="Calibri" pitchFamily="34" charset="-122"/>
                 <a:cs typeface="Calibri" pitchFamily="34" charset="-120"/>
               </a:rPr>
-              <a:t>Custom Tools</a:t>
+              <a:t>01 · Streaming</a:t>
             </a:r>
             <a:endParaRPr lang="en-US" sz="1200" dirty="0"/>
           </a:p>
@@ -27676,7 +27204,7 @@
                 <a:ea typeface="Calibri" pitchFamily="34" charset="-122"/>
                 <a:cs typeface="Calibri" pitchFamily="34" charset="-120"/>
               </a:rPr>
-              <a:t>Define functions Copilot can invoke</a:t>
+              <a:t>Bounded response and typed deltas</a:t>
             </a:r>
             <a:endParaRPr lang="en-US" sz="950" dirty="0"/>
           </a:p>
@@ -27777,7 +27305,7 @@
                 <a:ea typeface="Calibri" pitchFamily="34" charset="-122"/>
                 <a:cs typeface="Calibri" pitchFamily="34" charset="-120"/>
               </a:rPr>
-              <a:t>Custom Agents</a:t>
+              <a:t>02 · Custom tool</a:t>
             </a:r>
             <a:endParaRPr lang="en-US" sz="1200" dirty="0"/>
           </a:p>
@@ -27818,7 +27346,7 @@
                 <a:ea typeface="Calibri" pitchFamily="34" charset="-122"/>
                 <a:cs typeface="Calibri" pitchFamily="34" charset="-120"/>
               </a:rPr>
-              <a:t>Specialized AI personas with scoped tools</a:t>
+              <a:t>Pydantic schema and host handler</a:t>
             </a:r>
             <a:endParaRPr lang="en-US" sz="950" dirty="0"/>
           </a:p>
@@ -27919,7 +27447,7 @@
                 <a:ea typeface="Calibri" pitchFamily="34" charset="-122"/>
                 <a:cs typeface="Calibri" pitchFamily="34" charset="-120"/>
               </a:rPr>
-              <a:t>MCP Servers</a:t>
+              <a:t>03 · Agents</a:t>
             </a:r>
             <a:endParaRPr lang="en-US" sz="1200" dirty="0"/>
           </a:p>
@@ -27960,7 +27488,7 @@
                 <a:ea typeface="Calibri" pitchFamily="34" charset="-122"/>
                 <a:cs typeface="Calibri" pitchFamily="34" charset="-120"/>
               </a:rPr>
-              <a:t>External tool integration via standard protocol</a:t>
+              <a:t>Explicit persona selection and handoff</a:t>
             </a:r>
             <a:endParaRPr lang="en-US" sz="950" dirty="0"/>
           </a:p>
@@ -28061,7 +27589,7 @@
                 <a:ea typeface="Calibri" pitchFamily="34" charset="-122"/>
                 <a:cs typeface="Calibri" pitchFamily="34" charset="-120"/>
               </a:rPr>
-              <a:t>Skills</a:t>
+              <a:t>04 · Hooks</a:t>
             </a:r>
             <a:endParaRPr lang="en-US" sz="1200" dirty="0"/>
           </a:p>
@@ -28102,7 +27630,7 @@
                 <a:ea typeface="Calibri" pitchFamily="34" charset="-122"/>
                 <a:cs typeface="Calibri" pitchFamily="34" charset="-120"/>
               </a:rPr>
-              <a:t>Reusable prompt modules from directories</a:t>
+              <a:t>Pre-call, success, and failure</a:t>
             </a:r>
             <a:endParaRPr lang="en-US" sz="950" dirty="0"/>
           </a:p>
@@ -28203,7 +27731,7 @@
                 <a:ea typeface="Calibri" pitchFamily="34" charset="-122"/>
                 <a:cs typeface="Calibri" pitchFamily="34" charset="-120"/>
               </a:rPr>
-              <a:t>Hooks</a:t>
+              <a:t>05 · MCP</a:t>
             </a:r>
             <a:endParaRPr lang="en-US" sz="1200" dirty="0"/>
           </a:p>
@@ -28244,7 +27772,7 @@
                 <a:ea typeface="Calibri" pitchFamily="34" charset="-122"/>
                 <a:cs typeface="Calibri" pitchFamily="34" charset="-120"/>
               </a:rPr>
-              <a:t>Ten Python hook callbacks for audit and policy</a:t>
+              <a:t>Separate connection and authentication</a:t>
             </a:r>
             <a:endParaRPr lang="en-US" sz="950" dirty="0"/>
           </a:p>
@@ -28345,7 +27873,7 @@
                 <a:ea typeface="Calibri" pitchFamily="34" charset="-122"/>
                 <a:cs typeface="Calibri" pitchFamily="34" charset="-120"/>
               </a:rPr>
-              <a:t>Streaming</a:t>
+              <a:t>06 · Persistence</a:t>
             </a:r>
             <a:endParaRPr lang="en-US" sz="1200" dirty="0"/>
           </a:p>
@@ -28386,7 +27914,7 @@
                 <a:ea typeface="Calibri" pitchFamily="34" charset="-122"/>
                 <a:cs typeface="Calibri" pitchFamily="34" charset="-120"/>
               </a:rPr>
-              <a:t>Typed deltas, tool and session events</a:t>
+              <a:t>Create, detach, and cold resume</a:t>
             </a:r>
             <a:endParaRPr lang="en-US" sz="950" dirty="0"/>
           </a:p>
@@ -28487,7 +28015,7 @@
                 <a:ea typeface="Calibri" pitchFamily="34" charset="-122"/>
                 <a:cs typeface="Calibri" pitchFamily="34" charset="-120"/>
               </a:rPr>
-              <a:t>BYOK</a:t>
+              <a:t>07 · Human control</a:t>
             </a:r>
             <a:endParaRPr lang="en-US" sz="1200" dirty="0"/>
           </a:p>
@@ -28528,7 +28056,7 @@
                 <a:ea typeface="Calibri" pitchFamily="34" charset="-122"/>
                 <a:cs typeface="Calibri" pitchFamily="34" charset="-120"/>
               </a:rPr>
-              <a:t>API keys or refreshing bearer tokens</a:t>
+              <a:t>Structured input and exact approval</a:t>
             </a:r>
             <a:endParaRPr lang="en-US" sz="950" dirty="0"/>
           </a:p>
@@ -28629,7 +28157,7 @@
                 <a:ea typeface="Calibri" pitchFamily="34" charset="-122"/>
                 <a:cs typeface="Calibri" pitchFamily="34" charset="-120"/>
               </a:rPr>
-              <a:t>Observability</a:t>
+              <a:t>08 · Sandbox</a:t>
             </a:r>
             <a:endParaRPr lang="en-US" sz="1200" dirty="0"/>
           </a:p>
@@ -28670,7 +28198,7 @@
                 <a:ea typeface="Calibri" pitchFamily="34" charset="-122"/>
                 <a:cs typeface="Calibri" pitchFamily="34" charset="-120"/>
               </a:rPr>
-              <a:t>Built-in OpenTelemetry instrumentation</a:t>
+              <a:t>Experimental containment and bypass</a:t>
             </a:r>
             <a:endParaRPr lang="en-US" sz="950" dirty="0"/>
           </a:p>
@@ -28711,7 +28239,7 @@
                 <a:ea typeface="Calibri" pitchFamily="34" charset="-122"/>
                 <a:cs typeface="Calibri" pitchFamily="34" charset="-120"/>
               </a:rPr>
-              <a:t>5 / 28</a:t>
+              <a:t>2 / 24</a:t>
             </a:r>
             <a:endParaRPr lang="en-US" sz="900" dirty="0"/>
           </a:p>
@@ -28785,7 +28313,7 @@
                 <a:ea typeface="Calibri" pitchFamily="34" charset="-122"/>
                 <a:cs typeface="Calibri" pitchFamily="34" charset="-120"/>
               </a:rPr>
-              <a:t>What Can You Build?</a:t>
+              <a:t>Production Responsibilities</a:t>
             </a:r>
             <a:endParaRPr lang="en-US" sz="2600" dirty="0"/>
           </a:p>
@@ -28903,7 +28431,7 @@
                 <a:ea typeface="Calibri" pitchFamily="34" charset="-122"/>
                 <a:cs typeface="Calibri" pitchFamily="34" charset="-120"/>
               </a:rPr>
-              <a:t>Enterprise</a:t>
+              <a:t>Identity</a:t>
             </a:r>
             <a:endParaRPr lang="en-US" sz="700" dirty="0"/>
           </a:p>
@@ -28944,7 +28472,7 @@
                 <a:ea typeface="Calibri" pitchFamily="34" charset="-122"/>
                 <a:cs typeface="Calibri" pitchFamily="34" charset="-120"/>
               </a:rPr>
-              <a:t>Automated Code Review</a:t>
+              <a:t>Authenticate every principal</a:t>
             </a:r>
             <a:endParaRPr lang="en-US" sz="1300" dirty="0"/>
           </a:p>
@@ -28985,7 +28513,7 @@
                 <a:ea typeface="Calibri" pitchFamily="34" charset="-122"/>
                 <a:cs typeface="Calibri" pitchFamily="34" charset="-120"/>
               </a:rPr>
-              <a:t>Security auditors, performance reviewers, and style checkers with custom prompts and scoped tool access</a:t>
+              <a:t>Bind clients and sessions to verified users or services</a:t>
             </a:r>
             <a:endParaRPr lang="en-US" sz="1000" dirty="0"/>
           </a:p>
@@ -29079,7 +28607,7 @@
                 <a:ea typeface="Calibri" pitchFamily="34" charset="-122"/>
                 <a:cs typeface="Calibri" pitchFamily="34" charset="-120"/>
               </a:rPr>
-              <a:t>Enterprise</a:t>
+              <a:t>Ownership</a:t>
             </a:r>
             <a:endParaRPr lang="en-US" sz="700" dirty="0"/>
           </a:p>
@@ -29120,7 +28648,7 @@
                 <a:ea typeface="Calibri" pitchFamily="34" charset="-122"/>
                 <a:cs typeface="Calibri" pitchFamily="34" charset="-120"/>
               </a:rPr>
-              <a:t>AI-Powered Developer Tools</a:t>
+              <a:t>Authorize session lifecycle</a:t>
             </a:r>
             <a:endParaRPr lang="en-US" sz="1300" dirty="0"/>
           </a:p>
@@ -29161,7 +28689,7 @@
                 <a:ea typeface="Calibri" pitchFamily="34" charset="-122"/>
                 <a:cs typeface="Calibri" pitchFamily="34" charset="-120"/>
               </a:rPr>
-              <a:t>Embed intelligent assistance in CLIs, dashboards, and internal portals with full agentic capabilities</a:t>
+              <a:t>Create, resume, steer, and delete only for the owning principal</a:t>
             </a:r>
             <a:endParaRPr lang="en-US" sz="1000" dirty="0"/>
           </a:p>
@@ -29255,7 +28783,7 @@
                 <a:ea typeface="Calibri" pitchFamily="34" charset="-122"/>
                 <a:cs typeface="Calibri" pitchFamily="34" charset="-120"/>
               </a:rPr>
-              <a:t>DevOps</a:t>
+              <a:t>Isolation</a:t>
             </a:r>
             <a:endParaRPr lang="en-US" sz="700" dirty="0"/>
           </a:p>
@@ -29296,7 +28824,7 @@
                 <a:ea typeface="Calibri" pitchFamily="34" charset="-122"/>
                 <a:cs typeface="Calibri" pitchFamily="34" charset="-120"/>
               </a:rPr>
-              <a:t>CI/CD Pipeline Intelligence</a:t>
+              <a:t>Separate workspaces and state</a:t>
             </a:r>
             <a:endParaRPr lang="en-US" sz="1300" dirty="0"/>
           </a:p>
@@ -29337,7 +28865,7 @@
                 <a:ea typeface="Calibri" pitchFamily="34" charset="-122"/>
                 <a:cs typeface="Calibri" pitchFamily="34" charset="-120"/>
               </a:rPr>
-              <a:t>Automated code analysis, test generation, and documentation within CI/CD workflows</a:t>
+              <a:t>Repositories, temp files, custom tools, credentials, and storage</a:t>
             </a:r>
             <a:endParaRPr lang="en-US" sz="1000" dirty="0"/>
           </a:p>
@@ -29431,7 +28959,7 @@
                 <a:ea typeface="Calibri" pitchFamily="34" charset="-122"/>
                 <a:cs typeface="Calibri" pitchFamily="34" charset="-120"/>
               </a:rPr>
-              <a:t>Platform</a:t>
+              <a:t>Flow Control</a:t>
             </a:r>
             <a:endParaRPr lang="en-US" sz="700" dirty="0"/>
           </a:p>
@@ -29472,7 +29000,7 @@
                 <a:ea typeface="Calibri" pitchFamily="34" charset="-122"/>
                 <a:cs typeface="Calibri" pitchFamily="34" charset="-120"/>
               </a:rPr>
-              <a:t>Multi-Agent Workflows</a:t>
+              <a:t>Route and serialize turns</a:t>
             </a:r>
             <a:endParaRPr lang="en-US" sz="1300" dirty="0"/>
           </a:p>
@@ -29513,7 +29041,7 @@
                 <a:ea typeface="Calibri" pitchFamily="34" charset="-122"/>
                 <a:cs typeface="Calibri" pitchFamily="34" charset="-120"/>
               </a:rPr>
-              <a:t>Orchestrate specialized agents (security + perf + docs) via Microsoft Agent Framework</a:t>
+              <a:t>Bound concurrency, credits, time, and queued work</a:t>
             </a:r>
             <a:endParaRPr lang="en-US" sz="1000" dirty="0"/>
           </a:p>
@@ -29607,7 +29135,7 @@
                 <a:ea typeface="Calibri" pitchFamily="34" charset="-122"/>
                 <a:cs typeface="Calibri" pitchFamily="34" charset="-120"/>
               </a:rPr>
-              <a:t>Data</a:t>
+              <a:t>Observability</a:t>
             </a:r>
             <a:endParaRPr lang="en-US" sz="700" dirty="0"/>
           </a:p>
@@ -29648,7 +29176,7 @@
                 <a:ea typeface="Calibri" pitchFamily="34" charset="-122"/>
                 <a:cs typeface="Calibri" pitchFamily="34" charset="-120"/>
               </a:rPr>
-              <a:t>Database Query Assistants</a:t>
+              <a:t>Trace without leaking content</a:t>
             </a:r>
             <a:endParaRPr lang="en-US" sz="1300" dirty="0"/>
           </a:p>
@@ -29689,7 +29217,7 @@
                 <a:ea typeface="Calibri" pitchFamily="34" charset="-122"/>
                 <a:cs typeface="Calibri" pitchFamily="34" charset="-120"/>
               </a:rPr>
-              <a:t>MCP-connected agents that query databases, explain results, and suggest optimizations</a:t>
+              <a:t>Record decisions and outcomes; redact secrets and private payloads</a:t>
             </a:r>
             <a:endParaRPr lang="en-US" sz="1000" dirty="0"/>
           </a:p>
@@ -29783,7 +29311,7 @@
                 <a:ea typeface="Calibri" pitchFamily="34" charset="-122"/>
                 <a:cs typeface="Calibri" pitchFamily="34" charset="-120"/>
               </a:rPr>
-              <a:t>Developer</a:t>
+              <a:t>Network and Secrets</a:t>
             </a:r>
             <a:endParaRPr lang="en-US" sz="700" dirty="0"/>
           </a:p>
@@ -29824,7 +29352,7 @@
                 <a:ea typeface="Calibri" pitchFamily="34" charset="-122"/>
                 <a:cs typeface="Calibri" pitchFamily="34" charset="-120"/>
               </a:rPr>
-              <a:t>Documentation Generation</a:t>
+              <a:t>Use least privilege</a:t>
             </a:r>
             <a:endParaRPr lang="en-US" sz="1300" dirty="0"/>
           </a:p>
@@ -29865,7 +29393,7 @@
                 <a:ea typeface="Calibri" pitchFamily="34" charset="-122"/>
                 <a:cs typeface="Calibri" pitchFamily="34" charset="-120"/>
               </a:rPr>
-              <a:t>Agents that analyze codebases and produce comprehensive, up-to-date documentation</a:t>
+              <a:t>Control egress and authenticate each generic MCP connection separately</a:t>
             </a:r>
             <a:endParaRPr lang="en-US" sz="1000" dirty="0"/>
           </a:p>
@@ -29906,7 +29434,7 @@
                 <a:ea typeface="Calibri" pitchFamily="34" charset="-122"/>
                 <a:cs typeface="Calibri" pitchFamily="34" charset="-120"/>
               </a:rPr>
-              <a:t>6 / 28</a:t>
+              <a:t>22 / 24</a:t>
             </a:r>
             <a:endParaRPr lang="en-US" sz="900" dirty="0"/>
           </a:p>
@@ -31177,7 +30705,7 @@
                 </a:solidFill>
                 <a:latin typeface="Calibri"/>
               </a:rPr>
-              <a:t>Built-in Tools</a:t>
+              <a:t>Tool Taxonomy</a:t>
             </a:r>
           </a:p>
         </p:txBody>
@@ -31219,7 +30747,7 @@
                 </a:solidFill>
                 <a:latin typeface="Calibri"/>
               </a:rPr>
-              <a:t>Representative tools; availability depends on runtime, platform and session configuration</a:t>
+              <a:t>Three sources share one filtered catalogue; exact tools depend on runtime and configuration</a:t>
             </a:r>
           </a:p>
         </p:txBody>
@@ -31307,7 +30835,7 @@
                 </a:solidFill>
                 <a:latin typeface="Calibri"/>
               </a:rPr>
-              <a:t>File System — Reading</a:t>
+              <a:t>Runtime Built-ins</a:t>
             </a:r>
           </a:p>
         </p:txBody>
@@ -31391,7 +30919,7 @@
                 </a:solidFill>
                 <a:latin typeface="Calibri"/>
               </a:rPr>
-              <a:t>Read file contents</a:t>
+              <a:t>Read files or directories</a:t>
             </a:r>
           </a:p>
         </p:txBody>
@@ -31601,7 +31129,7 @@
                 </a:solidFill>
                 <a:latin typeface="Consolas"/>
               </a:rPr>
-              <a:t>Scope</a:t>
+              <a:t>Filter</a:t>
             </a:r>
           </a:p>
         </p:txBody>
@@ -31643,7 +31171,7 @@
                 </a:solidFill>
                 <a:latin typeface="Calibri"/>
               </a:rPr>
-              <a:t>available_tools / excluded_tools</a:t>
+              <a:t>ToolSet / available_tools</a:t>
             </a:r>
           </a:p>
         </p:txBody>
@@ -31685,7 +31213,7 @@
                 </a:solidFill>
                 <a:latin typeface="Consolas"/>
               </a:rPr>
-              <a:t>Policy</a:t>
+              <a:t>Boundary</a:t>
             </a:r>
           </a:p>
         </p:txBody>
@@ -31815,7 +31343,7 @@
                 </a:solidFill>
                 <a:latin typeface="Calibri"/>
               </a:rPr>
-              <a:t>File System — Writing</a:t>
+              <a:t>Host Custom Tools</a:t>
             </a:r>
           </a:p>
         </p:txBody>
@@ -31857,7 +31385,7 @@
                 </a:solidFill>
                 <a:latin typeface="Consolas"/>
               </a:rPr>
-              <a:t>edit</a:t>
+              <a:t>@define_tool</a:t>
             </a:r>
           </a:p>
         </p:txBody>
@@ -31899,7 +31427,7 @@
                 </a:solidFill>
                 <a:latin typeface="Calibri"/>
               </a:rPr>
-              <a:t>Targeted edits to existing files</a:t>
+              <a:t>Sync or async handler</a:t>
             </a:r>
           </a:p>
         </p:txBody>
@@ -31941,7 +31469,7 @@
                 </a:solidFill>
                 <a:latin typeface="Consolas"/>
               </a:rPr>
-              <a:t>create</a:t>
+              <a:t>Host process</a:t>
             </a:r>
           </a:p>
         </p:txBody>
@@ -31983,7 +31511,7 @@
                 </a:solidFill>
                 <a:latin typeface="Calibri"/>
               </a:rPr>
-              <a:t>Create new files</a:t>
+              <a:t>Needs separate isolation</a:t>
             </a:r>
           </a:p>
         </p:txBody>
@@ -32025,7 +31553,7 @@
                 </a:solidFill>
                 <a:latin typeface="Consolas"/>
               </a:rPr>
-              <a:t>apply_patch</a:t>
+              <a:t/>
             </a:r>
           </a:p>
         </p:txBody>
@@ -32067,7 +31595,7 @@
                 </a:solidFill>
                 <a:latin typeface="Calibri"/>
               </a:rPr>
-              <a:t>Patch files when exposed</a:t>
+              <a:t/>
             </a:r>
           </a:p>
         </p:txBody>
@@ -32155,7 +31683,7 @@
                 </a:solidFill>
                 <a:latin typeface="Calibri"/>
               </a:rPr>
-              <a:t>Shell &amp; Execution</a:t>
+              <a:t>MCP Servers</a:t>
             </a:r>
           </a:p>
         </p:txBody>
@@ -32197,7 +31725,7 @@
                 </a:solidFill>
                 <a:latin typeface="Consolas"/>
               </a:rPr>
-              <a:t>bash</a:t>
+              <a:t>stdio / HTTP</a:t>
             </a:r>
           </a:p>
         </p:txBody>
@@ -32239,7 +31767,7 @@
                 </a:solidFill>
                 <a:latin typeface="Calibri"/>
               </a:rPr>
-              <a:t>Execute shell commands</a:t>
+              <a:t>Separate process or service</a:t>
             </a:r>
           </a:p>
         </p:txBody>
@@ -32281,7 +31809,7 @@
                 </a:solidFill>
                 <a:latin typeface="Consolas"/>
               </a:rPr>
-              <a:t>Platform</a:t>
+              <a:t>Authentication</a:t>
             </a:r>
           </a:p>
         </p:txBody>
@@ -32323,7 +31851,7 @@
                 </a:solidFill>
                 <a:latin typeface="Calibri"/>
               </a:rPr>
-              <a:t>Shell tools vary by OS</a:t>
+              <a:t>Independent headers or OAuth</a:t>
             </a:r>
           </a:p>
         </p:txBody>
@@ -32411,7 +31939,7 @@
                 </a:solidFill>
                 <a:latin typeface="Calibri"/>
               </a:rPr>
-              <a:t>Web</a:t>
+              <a:t>Human Input</a:t>
             </a:r>
           </a:p>
         </p:txBody>
@@ -32453,7 +31981,7 @@
                 </a:solidFill>
                 <a:latin typeface="Consolas"/>
               </a:rPr>
-              <a:t>web_fetch</a:t>
+              <a:t>ask_user</a:t>
             </a:r>
           </a:p>
         </p:txBody>
@@ -32495,7 +32023,7 @@
                 </a:solidFill>
                 <a:latin typeface="Calibri"/>
               </a:rPr>
-              <a:t>Fetch content from URLs</a:t>
+              <a:t>Legacy or elicitation</a:t>
             </a:r>
           </a:p>
         </p:txBody>
@@ -32583,7 +32111,7 @@
                 </a:solidFill>
                 <a:latin typeface="Calibri"/>
               </a:rPr>
-              <a:t>Agent Infrastructure</a:t>
+              <a:t>Session Lifecycle</a:t>
             </a:r>
           </a:p>
         </p:txBody>
@@ -32625,7 +32153,7 @@
                 </a:solidFill>
                 <a:latin typeface="Consolas"/>
               </a:rPr>
-              <a:t>task</a:t>
+              <a:t>session_id</a:t>
             </a:r>
           </a:p>
         </p:txBody>
@@ -32667,7 +32195,7 @@
                 </a:solidFill>
                 <a:latin typeface="Calibri"/>
               </a:rPr>
-              <a:t>Delegate work to sub-agents</a:t>
+              <a:t>Not a tool; used for resume</a:t>
             </a:r>
           </a:p>
         </p:txBody>
@@ -32709,7 +32237,7 @@
                 </a:solidFill>
                 <a:latin typeface="Consolas"/>
               </a:rPr>
-              <a:t>ask_user</a:t>
+              <a:t/>
             </a:r>
           </a:p>
         </p:txBody>
@@ -32751,7 +32279,7 @@
                 </a:solidFill>
                 <a:latin typeface="Calibri"/>
               </a:rPr>
-              <a:t>Ask the user a question</a:t>
+              <a:t/>
             </a:r>
           </a:p>
         </p:txBody>
@@ -32793,7 +32321,7 @@
                 </a:solidFill>
                 <a:latin typeface="Consolas"/>
               </a:rPr>
-              <a:t>session_id</a:t>
+              <a:t/>
             </a:r>
           </a:p>
         </p:txBody>
@@ -32835,7 +32363,7 @@
                 </a:solidFill>
                 <a:latin typeface="Calibri"/>
               </a:rPr>
-              <a:t>Keep conversation state for resume</a:t>
+              <a:t/>
             </a:r>
           </a:p>
         </p:txBody>
@@ -32877,7 +32405,7 @@
                 </a:solidFill>
                 <a:latin typeface="Calibri"/>
               </a:rPr>
-              <a:t>Add MCP servers or custom tools. Scope access deliberately.</a:t>
+              <a:t>Filter canonical names by source: builtin:, custom:, and mcp:.</a:t>
             </a:r>
           </a:p>
         </p:txBody>
@@ -32919,7 +32447,7 @@
                 </a:solidFill>
                 <a:latin typeface="Calibri"/>
               </a:rPr>
-              <a:t>8 / 28</a:t>
+              <a:t>9 / 24</a:t>
             </a:r>
           </a:p>
         </p:txBody>
@@ -32994,7 +32522,7 @@
                 </a:solidFill>
                 <a:latin typeface="Calibri"/>
               </a:rPr>
-              <a:t>Controlling Tool Access</a:t>
+              <a:t>Three Boundaries</a:t>
             </a:r>
           </a:p>
         </p:txBody>
@@ -33036,7 +32564,7 @@
                 </a:solidFill>
                 <a:latin typeface="Calibri"/>
               </a:rPr>
-              <a:t>Three ways to restrict what the agent can do</a:t>
+              <a:t>Exposure is not approval. Approval is not containment.</a:t>
             </a:r>
           </a:p>
         </p:txBody>
@@ -33124,7 +32652,7 @@
                 </a:solidFill>
                 <a:latin typeface="Calibri"/>
               </a:rPr>
-              <a:t>1. Session Config</a:t>
+              <a:t>1. Exposure</a:t>
             </a:r>
           </a:p>
         </p:txBody>
@@ -33166,7 +32694,7 @@
                 </a:solidFill>
                 <a:latin typeface="Calibri"/>
               </a:rPr>
-              <a:t>Allowlist or exclude tools at creation</a:t>
+              <a:t>Shape the model-visible catalogue</a:t>
             </a:r>
           </a:p>
         </p:txBody>
@@ -33343,7 +32871,8 @@
                 </a:solidFill>
                 <a:latin typeface="Courier New"/>
               </a:rPr>
-              <a:t xml:space="preserve">config = {</a:t>
+              <a:t xml:space="preserve">tools = ToolSet().add_builtin(["view"])
+# available_tools=tools</a:t>
             </a:r>
           </a:p>
           <a:p>
@@ -33365,7 +32894,7 @@
                 </a:solidFill>
                 <a:latin typeface="Courier New"/>
               </a:rPr>
-              <a:t xml:space="preserve">  "available_tools":</a:t>
+              <a:t xml:space="preserve"/>
             </a:r>
           </a:p>
           <a:p>
@@ -33387,7 +32916,7 @@
                 </a:solidFill>
                 <a:latin typeface="Courier New"/>
               </a:rPr>
-              <a:t xml:space="preserve">    ["builtin:view"],</a:t>
+              <a:t xml:space="preserve"/>
             </a:r>
           </a:p>
           <a:p>
@@ -33409,7 +32938,7 @@
                 </a:solidFill>
                 <a:latin typeface="Courier New"/>
               </a:rPr>
-              <a:t xml:space="preserve">}</a:t>
+              <a:t xml:space="preserve"/>
             </a:r>
           </a:p>
           <a:p>
@@ -33431,7 +32960,7 @@
                 </a:solidFill>
                 <a:latin typeface="Courier New"/>
               </a:rPr>
-              <a:t xml:space="preserve"># Pass these session kwargs</a:t>
+              <a:t xml:space="preserve"/>
             </a:r>
           </a:p>
           <a:p>
@@ -33453,7 +32982,7 @@
                 </a:solidFill>
                 <a:latin typeface="Courier New"/>
               </a:rPr>
-              <a:t xml:space="preserve"># alongside the required</a:t>
+              <a:t xml:space="preserve"/>
             </a:r>
           </a:p>
           <a:p>
@@ -33475,7 +33004,7 @@
                 </a:solidFill>
                 <a:latin typeface="Courier New"/>
               </a:rPr>
-              <a:t xml:space="preserve"># permission handler.</a:t>
+              <a:t xml:space="preserve"/>
             </a:r>
           </a:p>
           <a:p>
@@ -33497,7 +33026,7 @@
                 </a:solidFill>
                 <a:latin typeface="Courier New"/>
               </a:rPr>
-              <a:t xml:space="preserve"># Tool scope != sandbox.</a:t>
+              <a:t xml:space="preserve"/>
             </a:r>
           </a:p>
         </p:txBody>
@@ -33585,7 +33114,7 @@
                 </a:solidFill>
                 <a:latin typeface="Calibri"/>
               </a:rPr>
-              <a:t>2. onPreToolUse Hook</a:t>
+              <a:t>2. Decision</a:t>
             </a:r>
           </a:p>
         </p:txBody>
@@ -33627,7 +33156,7 @@
                 </a:solidFill>
                 <a:latin typeface="Calibri"/>
               </a:rPr>
-              <a:t>Dynamic per-call decisions</a:t>
+              <a:t>Permission callbacks, hooks, managed settings</a:t>
             </a:r>
           </a:p>
         </p:txBody>
@@ -33804,7 +33333,11 @@
                 </a:solidFill>
                 <a:latin typeface="Courier New"/>
               </a:rPr>
-              <a:t xml:space="preserve">ALLOWED = {"glob", "view"}</a:t>
+              <a:t xml:space="preserve">ManagedSettings(
+  permissions=ManagedSettingsPermissions(
+    deny=["shell(rm*)"], ask=["write"]
+  )
+)</a:t>
             </a:r>
           </a:p>
           <a:p>
@@ -33826,7 +33359,7 @@
                 </a:solidFill>
                 <a:latin typeface="Courier New"/>
               </a:rPr>
-              <a:t xml:space="preserve">async def guard(inp, inv):</a:t>
+              <a:t xml:space="preserve"/>
             </a:r>
           </a:p>
           <a:p>
@@ -33848,7 +33381,7 @@
                 </a:solidFill>
                 <a:latin typeface="Courier New"/>
               </a:rPr>
-              <a:t xml:space="preserve">  name = inp["toolName"]</a:t>
+              <a:t xml:space="preserve"/>
             </a:r>
           </a:p>
           <a:p>
@@ -33870,7 +33403,7 @@
                 </a:solidFill>
                 <a:latin typeface="Courier New"/>
               </a:rPr>
-              <a:t xml:space="preserve">  if name not in ALLOWED:</a:t>
+              <a:t xml:space="preserve"/>
             </a:r>
           </a:p>
           <a:p>
@@ -33892,7 +33425,7 @@
                 </a:solidFill>
                 <a:latin typeface="Courier New"/>
               </a:rPr>
-              <a:t xml:space="preserve">    return {</a:t>
+              <a:t xml:space="preserve"/>
             </a:r>
           </a:p>
           <a:p>
@@ -33914,7 +33447,7 @@
                 </a:solidFill>
                 <a:latin typeface="Courier New"/>
               </a:rPr>
-              <a:t xml:space="preserve">      "permissionDecision":</a:t>
+              <a:t xml:space="preserve"/>
             </a:r>
           </a:p>
           <a:p>
@@ -33936,7 +33469,7 @@
                 </a:solidFill>
                 <a:latin typeface="Courier New"/>
               </a:rPr>
-              <a:t xml:space="preserve">        "deny",</a:t>
+              <a:t xml:space="preserve"/>
             </a:r>
           </a:p>
           <a:p>
@@ -33958,7 +33491,7 @@
                 </a:solidFill>
                 <a:latin typeface="Courier New"/>
               </a:rPr>
-              <a:t xml:space="preserve">    }</a:t>
+              <a:t xml:space="preserve"/>
             </a:r>
           </a:p>
           <a:p>
@@ -33980,7 +33513,7 @@
                 </a:solidFill>
                 <a:latin typeface="Courier New"/>
               </a:rPr>
-              <a:t xml:space="preserve">  return None</a:t>
+              <a:t xml:space="preserve"/>
             </a:r>
           </a:p>
           <a:p>
@@ -34002,7 +33535,7 @@
                 </a:solidFill>
                 <a:latin typeface="Courier New"/>
               </a:rPr>
-              <a:t xml:space="preserve"># Hook: on_pre_tool_use</a:t>
+              <a:t xml:space="preserve"/>
             </a:r>
           </a:p>
         </p:txBody>
@@ -34090,7 +33623,7 @@
                 </a:solidFill>
                 <a:latin typeface="Calibri"/>
               </a:rPr>
-              <a:t>3. Managed Policy</a:t>
+              <a:t>3. Containment</a:t>
             </a:r>
           </a:p>
         </p:txBody>
@@ -34132,7 +33665,7 @@
                 </a:solidFill>
                 <a:latin typeface="Calibri"/>
               </a:rPr>
-              <a:t>Startup-only; CLI 1.0.79-5+</a:t>
+              <a:t>Runtime sandbox plus host isolation</a:t>
             </a:r>
           </a:p>
         </p:txBody>
@@ -34309,7 +33842,11 @@
                 </a:solidFill>
                 <a:latin typeface="Courier New"/>
               </a:rPr>
-              <a:t xml:space="preserve">managed_settings={</a:t>
+              <a:t xml:space="preserve">SandboxConfig(
+  enabled=True,
+  allow_bypass=False,
+)
+# Host still owns tenant/process boundaries</a:t>
             </a:r>
           </a:p>
           <a:p>
@@ -34331,7 +33868,7 @@
                 </a:solidFill>
                 <a:latin typeface="Courier New"/>
               </a:rPr>
-              <a:t xml:space="preserve">  "permissions": {</a:t>
+              <a:t xml:space="preserve"/>
             </a:r>
           </a:p>
           <a:p>
@@ -34353,7 +33890,7 @@
                 </a:solidFill>
                 <a:latin typeface="Courier New"/>
               </a:rPr>
-              <a:t xml:space="preserve">    "deny": ["shell(rm*)"],</a:t>
+              <a:t xml:space="preserve"/>
             </a:r>
           </a:p>
           <a:p>
@@ -34375,7 +33912,7 @@
                 </a:solidFill>
                 <a:latin typeface="Courier New"/>
               </a:rPr>
-              <a:t xml:space="preserve">    "ask": ["write"],</a:t>
+              <a:t xml:space="preserve"/>
             </a:r>
           </a:p>
           <a:p>
@@ -34397,7 +33934,7 @@
                 </a:solidFill>
                 <a:latin typeface="Courier New"/>
               </a:rPr>
-              <a:t xml:space="preserve">  },</a:t>
+              <a:t xml:space="preserve"/>
             </a:r>
           </a:p>
           <a:p>
@@ -34419,7 +33956,7 @@
                 </a:solidFill>
                 <a:latin typeface="Courier New"/>
               </a:rPr>
-              <a:t xml:space="preserve">}</a:t>
+              <a:t xml:space="preserve"/>
             </a:r>
           </a:p>
           <a:p>
@@ -34441,7 +33978,7 @@
                 </a:solidFill>
                 <a:latin typeface="Courier New"/>
               </a:rPr>
-              <a:t xml:space="preserve"># CLI 1.0.79-5+</a:t>
+              <a:t xml:space="preserve"/>
             </a:r>
           </a:p>
           <a:p>
@@ -34463,7 +34000,7 @@
                 </a:solidFill>
                 <a:latin typeface="Courier New"/>
               </a:rPr>
-              <a:t xml:space="preserve"># Re-supply on resume.</a:t>
+              <a:t xml:space="preserve"/>
             </a:r>
           </a:p>
           <a:p>
@@ -34485,7 +34022,7 @@
                 </a:solidFill>
                 <a:latin typeface="Courier New"/>
               </a:rPr>
-              <a:t xml:space="preserve"># Don't use approve_all.</a:t>
+              <a:t xml:space="preserve"/>
             </a:r>
           </a:p>
         </p:txBody>
@@ -34527,7 +34064,7 @@
                 </a:solidFill>
                 <a:latin typeface="Calibri"/>
               </a:rPr>
-              <a:t>9 / 28</a:t>
+              <a:t>10 / 24</a:t>
             </a:r>
           </a:p>
         </p:txBody>

--- a/GitHub-Copilot-SDK.pptx
+++ b/GitHub-Copilot-SDK.pptx
@@ -5760,7 +5760,7 @@
                 <a:ea typeface="Calibri" pitchFamily="34" charset="-122"/>
                 <a:cs typeface="Calibri" pitchFamily="34" charset="-120"/>
               </a:rPr>
-              <a:t>Möglichkeiten · Capability Map</a:t>
+              <a:t>Capabilities · Capability Map</a:t>
             </a:r>
             <a:endParaRPr lang="en-US" sz="2600" dirty="0"/>
           </a:p>
@@ -6692,7 +6692,7 @@
                   <a:srgbClr val="C9D1D9"/>
                 </a:solidFill>
               </a:rPr>
-              <a:t>Möglichkeiten · Where the SDK Fits</a:t>
+              <a:t>Capabilities · Where the SDK Fits</a:t>
             </a:r>
           </a:p>
         </p:txBody>
@@ -7210,7 +7210,7 @@
                 <a:ea typeface="Calibri" pitchFamily="34" charset="-122"/>
                 <a:cs typeface="Calibri" pitchFamily="34" charset="-120"/>
               </a:rPr>
-              <a:t>Möglichkeiten · Identity Models</a:t>
+              <a:t>Capabilities · Identity Models</a:t>
             </a:r>
             <a:endParaRPr lang="en-US" sz="2600" dirty="0"/>
           </a:p>
@@ -9042,7 +9042,7 @@
                 <a:ea typeface="Calibri" pitchFamily="34" charset="-122"/>
                 <a:cs typeface="Calibri" pitchFamily="34" charset="-120"/>
               </a:rPr>
-              <a:t>Möglichkeiten · BYOK</a:t>
+              <a:t>Capabilities · BYOK</a:t>
             </a:r>
             <a:endParaRPr lang="en-US" sz="2600" dirty="0"/>
           </a:p>
@@ -13276,7 +13276,7 @@
                 </a:solidFill>
                 <a:latin typeface="Courier New"/>
               </a:rPr>
-              <a:t>    "Explain the SDK in 3 sentences.",</a:t>
+              <a:t xml:space="preserve">    "Explain the SDK in 3 sentences.",</a:t>
             </a:r>
           </a:p>
           <a:p>
@@ -13298,7 +13298,7 @@
                 </a:solidFill>
                 <a:latin typeface="Courier New"/>
               </a:rPr>
-              <a:t>    timeout=60)</a:t>
+              <a:t xml:space="preserve">    timeout=60)</a:t>
             </a:r>
           </a:p>
           <a:p>
@@ -13342,7 +13342,7 @@
                 </a:solidFill>
                 <a:latin typeface="Courier New"/>
               </a:rPr>
-              <a:t>    raise RuntimeError("No final message")</a:t>
+              <a:t xml:space="preserve">    raise RuntimeError("No final message")</a:t>
             </a:r>
           </a:p>
           <a:p>
@@ -14229,7 +14229,7 @@
                 <a:ea typeface="Calibri" pitchFamily="34" charset="-122"/>
                 <a:cs typeface="Calibri" pitchFamily="34" charset="-120"/>
               </a:rPr>
-              <a:t>01 · SDK im Detail</a:t>
+              <a:t>01 · SDK in Detail</a:t>
             </a:r>
             <a:endParaRPr lang="en-US" sz="1200" dirty="0"/>
           </a:p>
@@ -14371,7 +14371,7 @@
                 <a:ea typeface="Calibri" pitchFamily="34" charset="-122"/>
                 <a:cs typeface="Calibri" pitchFamily="34" charset="-120"/>
               </a:rPr>
-              <a:t>02 · Abgrenzung zur CLI</a:t>
+              <a:t>02 · SDK vs. CLI</a:t>
             </a:r>
             <a:endParaRPr lang="en-US" sz="1200" dirty="0"/>
           </a:p>
@@ -14513,7 +14513,7 @@
                 <a:ea typeface="Calibri" pitchFamily="34" charset="-122"/>
                 <a:cs typeface="Calibri" pitchFamily="34" charset="-120"/>
               </a:rPr>
-              <a:t>03 · Möglichkeiten</a:t>
+              <a:t>03 · Capabilities</a:t>
             </a:r>
             <a:endParaRPr lang="en-US" sz="1200" dirty="0"/>
           </a:p>
@@ -18807,7 +18807,7 @@
                 </a:solidFill>
                 <a:latin typeface="Courier New"/>
               </a:rPr>
-              <a:t>    match request:</a:t>
+              <a:t xml:space="preserve">    match request:</a:t>
             </a:r>
           </a:p>
           <a:p>
@@ -18829,7 +18829,7 @@
                 </a:solidFill>
                 <a:latin typeface="Courier New"/>
               </a:rPr>
-              <a:t>        case PermissionRequestShell(full_command_text=cmd):</a:t>
+              <a:t xml:space="preserve">        case PermissionRequestShell(full_command_text=cmd):</a:t>
             </a:r>
           </a:p>
           <a:p>
@@ -18851,7 +18851,7 @@
                 </a:solidFill>
                 <a:latin typeface="Courier New"/>
               </a:rPr>
-              <a:t>            if not is_expected_command(cmd):</a:t>
+              <a:t xml:space="preserve">            if not is_expected_command(cmd):</a:t>
             </a:r>
           </a:p>
           <a:p>
@@ -18873,7 +18873,7 @@
                 </a:solidFill>
                 <a:latin typeface="Courier New"/>
               </a:rPr>
-              <a:t>                return PermissionDecisionReject()</a:t>
+              <a:t xml:space="preserve">                return PermissionDecisionReject()</a:t>
             </a:r>
           </a:p>
           <a:p>
@@ -18895,7 +18895,7 @@
                 </a:solidFill>
                 <a:latin typeface="Courier New"/>
               </a:rPr>
-              <a:t>            answer = await read_answer(</a:t>
+              <a:t xml:space="preserve">            answer = await read_answer(</a:t>
             </a:r>
           </a:p>
           <a:p>
@@ -18917,7 +18917,7 @@
                 </a:solidFill>
                 <a:latin typeface="Courier New"/>
               </a:rPr>
-              <a:t>                "Approve once? [y/N]: ", timeout=120)</a:t>
+              <a:t xml:space="preserve">                "Approve once? [y/N]: ", timeout=120)</a:t>
             </a:r>
           </a:p>
           <a:p>
@@ -18939,7 +18939,7 @@
                 </a:solidFill>
                 <a:latin typeface="Courier New"/>
               </a:rPr>
-              <a:t>            if answer.lower() == "y":</a:t>
+              <a:t xml:space="preserve">            if answer.lower() == "y":</a:t>
             </a:r>
           </a:p>
           <a:p>
@@ -18961,7 +18961,7 @@
                 </a:solidFill>
                 <a:latin typeface="Courier New"/>
               </a:rPr>
-              <a:t>                return PermissionDecisionApproveOnce()</a:t>
+              <a:t xml:space="preserve">                return PermissionDecisionApproveOnce()</a:t>
             </a:r>
           </a:p>
           <a:p>
@@ -18983,7 +18983,7 @@
                 </a:solidFill>
                 <a:latin typeface="Courier New"/>
               </a:rPr>
-              <a:t>    return PermissionDecisionReject()</a:t>
+              <a:t xml:space="preserve">    return PermissionDecisionReject()</a:t>
             </a:r>
           </a:p>
         </p:txBody>
@@ -24236,7 +24236,7 @@
                 <a:ea typeface="Calibri" pitchFamily="34" charset="-122"/>
                 <a:cs typeface="Calibri" pitchFamily="34" charset="-120"/>
               </a:rPr>
-              <a:t>SDK im Detail · What It Is</a:t>
+              <a:t>SDK in Detail · What It Is</a:t>
             </a:r>
             <a:endParaRPr lang="en-US" sz="2600" dirty="0"/>
           </a:p>
@@ -24964,7 +24964,7 @@
                 <a:ea typeface="Calibri" pitchFamily="34" charset="-122"/>
                 <a:cs typeface="Calibri" pitchFamily="34" charset="-120"/>
               </a:rPr>
-              <a:t>SDK im Detail · Architecture</a:t>
+              <a:t>SDK in Detail · Architecture</a:t>
             </a:r>
             <a:endParaRPr lang="en-US" sz="2600" dirty="0"/>
           </a:p>
@@ -26085,7 +26085,7 @@
                 <a:ea typeface="Calibri" pitchFamily="34" charset="-122"/>
                 <a:cs typeface="Calibri" pitchFamily="34" charset="-120"/>
               </a:rPr>
-              <a:t>SDK im Detail · Client and Session Lifecycle</a:t>
+              <a:t>SDK in Detail · Client and Session Lifecycle</a:t>
             </a:r>
             <a:endParaRPr lang="en-US" sz="2600" dirty="0"/>
           </a:p>
@@ -26667,7 +26667,7 @@
                 <a:ea typeface="Calibri" pitchFamily="34" charset="-122"/>
                 <a:cs typeface="Calibri" pitchFamily="34" charset="-120"/>
               </a:rPr>
-              <a:t>SDK im Detail · Events and Streaming</a:t>
+              <a:t>SDK in Detail · Events and Streaming</a:t>
             </a:r>
             <a:endParaRPr lang="en-US" sz="2600" dirty="0"/>
           </a:p>
@@ -27530,7 +27530,7 @@
                 <a:ea typeface="Calibri" pitchFamily="34" charset="-122"/>
                 <a:cs typeface="Calibri" pitchFamily="34" charset="-120"/>
               </a:rPr>
-              <a:t>SDK im Detail · Tool and Session Surfaces</a:t>
+              <a:t>SDK in Detail · Tool and Session Surfaces</a:t>
             </a:r>
             <a:endParaRPr lang="en-US" sz="2600" dirty="0"/>
           </a:p>
@@ -28727,7 +28727,7 @@
                 </a:solidFill>
                 <a:latin typeface="Calibri"/>
               </a:rPr>
-              <a:t>SDK im Detail · Permission and Containment</a:t>
+              <a:t>SDK in Detail · Permission and Containment</a:t>
             </a:r>
           </a:p>
         </p:txBody>

--- a/GitHub-Copilot-SDK.pptx
+++ b/GitHub-Copilot-SDK.pptx
@@ -2662,479 +2662,6 @@
               <a:t>GitHub Copilot SDK</a:t>
             </a:r>
             <a:endParaRPr lang="en-US" sz="4200" dirty="0"/>
-          </a:p>
-        </p:txBody>
-      </p:sp>
-      <p:sp>
-        <p:nvSpPr>
-          <p:cNvPr id="5" name="Text 2"/>
-          <p:cNvSpPr/>
-          <p:nvPr/>
-        </p:nvSpPr>
-        <p:spPr>
-          <a:xfrm>
-            <a:off x="457200" y="2423160"/>
-            <a:ext cx="8229600" cy="457200"/>
-          </a:xfrm>
-          <a:prstGeom prst="rect">
-            <a:avLst/>
-          </a:prstGeom>
-          <a:noFill/>
-          <a:ln>
-            <a:noFill/>
-          </a:ln>
-        </p:spPr>
-        <p:txBody>
-          <a:bodyPr wrap="square" lIns="0" tIns="0" rIns="0" bIns="0" rtlCol="0" anchor="ctr"/>
-          <a:lstStyle/>
-          <a:p>
-            <a:pPr marL="0" indent="0" algn="ctr">
-              <a:buNone/>
-            </a:pPr>
-            <a:r>
-              <a:rPr lang="en-US" sz="2200" i="1" dirty="0">
-                <a:solidFill>
-                  <a:srgbClr val="58A6FF"/>
-                </a:solidFill>
-                <a:latin typeface="Calibri" pitchFamily="34" charset="0"/>
-                <a:ea typeface="Calibri" pitchFamily="34" charset="-122"/>
-                <a:cs typeface="Calibri" pitchFamily="34" charset="-120"/>
-              </a:rPr>
-              <a:t>Eight verified Python patterns</a:t>
-            </a:r>
-            <a:endParaRPr lang="en-US" sz="2200" dirty="0"/>
-          </a:p>
-        </p:txBody>
-      </p:sp>
-      <p:sp>
-        <p:nvSpPr>
-          <p:cNvPr id="6" name="Text 3"/>
-          <p:cNvSpPr/>
-          <p:nvPr/>
-        </p:nvSpPr>
-        <p:spPr>
-          <a:xfrm>
-            <a:off x="1371600" y="3063240"/>
-            <a:ext cx="6400800" cy="365760"/>
-          </a:xfrm>
-          <a:prstGeom prst="rect">
-            <a:avLst/>
-          </a:prstGeom>
-          <a:noFill/>
-          <a:ln>
-            <a:noFill/>
-          </a:ln>
-        </p:spPr>
-        <p:txBody>
-          <a:bodyPr wrap="square" lIns="0" tIns="0" rIns="0" bIns="0" rtlCol="0" anchor="ctr"/>
-          <a:lstStyle/>
-          <a:p>
-            <a:pPr marL="0" indent="0" algn="ctr">
-              <a:buNone/>
-            </a:pPr>
-            <a:r>
-              <a:rPr lang="en-US" sz="1400" dirty="0">
-                <a:solidFill>
-                  <a:srgbClr val="8B949E"/>
-                </a:solidFill>
-                <a:latin typeface="Calibri" pitchFamily="34" charset="0"/>
-                <a:ea typeface="Calibri" pitchFamily="34" charset="-122"/>
-                <a:cs typeface="Calibri" pitchFamily="34" charset="-120"/>
-              </a:rPr>
-              <a:t>From a bounded first response to MCP, HITL, persistence, and sandboxing</a:t>
-            </a:r>
-            <a:endParaRPr lang="en-US" sz="1400" dirty="0"/>
-          </a:p>
-        </p:txBody>
-      </p:sp>
-      <p:sp>
-        <p:nvSpPr>
-          <p:cNvPr id="7" name="Shape 4"/>
-          <p:cNvSpPr/>
-          <p:nvPr/>
-        </p:nvSpPr>
-        <p:spPr>
-          <a:xfrm>
-            <a:off x="1463040" y="3749040"/>
-            <a:ext cx="1097280" cy="320040"/>
-          </a:xfrm>
-          <a:prstGeom prst="line">
-            <a:avLst/>
-          </a:prstGeom>
-          <a:solidFill>
-            <a:srgbClr val="161B22"/>
-          </a:solidFill>
-          <a:ln w="12700">
-            <a:prstDash val="solid"/>
-          </a:ln>
-        </p:spPr>
-        <p:txBody>
-          <a:bodyPr/>
-          <a:lstStyle/>
-          <a:p>
-            <a:endParaRPr/>
-          </a:p>
-        </p:txBody>
-      </p:sp>
-      <p:sp>
-        <p:nvSpPr>
-          <p:cNvPr id="8" name="Text 5"/>
-          <p:cNvSpPr/>
-          <p:nvPr/>
-        </p:nvSpPr>
-        <p:spPr>
-          <a:xfrm>
-            <a:off x="1463040" y="3749040"/>
-            <a:ext cx="1097280" cy="320040"/>
-          </a:xfrm>
-          <a:prstGeom prst="rect">
-            <a:avLst/>
-          </a:prstGeom>
-          <a:noFill/>
-          <a:ln>
-            <a:noFill/>
-          </a:ln>
-        </p:spPr>
-        <p:txBody>
-          <a:bodyPr wrap="square" lIns="0" tIns="0" rIns="0" bIns="0" rtlCol="0" anchor="ctr"/>
-          <a:lstStyle/>
-          <a:p>
-            <a:pPr marL="0" indent="0" algn="ctr">
-              <a:buNone/>
-            </a:pPr>
-            <a:r>
-              <a:rPr lang="en-US" sz="1100" dirty="0">
-                <a:solidFill>
-                  <a:srgbClr val="C9D1D9"/>
-                </a:solidFill>
-                <a:latin typeface="Calibri" pitchFamily="34" charset="0"/>
-                <a:ea typeface="Calibri" pitchFamily="34" charset="-122"/>
-                <a:cs typeface="Calibri" pitchFamily="34" charset="-120"/>
-              </a:rPr>
-              <a:t>TypeScript</a:t>
-            </a:r>
-            <a:endParaRPr lang="en-US" sz="1100" dirty="0"/>
-          </a:p>
-        </p:txBody>
-      </p:sp>
-      <p:sp>
-        <p:nvSpPr>
-          <p:cNvPr id="9" name="Shape 6"/>
-          <p:cNvSpPr/>
-          <p:nvPr/>
-        </p:nvSpPr>
-        <p:spPr>
-          <a:xfrm>
-            <a:off x="2697480" y="3749040"/>
-            <a:ext cx="1097280" cy="320040"/>
-          </a:xfrm>
-          <a:prstGeom prst="line">
-            <a:avLst/>
-          </a:prstGeom>
-          <a:solidFill>
-            <a:srgbClr val="161B22"/>
-          </a:solidFill>
-          <a:ln w="12700">
-            <a:prstDash val="solid"/>
-          </a:ln>
-        </p:spPr>
-        <p:txBody>
-          <a:bodyPr/>
-          <a:lstStyle/>
-          <a:p>
-            <a:endParaRPr/>
-          </a:p>
-        </p:txBody>
-      </p:sp>
-      <p:sp>
-        <p:nvSpPr>
-          <p:cNvPr id="10" name="Text 7"/>
-          <p:cNvSpPr/>
-          <p:nvPr/>
-        </p:nvSpPr>
-        <p:spPr>
-          <a:xfrm>
-            <a:off x="2697480" y="3749040"/>
-            <a:ext cx="1097280" cy="320040"/>
-          </a:xfrm>
-          <a:prstGeom prst="rect">
-            <a:avLst/>
-          </a:prstGeom>
-          <a:noFill/>
-          <a:ln>
-            <a:noFill/>
-          </a:ln>
-        </p:spPr>
-        <p:txBody>
-          <a:bodyPr wrap="square" lIns="0" tIns="0" rIns="0" bIns="0" rtlCol="0" anchor="ctr"/>
-          <a:lstStyle/>
-          <a:p>
-            <a:pPr marL="0" indent="0" algn="ctr">
-              <a:buNone/>
-            </a:pPr>
-            <a:r>
-              <a:rPr lang="en-US" sz="1100" dirty="0">
-                <a:solidFill>
-                  <a:srgbClr val="C9D1D9"/>
-                </a:solidFill>
-                <a:latin typeface="Calibri" pitchFamily="34" charset="0"/>
-                <a:ea typeface="Calibri" pitchFamily="34" charset="-122"/>
-                <a:cs typeface="Calibri" pitchFamily="34" charset="-120"/>
-              </a:rPr>
-              <a:t>Python</a:t>
-            </a:r>
-            <a:endParaRPr lang="en-US" sz="1100" dirty="0"/>
-          </a:p>
-        </p:txBody>
-      </p:sp>
-      <p:sp>
-        <p:nvSpPr>
-          <p:cNvPr id="11" name="Shape 8"/>
-          <p:cNvSpPr/>
-          <p:nvPr/>
-        </p:nvSpPr>
-        <p:spPr>
-          <a:xfrm>
-            <a:off x="3931920" y="3749040"/>
-            <a:ext cx="1097280" cy="320040"/>
-          </a:xfrm>
-          <a:prstGeom prst="line">
-            <a:avLst/>
-          </a:prstGeom>
-          <a:solidFill>
-            <a:srgbClr val="161B22"/>
-          </a:solidFill>
-          <a:ln w="12700">
-            <a:prstDash val="solid"/>
-          </a:ln>
-        </p:spPr>
-        <p:txBody>
-          <a:bodyPr/>
-          <a:lstStyle/>
-          <a:p>
-            <a:endParaRPr/>
-          </a:p>
-        </p:txBody>
-      </p:sp>
-      <p:sp>
-        <p:nvSpPr>
-          <p:cNvPr id="12" name="Text 9"/>
-          <p:cNvSpPr/>
-          <p:nvPr/>
-        </p:nvSpPr>
-        <p:spPr>
-          <a:xfrm>
-            <a:off x="3931920" y="3749040"/>
-            <a:ext cx="1097280" cy="320040"/>
-          </a:xfrm>
-          <a:prstGeom prst="rect">
-            <a:avLst/>
-          </a:prstGeom>
-          <a:noFill/>
-          <a:ln>
-            <a:noFill/>
-          </a:ln>
-        </p:spPr>
-        <p:txBody>
-          <a:bodyPr wrap="square" lIns="0" tIns="0" rIns="0" bIns="0" rtlCol="0" anchor="ctr"/>
-          <a:lstStyle/>
-          <a:p>
-            <a:pPr marL="0" indent="0" algn="ctr">
-              <a:buNone/>
-            </a:pPr>
-            <a:r>
-              <a:rPr lang="en-US" sz="1100" dirty="0">
-                <a:solidFill>
-                  <a:srgbClr val="C9D1D9"/>
-                </a:solidFill>
-                <a:latin typeface="Calibri" pitchFamily="34" charset="0"/>
-                <a:ea typeface="Calibri" pitchFamily="34" charset="-122"/>
-                <a:cs typeface="Calibri" pitchFamily="34" charset="-120"/>
-              </a:rPr>
-              <a:t>Go</a:t>
-            </a:r>
-            <a:endParaRPr lang="en-US" sz="1100" dirty="0"/>
-          </a:p>
-        </p:txBody>
-      </p:sp>
-      <p:sp>
-        <p:nvSpPr>
-          <p:cNvPr id="13" name="Shape 10"/>
-          <p:cNvSpPr/>
-          <p:nvPr/>
-        </p:nvSpPr>
-        <p:spPr>
-          <a:xfrm>
-            <a:off x="5166360" y="3749040"/>
-            <a:ext cx="1097280" cy="320040"/>
-          </a:xfrm>
-          <a:prstGeom prst="line">
-            <a:avLst/>
-          </a:prstGeom>
-          <a:solidFill>
-            <a:srgbClr val="161B22"/>
-          </a:solidFill>
-          <a:ln w="12700">
-            <a:prstDash val="solid"/>
-          </a:ln>
-        </p:spPr>
-        <p:txBody>
-          <a:bodyPr/>
-          <a:lstStyle/>
-          <a:p>
-            <a:endParaRPr/>
-          </a:p>
-        </p:txBody>
-      </p:sp>
-      <p:sp>
-        <p:nvSpPr>
-          <p:cNvPr id="14" name="Text 11"/>
-          <p:cNvSpPr/>
-          <p:nvPr/>
-        </p:nvSpPr>
-        <p:spPr>
-          <a:xfrm>
-            <a:off x="5166360" y="3749040"/>
-            <a:ext cx="1097280" cy="320040"/>
-          </a:xfrm>
-          <a:prstGeom prst="rect">
-            <a:avLst/>
-          </a:prstGeom>
-          <a:noFill/>
-          <a:ln>
-            <a:noFill/>
-          </a:ln>
-        </p:spPr>
-        <p:txBody>
-          <a:bodyPr wrap="square" lIns="0" tIns="0" rIns="0" bIns="0" rtlCol="0" anchor="ctr"/>
-          <a:lstStyle/>
-          <a:p>
-            <a:pPr marL="0" indent="0" algn="ctr">
-              <a:buNone/>
-            </a:pPr>
-            <a:r>
-              <a:rPr lang="en-US" sz="1100" dirty="0">
-                <a:solidFill>
-                  <a:srgbClr val="C9D1D9"/>
-                </a:solidFill>
-                <a:latin typeface="Calibri" pitchFamily="34" charset="0"/>
-                <a:ea typeface="Calibri" pitchFamily="34" charset="-122"/>
-                <a:cs typeface="Calibri" pitchFamily="34" charset="-120"/>
-              </a:rPr>
-              <a:t>.NET</a:t>
-            </a:r>
-            <a:endParaRPr lang="en-US" sz="1100" dirty="0"/>
-          </a:p>
-        </p:txBody>
-      </p:sp>
-      <p:sp>
-        <p:nvSpPr>
-          <p:cNvPr id="15" name="Shape 12"/>
-          <p:cNvSpPr/>
-          <p:nvPr/>
-        </p:nvSpPr>
-        <p:spPr>
-          <a:xfrm>
-            <a:off x="6400800" y="3749040"/>
-            <a:ext cx="1097280" cy="320040"/>
-          </a:xfrm>
-          <a:prstGeom prst="line">
-            <a:avLst/>
-          </a:prstGeom>
-          <a:solidFill>
-            <a:srgbClr val="161B22"/>
-          </a:solidFill>
-          <a:ln w="12700">
-            <a:prstDash val="solid"/>
-          </a:ln>
-        </p:spPr>
-        <p:txBody>
-          <a:bodyPr/>
-          <a:lstStyle/>
-          <a:p>
-            <a:endParaRPr/>
-          </a:p>
-        </p:txBody>
-      </p:sp>
-      <p:sp>
-        <p:nvSpPr>
-          <p:cNvPr id="16" name="Text 13"/>
-          <p:cNvSpPr/>
-          <p:nvPr/>
-        </p:nvSpPr>
-        <p:spPr>
-          <a:xfrm>
-            <a:off x="6400800" y="3749040"/>
-            <a:ext cx="1097280" cy="320040"/>
-          </a:xfrm>
-          <a:prstGeom prst="rect">
-            <a:avLst/>
-          </a:prstGeom>
-          <a:noFill/>
-          <a:ln>
-            <a:noFill/>
-          </a:ln>
-        </p:spPr>
-        <p:txBody>
-          <a:bodyPr wrap="square" lIns="0" tIns="0" rIns="0" bIns="0" rtlCol="0" anchor="ctr"/>
-          <a:lstStyle/>
-          <a:p>
-            <a:pPr marL="0" indent="0" algn="ctr">
-              <a:buNone/>
-            </a:pPr>
-            <a:r>
-              <a:rPr lang="en-US" sz="1100" dirty="0">
-                <a:solidFill>
-                  <a:srgbClr val="C9D1D9"/>
-                </a:solidFill>
-                <a:latin typeface="Calibri" pitchFamily="34" charset="0"/>
-                <a:ea typeface="Calibri" pitchFamily="34" charset="-122"/>
-                <a:cs typeface="Calibri" pitchFamily="34" charset="-120"/>
-              </a:rPr>
-              <a:t>Java / Rust</a:t>
-            </a:r>
-            <a:endParaRPr lang="en-US" sz="1100" dirty="0"/>
-          </a:p>
-        </p:txBody>
-      </p:sp>
-      <p:sp>
-        <p:nvSpPr>
-          <p:cNvPr id="17" name="Text 14"/>
-          <p:cNvSpPr/>
-          <p:nvPr/>
-        </p:nvSpPr>
-        <p:spPr>
-          <a:xfrm>
-            <a:off x="3383280" y="4297680"/>
-            <a:ext cx="2377440" cy="274320"/>
-          </a:xfrm>
-          <a:prstGeom prst="rect">
-            <a:avLst/>
-          </a:prstGeom>
-          <a:noFill/>
-          <a:ln>
-            <a:noFill/>
-          </a:ln>
-        </p:spPr>
-        <p:txBody>
-          <a:bodyPr wrap="square" lIns="0" tIns="0" rIns="0" bIns="0" rtlCol="0" anchor="ctr"/>
-          <a:lstStyle/>
-          <a:p>
-            <a:pPr marL="0" indent="0" algn="ctr">
-              <a:buNone/>
-            </a:pPr>
-            <a:r>
-              <a:rPr lang="en-US" sz="1000" dirty="0">
-                <a:solidFill>
-                  <a:srgbClr val="F0883E"/>
-                </a:solidFill>
-                <a:latin typeface="Calibri" pitchFamily="34" charset="0"/>
-                <a:ea typeface="Calibri" pitchFamily="34" charset="-122"/>
-                <a:cs typeface="Calibri" pitchFamily="34" charset="-120"/>
-              </a:rPr>
-              <a:t>Stable · SDK 1.0.13 · runtime 1.0.83</a:t>
-            </a:r>
-            <a:endParaRPr lang="en-US" sz="1000" dirty="0"/>
           </a:p>
         </p:txBody>
       </p:sp>

--- a/GitHub-Copilot-SDK.pptx
+++ b/GitHub-Copilot-SDK.pptx
@@ -4092,7 +4092,7 @@
                 <a:ea typeface="Calibri" pitchFamily="34" charset="-122"/>
                 <a:cs typeface="Calibri" pitchFamily="34" charset="-120"/>
               </a:rPr>
-              <a:t>CLI vs SDK · Production Consequences</a:t>
+              <a:t>CLI vs SDK · Host Responsibilities</a:t>
             </a:r>
             <a:endParaRPr lang="en-US" sz="2600" dirty="0"/>
           </a:p>
@@ -6018,7 +6018,7 @@
                 <a:ea typeface="Calibri" pitchFamily="34" charset="-122"/>
                 <a:cs typeface="Calibri" pitchFamily="34" charset="-120"/>
               </a:rPr>
-              <a:t>Capabilities are modular. Enable only combinations your product can support safely.</a:t>
+              <a:t>Each API is independent; enable it only with the required host controls.</a:t>
             </a:r>
             <a:endParaRPr lang="en-US" sz="1000" dirty="0"/>
           </a:p>
@@ -6219,7 +6219,7 @@
                   <a:srgbClr val="C9D1D9"/>
                 </a:solidFill>
               </a:rPr>
-              <a:t>Capabilities · Where the SDK Fits</a:t>
+              <a:t>Capabilities · Integration Targets</a:t>
             </a:r>
           </a:p>
         </p:txBody>
@@ -6252,7 +6252,7 @@
                   <a:srgbClr val="8B949E"/>
                 </a:solidFill>
               </a:rPr>
-              <a:t>Use the SDK when the agent must live inside another product or workflow; then choose identity and provider boundaries</a:t>
+              <a:t>Use the SDK when an application owns the UI, session lifecycle, or automated workflow.</a:t>
             </a:r>
           </a:p>
         </p:txBody>
@@ -6476,7 +6476,7 @@
                   <a:srgbClr val="58A6FF"/>
                 </a:solidFill>
               </a:rPr>
-              <a:t>Choose the surface deliberately</a:t>
+              <a:t>Interface boundary</a:t>
             </a:r>
           </a:p>
           <a:p>
@@ -6608,7 +6608,7 @@
                   <a:srgbClr val="C9D1D9"/>
                 </a:solidFill>
               </a:rPr>
-              <a:t xml:space="preserve">Production boundaries remain host responsibilities</a:t>
+              <a:t xml:space="preserve">Identity, isolation, routing, and limits remain host responsibilities</a:t>
             </a:r>
             <a:r>
               <a:rPr sz="1300" b="0" dirty="0" err="1">
@@ -7336,7 +7336,18 @@
                     <a:bodyPr/>
                     <a:lstStyle/>
                     <a:p>
+                      <a:pPr>
+                        <a:lnSpc>
+                          <a:spcPct val="100000"/>
+                        </a:lnSpc>
+                      </a:pPr>
                       <a:r>
+                        <a:rPr sz="1150" b="0">
+                          <a:solidFill>
+                            <a:srgbClr val="E6EDF3"/>
+                          </a:solidFill>
+                          <a:latin typeface="Calibri"/>
+                        </a:rPr>
                         <a:t>User entitlement + applicable organization policy</a:t>
                       </a:r>
                     </a:p>
@@ -7793,7 +7804,7 @@
         </p:nvSpPr>
         <p:spPr>
           <a:xfrm>
-            <a:off x="548640" y="3310128"/>
+            <a:off x="548640" y="3429000"/>
             <a:ext cx="8046720" cy="365760"/>
           </a:xfrm>
           <a:prstGeom prst="rect">
@@ -8634,7 +8645,7 @@
                 <a:ea typeface="Calibri" pitchFamily="34" charset="-122"/>
                 <a:cs typeface="Calibri" pitchFamily="34" charset="-120"/>
               </a:rPr>
-              <a:t>Your provider, model, billing, residency, and access policy; keys are optional</a:t>
+              <a:t>ProviderConfig defines endpoint, protocol, model, and authentication; inference billing follows that provider</a:t>
             </a:r>
             <a:endParaRPr lang="en-US" sz="1200" dirty="0"/>
           </a:p>
@@ -10124,7 +10135,7 @@
                 <a:ea typeface="Calibri" pitchFamily="34" charset="-122"/>
                 <a:cs typeface="Calibri" pitchFamily="34" charset="-120"/>
               </a:rPr>
-              <a:t>Samples · Get to Green</a:t>
+              <a:t>Samples · Environment Check</a:t>
             </a:r>
             <a:endParaRPr lang="en-US" sz="2600" dirty="0"/>
           </a:p>
@@ -11025,7 +11036,7 @@
                 <a:ea typeface="Calibri" pitchFamily="34" charset="-122"/>
                 <a:cs typeface="Calibri" pitchFamily="34" charset="-120"/>
               </a:rPr>
-              <a:t>Samples · Learning Map</a:t>
+              <a:t>Samples · API Map</a:t>
             </a:r>
             <a:endParaRPr lang="en-US" sz="2600" dirty="0"/>
           </a:p>
@@ -11978,7 +11989,7 @@
                 <a:ea typeface="Calibri" pitchFamily="34" charset="-122"/>
                 <a:cs typeface="Calibri" pitchFamily="34" charset="-120"/>
               </a:rPr>
-              <a:t>07 · Human control</a:t>
+              <a:t>07 · Human approval</a:t>
             </a:r>
             <a:endParaRPr lang="en-US" sz="1200" dirty="0"/>
           </a:p>
@@ -12341,7 +12352,7 @@
                 <a:ea typeface="Calibri" pitchFamily="34" charset="-122"/>
                 <a:cs typeface="Calibri" pitchFamily="34" charset="-120"/>
               </a:rPr>
-              <a:t>Typed deltas for output; send_and_wait for bounded completion and propagated errors</a:t>
+              <a:t>Typed deltas stream output; send_and_wait handles timeout, error, and idle states</a:t>
             </a:r>
             <a:endParaRPr lang="en-US" sz="1200" dirty="0"/>
           </a:p>
@@ -13655,7 +13666,7 @@
                 <a:ea typeface="Calibri" pitchFamily="34" charset="-122"/>
                 <a:cs typeface="Calibri" pitchFamily="34" charset="-120"/>
               </a:rPr>
-              <a:t>Four-Chapter Agenda</a:t>
+              <a:t>Agenda</a:t>
             </a:r>
             <a:endParaRPr lang="en-US" sz="2600" dirty="0"/>
           </a:p>
@@ -13939,7 +13950,7 @@
                 <a:ea typeface="Calibri" pitchFamily="34" charset="-122"/>
                 <a:cs typeface="Calibri" pitchFamily="34" charset="-120"/>
               </a:rPr>
-              <a:t>Same engine, different surface and ownership</a:t>
+              <a:t>Shared runtime; different UI, lifecycle, and ownership</a:t>
             </a:r>
             <a:endParaRPr lang="en-US" sz="950" dirty="0"/>
           </a:p>
@@ -14081,7 +14092,7 @@
                 <a:ea typeface="Calibri" pitchFamily="34" charset="-122"/>
                 <a:cs typeface="Calibri" pitchFamily="34" charset="-120"/>
               </a:rPr>
-              <a:t>Products, automation, services, and providers</a:t>
+              <a:t>Tools, agents, MCP, persistence, HITL, sandbox, and BYOK</a:t>
             </a:r>
             <a:endParaRPr lang="en-US" sz="950" dirty="0"/>
           </a:p>
@@ -14223,7 +14234,7 @@
                 <a:ea typeface="Calibri" pitchFamily="34" charset="-122"/>
                 <a:cs typeface="Calibri" pitchFamily="34" charset="-120"/>
               </a:rPr>
-              <a:t>Setup, map, and all eight runnable examples</a:t>
+              <a:t>Environment setup and eight executable Python examples</a:t>
             </a:r>
             <a:endParaRPr lang="en-US" sz="950" dirty="0"/>
           </a:p>
@@ -15168,8 +15179,8 @@
         </p:nvSpPr>
         <p:spPr>
           <a:xfrm>
-            <a:off x="731520" y="2606040"/>
-            <a:ext cx="2194560" cy="731520"/>
+            <a:off x="685800" y="2606040"/>
+            <a:ext cx="2286000" cy="731520"/>
           </a:xfrm>
           <a:prstGeom prst="rect">
             <a:avLst/>
@@ -15184,10 +15195,13 @@
           <a:lstStyle/>
           <a:p>
             <a:pPr marL="0" indent="0">
+              <a:lnSpc>
+                <a:spcPct val="100000"/>
+              </a:lnSpc>
               <a:buNone/>
             </a:pPr>
             <a:r>
-              <a:rPr lang="en-US" sz="1000" i="1" dirty="0">
+              <a:rPr lang="en-US" sz="950" i="1" dirty="0">
                 <a:solidFill>
                   <a:srgbClr val="C9D1D9"/>
                 </a:solidFill>
@@ -15195,9 +15209,9 @@
                 <a:ea typeface="Calibri" pitchFamily="34" charset="-122"/>
                 <a:cs typeface="Calibri" pitchFamily="34" charset="-120"/>
               </a:rPr>
-              <a:t>Analyze code, answer questions. Read-only.</a:t>
-            </a:r>
-            <a:endParaRPr lang="en-US" sz="1000" dirty="0"/>
+              <a:t>Analyze code, answer questions. Read‑only.</a:t>
+            </a:r>
+            <a:endParaRPr lang="en-US" sz="950" dirty="0"/>
           </a:p>
         </p:txBody>
       </p:sp>
@@ -15352,7 +15366,7 @@
         <p:spPr>
           <a:xfrm>
             <a:off x="4087368" y="2286000"/>
-            <a:ext cx="1645920" cy="228600"/>
+            <a:ext cx="1783080" cy="228600"/>
           </a:xfrm>
           <a:prstGeom prst="rect">
             <a:avLst/>
@@ -15363,14 +15377,17 @@
           </a:ln>
         </p:spPr>
         <p:txBody>
-          <a:bodyPr wrap="square" lIns="0" tIns="0" rIns="0" bIns="0" rtlCol="0" anchor="ctr"/>
+          <a:bodyPr wrap="none" lIns="0" tIns="0" rIns="0" bIns="0" rtlCol="0" anchor="ctr"/>
           <a:lstStyle/>
           <a:p>
             <a:pPr marL="0" indent="0">
+              <a:lnSpc>
+                <a:spcPct val="100000"/>
+              </a:lnSpc>
               <a:buNone/>
             </a:pPr>
             <a:r>
-              <a:rPr lang="en-US" sz="900" dirty="0">
+              <a:rPr lang="en-US" sz="850" dirty="0">
                 <a:solidFill>
                   <a:srgbClr val="3FB950"/>
                 </a:solidFill>
@@ -15380,7 +15397,7 @@
               </a:rPr>
               <a:t>agent.select(AgentSelectRequest(...))</a:t>
             </a:r>
-            <a:endParaRPr lang="en-US" sz="900" dirty="0"/>
+            <a:endParaRPr lang="en-US" sz="850" dirty="0"/>
           </a:p>
         </p:txBody>
       </p:sp>
@@ -17084,8 +17101,8 @@
         </p:nvSpPr>
         <p:spPr>
           <a:xfrm>
-            <a:off x="685800" y="2926080"/>
-            <a:ext cx="7772400" cy="1691640"/>
+            <a:off x="685800" y="2880360"/>
+            <a:ext cx="7772400" cy="1828800"/>
           </a:xfrm>
           <a:prstGeom prst="rect">
             <a:avLst/>
@@ -17101,7 +17118,7 @@
           <a:p>
             <a:pPr algn="l">
               <a:lnSpc>
-                <a:spcPct val="112000"/>
+                <a:spcPct val="100000"/>
               </a:lnSpc>
               <a:spcBef>
                 <a:spcPts val="0"/>
@@ -17111,7 +17128,7 @@
               </a:spcAft>
             </a:pPr>
             <a:r>
-              <a:rPr sz="1150" b="0">
+              <a:rPr sz="1000" b="0">
                 <a:solidFill>
                   <a:srgbClr val="E6EDF3"/>
                 </a:solidFill>
@@ -17123,7 +17140,7 @@
           <a:p>
             <a:pPr>
               <a:lnSpc>
-                <a:spcPct val="112000"/>
+                <a:spcPct val="100000"/>
               </a:lnSpc>
               <a:spcBef>
                 <a:spcPts val="0"/>
@@ -17133,7 +17150,7 @@
               </a:spcAft>
             </a:pPr>
             <a:r>
-              <a:rPr sz="1150" b="0">
+              <a:rPr sz="1000" b="0">
                 <a:solidFill>
                   <a:srgbClr val="E6EDF3"/>
                 </a:solidFill>
@@ -17145,7 +17162,7 @@
           <a:p>
             <a:pPr>
               <a:lnSpc>
-                <a:spcPct val="112000"/>
+                <a:spcPct val="100000"/>
               </a:lnSpc>
               <a:spcBef>
                 <a:spcPts val="0"/>
@@ -17155,7 +17172,7 @@
               </a:spcAft>
             </a:pPr>
             <a:r>
-              <a:rPr sz="1150" b="0">
+              <a:rPr sz="1000" b="0">
                 <a:solidFill>
                   <a:srgbClr val="E6EDF3"/>
                 </a:solidFill>
@@ -17167,7 +17184,7 @@
           <a:p>
             <a:pPr>
               <a:lnSpc>
-                <a:spcPct val="112000"/>
+                <a:spcPct val="100000"/>
               </a:lnSpc>
               <a:spcBef>
                 <a:spcPts val="0"/>
@@ -17177,7 +17194,7 @@
               </a:spcAft>
             </a:pPr>
             <a:r>
-              <a:rPr sz="1150" b="0">
+              <a:rPr sz="1000" b="0">
                 <a:solidFill>
                   <a:srgbClr val="E6EDF3"/>
                 </a:solidFill>
@@ -17189,7 +17206,7 @@
           <a:p>
             <a:pPr>
               <a:lnSpc>
-                <a:spcPct val="112000"/>
+                <a:spcPct val="100000"/>
               </a:lnSpc>
               <a:spcBef>
                 <a:spcPts val="0"/>
@@ -17199,7 +17216,7 @@
               </a:spcAft>
             </a:pPr>
             <a:r>
-              <a:rPr sz="1150" b="0">
+              <a:rPr sz="1000" b="0">
                 <a:solidFill>
                   <a:srgbClr val="E6EDF3"/>
                 </a:solidFill>
@@ -17211,7 +17228,7 @@
           <a:p>
             <a:pPr>
               <a:lnSpc>
-                <a:spcPct val="112000"/>
+                <a:spcPct val="100000"/>
               </a:lnSpc>
               <a:spcBef>
                 <a:spcPts val="0"/>
@@ -17221,7 +17238,7 @@
               </a:spcAft>
             </a:pPr>
             <a:r>
-              <a:rPr sz="1150" b="0">
+              <a:rPr sz="1000" b="0">
                 <a:solidFill>
                   <a:srgbClr val="E6EDF3"/>
                 </a:solidFill>
@@ -17233,7 +17250,7 @@
           <a:p>
             <a:pPr>
               <a:lnSpc>
-                <a:spcPct val="112000"/>
+                <a:spcPct val="100000"/>
               </a:lnSpc>
               <a:spcBef>
                 <a:spcPts val="0"/>
@@ -17243,7 +17260,7 @@
               </a:spcAft>
             </a:pPr>
             <a:r>
-              <a:rPr sz="1150" b="0">
+              <a:rPr sz="1000" b="0">
                 <a:solidFill>
                   <a:srgbClr val="E6EDF3"/>
                 </a:solidFill>
@@ -17255,7 +17272,7 @@
           <a:p>
             <a:pPr>
               <a:lnSpc>
-                <a:spcPct val="112000"/>
+                <a:spcPct val="100000"/>
               </a:lnSpc>
               <a:spcBef>
                 <a:spcPts val="0"/>
@@ -17265,7 +17282,7 @@
               </a:spcAft>
             </a:pPr>
             <a:r>
-              <a:rPr sz="1150" b="0">
+              <a:rPr sz="1000" b="0">
                 <a:solidFill>
                   <a:srgbClr val="E6EDF3"/>
                 </a:solidFill>
@@ -17277,7 +17294,7 @@
           <a:p>
             <a:pPr>
               <a:lnSpc>
-                <a:spcPct val="112000"/>
+                <a:spcPct val="100000"/>
               </a:lnSpc>
               <a:spcBef>
                 <a:spcPts val="0"/>
@@ -17287,7 +17304,7 @@
               </a:spcAft>
             </a:pPr>
             <a:r>
-              <a:rPr sz="1150" b="0">
+              <a:rPr sz="1000" b="0">
                 <a:solidFill>
                   <a:srgbClr val="E6EDF3"/>
                 </a:solidFill>
@@ -17299,7 +17316,7 @@
           <a:p>
             <a:pPr>
               <a:lnSpc>
-                <a:spcPct val="112000"/>
+                <a:spcPct val="100000"/>
               </a:lnSpc>
               <a:spcBef>
                 <a:spcPts val="0"/>
@@ -17309,7 +17326,7 @@
               </a:spcAft>
             </a:pPr>
             <a:r>
-              <a:rPr sz="1150" b="0">
+              <a:rPr sz="1000" b="0">
                 <a:solidFill>
                   <a:srgbClr val="E6EDF3"/>
                 </a:solidFill>
@@ -17321,7 +17338,7 @@
           <a:p>
             <a:pPr>
               <a:lnSpc>
-                <a:spcPct val="112000"/>
+                <a:spcPct val="100000"/>
               </a:lnSpc>
               <a:spcBef>
                 <a:spcPts val="0"/>
@@ -17331,7 +17348,7 @@
               </a:spcAft>
             </a:pPr>
             <a:r>
-              <a:rPr sz="1150" b="0">
+              <a:rPr sz="1000" b="0">
                 <a:solidFill>
                   <a:srgbClr val="E6EDF3"/>
                 </a:solidFill>
@@ -17516,7 +17533,7 @@
                 <a:ea typeface="Calibri" pitchFamily="34" charset="-122"/>
                 <a:cs typeface="Calibri" pitchFamily="34" charset="-120"/>
               </a:rPr>
-              <a:t>New process, same persisted conversation context; host configuration must be supplied again</a:t>
+              <a:t>resume_session restores persisted context; host callbacks, tools, and credentials must be supplied again</a:t>
             </a:r>
             <a:endParaRPr lang="en-US" sz="1200" dirty="0"/>
           </a:p>
@@ -18668,7 +18685,7 @@
                 </a:solidFill>
                 <a:latin typeface="Calibri"/>
               </a:rPr>
-              <a:t>Experimental and backend-dependent; the sample enables containment before requesting one bypass</a:t>
+              <a:t>Configure filesystem and network policy before allowing one explicit bypass</a:t>
             </a:r>
           </a:p>
         </p:txBody>
@@ -19675,13 +19692,13 @@
               </a:spcAft>
             </a:pPr>
             <a:r>
-              <a:rPr sz="1050" b="1" i="0">
+              <a:rPr sz="900" b="1" i="0">
                 <a:solidFill>
                   <a:srgbClr val="E6EDF3"/>
                 </a:solidFill>
-                <a:latin typeface="Consolas"/>
-              </a:rPr>
-              <a:t>Runtime tools</a:t>
+                <a:latin typeface="Calibri"/>
+              </a:rPr>
+              <a:t>Runtime</a:t>
             </a:r>
           </a:p>
         </p:txBody>
@@ -19765,13 +19782,13 @@
               </a:spcAft>
             </a:pPr>
             <a:r>
-              <a:rPr sz="1050" b="1" i="0">
+              <a:rPr sz="900" b="1" i="0">
                 <a:solidFill>
                   <a:srgbClr val="E6EDF3"/>
                 </a:solidFill>
-                <a:latin typeface="Consolas"/>
-              </a:rPr>
-              <a:t>Host tools</a:t>
+                <a:latin typeface="Calibri"/>
+              </a:rPr>
+              <a:t>Host</a:t>
             </a:r>
           </a:p>
         </p:txBody>
@@ -19855,11 +19872,11 @@
               </a:spcAft>
             </a:pPr>
             <a:r>
-              <a:rPr sz="1050" b="1" i="0">
+              <a:rPr sz="900" b="1" i="0">
                 <a:solidFill>
                   <a:srgbClr val="E6EDF3"/>
                 </a:solidFill>
-                <a:latin typeface="Consolas"/>
+                <a:latin typeface="Calibri"/>
               </a:rPr>
               <a:t>Experimental</a:t>
             </a:r>
@@ -19945,11 +19962,11 @@
               </a:spcAft>
             </a:pPr>
             <a:r>
-              <a:rPr sz="1050" b="1" i="0">
+              <a:rPr sz="900" b="1" i="0">
                 <a:solidFill>
                   <a:srgbClr val="E6EDF3"/>
                 </a:solidFill>
-                <a:latin typeface="Consolas"/>
+                <a:latin typeface="Calibri"/>
               </a:rPr>
               <a:t>Evidence</a:t>
             </a:r>
@@ -19996,7 +20013,7 @@
                 </a:solidFill>
                 <a:latin typeface="Calibri"/>
               </a:rPr>
-              <a:t>Correlate request + result</a:t>
+              <a:t>Correlate approval + tool-call ID + success</a:t>
             </a:r>
           </a:p>
         </p:txBody>
@@ -20035,11 +20052,11 @@
               </a:spcAft>
             </a:pPr>
             <a:r>
-              <a:rPr sz="1050" b="1" i="0">
+              <a:rPr sz="900" b="1" i="0">
                 <a:solidFill>
                   <a:srgbClr val="E6EDF3"/>
                 </a:solidFill>
-                <a:latin typeface="Consolas"/>
+                <a:latin typeface="Calibri"/>
               </a:rPr>
               <a:t>Not a VM</a:t>
             </a:r>
@@ -20235,22 +20252,20 @@
         <p:spPr>
           <a:xfrm>
             <a:off x="4800600" y="2267712"/>
-            <a:ext cx="3703320" cy="1572768"/>
-          </a:xfrm>
-          <a:prstGeom prst="rect">
-            <a:avLst/>
-          </a:prstGeom>
-          <a:noFill/>
-        </p:spPr>
-        <p:txBody>
-          <a:bodyPr wrap="none" lIns="25400" rIns="25400" tIns="25400" bIns="25400" anchor="t">
-            <a:spAutoFit/>
-          </a:bodyPr>
+            <a:ext cx="3703320" cy="1618488"/>
+          </a:xfrm>
+          <a:prstGeom prst="rect">
+            <a:avLst/>
+          </a:prstGeom>
+          <a:noFill/>
+        </p:spPr>
+        <p:txBody>
+          <a:bodyPr wrap="none" lIns="25400" rIns="25400" tIns="25400" bIns="25400" anchor="t"/>
           <a:lstStyle/>
           <a:p>
             <a:pPr algn="l">
               <a:lnSpc>
-                <a:spcPct val="112000"/>
+                <a:spcPct val="95000"/>
               </a:lnSpc>
               <a:spcBef>
                 <a:spcPts val="0"/>
@@ -20260,7 +20275,7 @@
               </a:spcAft>
             </a:pPr>
             <a:r>
-              <a:rPr sz="1050" b="0">
+              <a:rPr sz="900" b="0">
                 <a:solidFill>
                   <a:srgbClr val="E6EDF3"/>
                 </a:solidFill>
@@ -20272,7 +20287,7 @@
           <a:p>
             <a:pPr>
               <a:lnSpc>
-                <a:spcPct val="112000"/>
+                <a:spcPct val="95000"/>
               </a:lnSpc>
               <a:spcBef>
                 <a:spcPts val="0"/>
@@ -20282,7 +20297,7 @@
               </a:spcAft>
             </a:pPr>
             <a:r>
-              <a:rPr sz="1050" b="0">
+              <a:rPr sz="900" b="0">
                 <a:solidFill>
                   <a:srgbClr val="E6EDF3"/>
                 </a:solidFill>
@@ -20294,7 +20309,7 @@
           <a:p>
             <a:pPr>
               <a:lnSpc>
-                <a:spcPct val="112000"/>
+                <a:spcPct val="95000"/>
               </a:lnSpc>
               <a:spcBef>
                 <a:spcPts val="0"/>
@@ -20304,7 +20319,7 @@
               </a:spcAft>
             </a:pPr>
             <a:r>
-              <a:rPr sz="1050" b="0">
+              <a:rPr sz="900" b="0">
                 <a:solidFill>
                   <a:srgbClr val="E6EDF3"/>
                 </a:solidFill>
@@ -20316,7 +20331,7 @@
           <a:p>
             <a:pPr>
               <a:lnSpc>
-                <a:spcPct val="112000"/>
+                <a:spcPct val="95000"/>
               </a:lnSpc>
               <a:spcBef>
                 <a:spcPts val="0"/>
@@ -20326,7 +20341,7 @@
               </a:spcAft>
             </a:pPr>
             <a:r>
-              <a:rPr sz="1050" b="0">
+              <a:rPr sz="900" b="0">
                 <a:solidFill>
                   <a:srgbClr val="E6EDF3"/>
                 </a:solidFill>
@@ -20338,7 +20353,7 @@
           <a:p>
             <a:pPr>
               <a:lnSpc>
-                <a:spcPct val="112000"/>
+                <a:spcPct val="95000"/>
               </a:lnSpc>
               <a:spcBef>
                 <a:spcPts val="0"/>
@@ -20348,7 +20363,7 @@
               </a:spcAft>
             </a:pPr>
             <a:r>
-              <a:rPr sz="1050" b="0">
+              <a:rPr sz="900" b="0">
                 <a:solidFill>
                   <a:srgbClr val="E6EDF3"/>
                 </a:solidFill>
@@ -20360,7 +20375,7 @@
           <a:p>
             <a:pPr>
               <a:lnSpc>
-                <a:spcPct val="112000"/>
+                <a:spcPct val="95000"/>
               </a:lnSpc>
               <a:spcBef>
                 <a:spcPts val="0"/>
@@ -20370,7 +20385,7 @@
               </a:spcAft>
             </a:pPr>
             <a:r>
-              <a:rPr sz="1050" b="0">
+              <a:rPr sz="900" b="0">
                 <a:solidFill>
                   <a:srgbClr val="E6EDF3"/>
                 </a:solidFill>
@@ -20382,7 +20397,7 @@
           <a:p>
             <a:pPr>
               <a:lnSpc>
-                <a:spcPct val="112000"/>
+                <a:spcPct val="95000"/>
               </a:lnSpc>
               <a:spcBef>
                 <a:spcPts val="0"/>
@@ -20392,7 +20407,7 @@
               </a:spcAft>
             </a:pPr>
             <a:r>
-              <a:rPr sz="1050" b="0">
+              <a:rPr sz="900" b="0">
                 <a:solidFill>
                   <a:srgbClr val="E6EDF3"/>
                 </a:solidFill>
@@ -20404,7 +20419,7 @@
           <a:p>
             <a:pPr>
               <a:lnSpc>
-                <a:spcPct val="112000"/>
+                <a:spcPct val="95000"/>
               </a:lnSpc>
               <a:spcBef>
                 <a:spcPts val="0"/>
@@ -20414,7 +20429,7 @@
               </a:spcAft>
             </a:pPr>
             <a:r>
-              <a:rPr sz="1050" b="0">
+              <a:rPr sz="900" b="0">
                 <a:solidFill>
                   <a:srgbClr val="E6EDF3"/>
                 </a:solidFill>
@@ -20426,7 +20441,7 @@
           <a:p>
             <a:pPr>
               <a:lnSpc>
-                <a:spcPct val="112000"/>
+                <a:spcPct val="95000"/>
               </a:lnSpc>
               <a:spcBef>
                 <a:spcPts val="0"/>
@@ -20436,7 +20451,7 @@
               </a:spcAft>
             </a:pPr>
             <a:r>
-              <a:rPr sz="1050" b="0">
+              <a:rPr sz="900" b="0">
                 <a:solidFill>
                   <a:srgbClr val="E6EDF3"/>
                 </a:solidFill>
@@ -20448,7 +20463,7 @@
           <a:p>
             <a:pPr>
               <a:lnSpc>
-                <a:spcPct val="112000"/>
+                <a:spcPct val="95000"/>
               </a:lnSpc>
               <a:spcBef>
                 <a:spcPts val="0"/>
@@ -20458,7 +20473,7 @@
               </a:spcAft>
             </a:pPr>
             <a:r>
-              <a:rPr sz="1050" b="0">
+              <a:rPr sz="900" b="0">
                 <a:solidFill>
                   <a:srgbClr val="E6EDF3"/>
                 </a:solidFill>
@@ -20640,7 +20655,7 @@
               </a:spcAft>
             </a:pPr>
             <a:r>
-              <a:rPr sz="1050" b="0" i="0">
+              <a:rPr sz="900" b="0" i="0">
                 <a:solidFill>
                   <a:srgbClr val="E6EDF3"/>
                 </a:solidFill>
@@ -20773,7 +20788,7 @@
               </a:spcAft>
             </a:pPr>
             <a:r>
-              <a:rPr sz="1050" b="0" i="0">
+              <a:rPr sz="900" b="0" i="0">
                 <a:solidFill>
                   <a:srgbClr val="E6EDF3"/>
                 </a:solidFill>
@@ -20906,7 +20921,7 @@
               </a:spcAft>
             </a:pPr>
             <a:r>
-              <a:rPr sz="1050" b="0" i="0">
+              <a:rPr sz="900" b="0" i="0">
                 <a:solidFill>
                   <a:srgbClr val="E6EDF3"/>
                 </a:solidFill>
@@ -21017,7 +21032,7 @@
                 <a:ea typeface="Calibri" pitchFamily="34" charset="-122"/>
                 <a:cs typeface="Calibri" pitchFamily="34" charset="-120"/>
               </a:rPr>
-              <a:t>Source of Truth</a:t>
+              <a:t>Authority Order for SDK 1.0.13</a:t>
             </a:r>
             <a:endParaRPr lang="en-US" sz="2600" dirty="0"/>
           </a:p>
@@ -21349,7 +21364,7 @@
                 <a:ea typeface="Calibri" pitchFamily="34" charset="-122"/>
                 <a:cs typeface="Calibri" pitchFamily="34" charset="-120"/>
               </a:rPr>
-              <a:t>Exact signatures and wire shapes beat stale prose</a:t>
+              <a:t>Generated signatures and wire shapes define the installed API</a:t>
             </a:r>
             <a:endParaRPr lang="en-US" sz="1100" dirty="0"/>
           </a:p>
@@ -22399,7 +22414,7 @@
                 <a:ea typeface="Calibri" pitchFamily="34" charset="-122"/>
                 <a:cs typeface="Calibri" pitchFamily="34" charset="-120"/>
               </a:rPr>
-              <a:t>When prose disagrees, generated stable types and tests win.</a:t>
+              <a:t>When prose differs, use the generated stable types and tests.</a:t>
             </a:r>
             <a:endParaRPr lang="en-US" sz="1400" dirty="0"/>
           </a:p>
@@ -22516,7 +22531,7 @@
                 </a:solidFill>
                 <a:latin typeface="Calibri"/>
               </a:rPr>
-              <a:t>Build One Verified Path</a:t>
+              <a:t>Implementation Checklist</a:t>
             </a:r>
           </a:p>
         </p:txBody>
@@ -22558,7 +22573,7 @@
                 </a:solidFill>
                 <a:latin typeface="Calibri"/>
               </a:rPr>
-              <a:t>Understand the SDK, choose the right surface, then use the smallest sample that proves the behavior</a:t>
+              <a:t>Define runtime ownership, identity, tool scope, and evidence before adding capabilities</a:t>
             </a:r>
           </a:p>
         </p:txBody>
@@ -22646,7 +22661,7 @@
                 </a:solidFill>
                 <a:latin typeface="Calibri"/>
               </a:rPr>
-              <a:t>Learning path</a:t>
+              <a:t>Required decisions</a:t>
             </a:r>
           </a:p>
         </p:txBody>
@@ -22688,7 +22703,7 @@
                 </a:solidFill>
                 <a:latin typeface="Calibri"/>
               </a:rPr>
-              <a:t>1. Understand the SDK</a:t>
+              <a:t>1. Runtime connection</a:t>
             </a:r>
           </a:p>
         </p:txBody>
@@ -22730,7 +22745,7 @@
                 </a:solidFill>
                 <a:latin typeface="Calibri"/>
               </a:rPr>
-              <a:t>Runtime, lifecycle, events, tools, permissions</a:t>
+              <a:t>Managed child or protected existing runtime URI</a:t>
             </a:r>
           </a:p>
         </p:txBody>
@@ -22772,7 +22787,7 @@
                 </a:solidFill>
                 <a:latin typeface="Calibri"/>
               </a:rPr>
-              <a:t>2. Compare CLI and SDK</a:t>
+              <a:t>2. Identity and ownership</a:t>
             </a:r>
           </a:p>
         </p:txBody>
@@ -22814,7 +22829,7 @@
                 </a:solidFill>
                 <a:latin typeface="Calibri"/>
               </a:rPr>
-              <a:t>Interactive product versus application component</a:t>
+              <a:t>Authenticate principals; authorize session create, resume, and delete</a:t>
             </a:r>
           </a:p>
         </p:txBody>
@@ -22856,7 +22871,7 @@
                 </a:solidFill>
                 <a:latin typeface="Calibri"/>
               </a:rPr>
-              <a:t>3. Explore possibilities</a:t>
+              <a:t>3. Tool execution controls</a:t>
             </a:r>
           </a:p>
         </p:txBody>
@@ -22898,7 +22913,7 @@
                 </a:solidFill>
                 <a:latin typeface="Calibri"/>
               </a:rPr>
-              <a:t>Products, automation, services, and providers</a:t>
+              <a:t>ToolSet, permission callbacks, hooks, and sandbox policy</a:t>
             </a:r>
           </a:p>
         </p:txBody>
@@ -22940,7 +22955,7 @@
                 </a:solidFill>
                 <a:latin typeface="Calibri"/>
               </a:rPr>
-              <a:t>4. Build with samples</a:t>
+              <a:t>4. Runtime evidence</a:t>
             </a:r>
           </a:p>
         </p:txBody>
@@ -22982,7 +22997,7 @@
                 </a:solidFill>
                 <a:latin typeface="Calibri"/>
               </a:rPr>
-              <a:t>Eight runnable paths with visible evidence</a:t>
+              <a:t>Timeouts, errors, tool-call IDs, results, and audit events</a:t>
             </a:r>
           </a:p>
         </p:txBody>
@@ -23150,7 +23165,7 @@
                 </a:solidFill>
                 <a:latin typeface="Calibri"/>
               </a:rPr>
-              <a:t>Published stable types and tests beat stale prose</a:t>
+              <a:t>Use published stable types and tests when prose differs</a:t>
             </a:r>
           </a:p>
         </p:txBody>
@@ -23840,7 +23855,7 @@
                 <a:ea typeface="Calibri" pitchFamily="34" charset="-122"/>
                 <a:cs typeface="Calibri" pitchFamily="34" charset="-120"/>
               </a:rPr>
-              <a:t>Embed the same agent runtime behind Copilot CLI in your application.</a:t>
+              <a:t>The SDK exposes the Copilot runtime through language APIs.</a:t>
             </a:r>
             <a:endParaRPr lang="en-US" sz="1600" dirty="0"/>
           </a:p>
@@ -24335,7 +24350,7 @@
                 <a:ea typeface="Calibri" pitchFamily="34" charset="-122"/>
                 <a:cs typeface="Calibri" pitchFamily="34" charset="-120"/>
               </a:rPr>
-              <a:t>Extensible</a:t>
+              <a:t>Extension APIs</a:t>
             </a:r>
             <a:endParaRPr lang="en-US" sz="1400" dirty="0"/>
           </a:p>
@@ -26259,7 +26274,7 @@
                 <a:ea typeface="Calibri" pitchFamily="34" charset="-122"/>
                 <a:cs typeface="Calibri" pitchFamily="34" charset="-120"/>
               </a:rPr>
-              <a:t>Typed events carry progress; send_and_wait composes bounded completion</a:t>
+              <a:t>Typed events report progress; send_and_wait handles completion and errors</a:t>
             </a:r>
             <a:endParaRPr lang="en-US" sz="1200" dirty="0"/>
           </a:p>
@@ -26401,7 +26416,7 @@
               </a:spcAft>
             </a:pPr>
             <a:r>
-              <a:rPr sz="1200" b="0">
+              <a:rPr sz="1100" b="0">
                 <a:solidFill>
                   <a:srgbClr val="E6EDF3"/>
                 </a:solidFill>
@@ -26423,7 +26438,7 @@
               </a:spcAft>
             </a:pPr>
             <a:r>
-              <a:rPr sz="1200" b="0">
+              <a:rPr sz="1100" b="0">
                 <a:solidFill>
                   <a:srgbClr val="E6EDF3"/>
                 </a:solidFill>
@@ -26445,7 +26460,7 @@
               </a:spcAft>
             </a:pPr>
             <a:r>
-              <a:rPr sz="1200" b="0">
+              <a:rPr sz="1100" b="0">
                 <a:solidFill>
                   <a:srgbClr val="E6EDF3"/>
                 </a:solidFill>
@@ -26467,7 +26482,7 @@
               </a:spcAft>
             </a:pPr>
             <a:r>
-              <a:rPr sz="1200" b="0">
+              <a:rPr sz="1100" b="0">
                 <a:solidFill>
                   <a:srgbClr val="E6EDF3"/>
                 </a:solidFill>
@@ -26489,7 +26504,7 @@
               </a:spcAft>
             </a:pPr>
             <a:r>
-              <a:rPr sz="1200" b="0">
+              <a:rPr sz="1100" b="0">
                 <a:solidFill>
                   <a:srgbClr val="E6EDF3"/>
                 </a:solidFill>
@@ -26511,13 +26526,13 @@
               </a:spcAft>
             </a:pPr>
             <a:r>
-              <a:rPr sz="1200" b="0">
+              <a:rPr sz="1100" b="0">
                 <a:solidFill>
                   <a:srgbClr val="E6EDF3"/>
                 </a:solidFill>
                 <a:latin typeface="Courier New"/>
               </a:rPr>
-              <a:t xml:space="preserve">        case Delta(delta_content=text):</a:t>
+              <a:t xml:space="preserve">        case Delta(</a:t>
             </a:r>
           </a:p>
           <a:p>
@@ -26533,13 +26548,145 @@
               </a:spcAft>
             </a:pPr>
             <a:r>
-              <a:rPr sz="1200" b="0">
+              <a:rPr sz="1100" b="0">
                 <a:solidFill>
                   <a:srgbClr val="E6EDF3"/>
                 </a:solidFill>
                 <a:latin typeface="Courier New"/>
               </a:rPr>
-              <a:t xml:space="preserve">            print(text or "", end="", flush=True)</a:t>
+              <a:t xml:space="preserve">            delta_content=text</a:t>
+            </a:r>
+          </a:p>
+          <a:p>
+            <a:pPr>
+              <a:lnSpc>
+                <a:spcPct val="112000"/>
+              </a:lnSpc>
+              <a:spcBef>
+                <a:spcPts val="0"/>
+              </a:spcBef>
+              <a:spcAft>
+                <a:spcPts val="0"/>
+              </a:spcAft>
+            </a:pPr>
+            <a:r>
+              <a:rPr sz="1100" b="0">
+                <a:solidFill>
+                  <a:srgbClr val="E6EDF3"/>
+                </a:solidFill>
+                <a:latin typeface="Courier New"/>
+              </a:rPr>
+              <a:t xml:space="preserve">        ):</a:t>
+            </a:r>
+          </a:p>
+          <a:p>
+            <a:pPr>
+              <a:lnSpc>
+                <a:spcPct val="112000"/>
+              </a:lnSpc>
+              <a:spcBef>
+                <a:spcPts val="0"/>
+              </a:spcBef>
+              <a:spcAft>
+                <a:spcPts val="0"/>
+              </a:spcAft>
+            </a:pPr>
+            <a:r>
+              <a:rPr sz="1100" b="0">
+                <a:solidFill>
+                  <a:srgbClr val="E6EDF3"/>
+                </a:solidFill>
+                <a:latin typeface="Courier New"/>
+              </a:rPr>
+              <a:t xml:space="preserve">            print(</a:t>
+            </a:r>
+          </a:p>
+          <a:p>
+            <a:pPr>
+              <a:lnSpc>
+                <a:spcPct val="112000"/>
+              </a:lnSpc>
+              <a:spcBef>
+                <a:spcPts val="0"/>
+              </a:spcBef>
+              <a:spcAft>
+                <a:spcPts val="0"/>
+              </a:spcAft>
+            </a:pPr>
+            <a:r>
+              <a:rPr sz="1100" b="0">
+                <a:solidFill>
+                  <a:srgbClr val="E6EDF3"/>
+                </a:solidFill>
+                <a:latin typeface="Courier New"/>
+              </a:rPr>
+              <a:t xml:space="preserve">                text or "",</a:t>
+            </a:r>
+          </a:p>
+          <a:p>
+            <a:pPr>
+              <a:lnSpc>
+                <a:spcPct val="112000"/>
+              </a:lnSpc>
+              <a:spcBef>
+                <a:spcPts val="0"/>
+              </a:spcBef>
+              <a:spcAft>
+                <a:spcPts val="0"/>
+              </a:spcAft>
+            </a:pPr>
+            <a:r>
+              <a:rPr sz="1100" b="0">
+                <a:solidFill>
+                  <a:srgbClr val="E6EDF3"/>
+                </a:solidFill>
+                <a:latin typeface="Courier New"/>
+              </a:rPr>
+              <a:t xml:space="preserve">                end="",</a:t>
+            </a:r>
+          </a:p>
+          <a:p>
+            <a:pPr>
+              <a:lnSpc>
+                <a:spcPct val="112000"/>
+              </a:lnSpc>
+              <a:spcBef>
+                <a:spcPts val="0"/>
+              </a:spcBef>
+              <a:spcAft>
+                <a:spcPts val="0"/>
+              </a:spcAft>
+            </a:pPr>
+            <a:r>
+              <a:rPr sz="1100" b="0">
+                <a:solidFill>
+                  <a:srgbClr val="E6EDF3"/>
+                </a:solidFill>
+                <a:latin typeface="Courier New"/>
+              </a:rPr>
+              <a:t xml:space="preserve">                flush=True,</a:t>
+            </a:r>
+          </a:p>
+          <a:p>
+            <a:pPr>
+              <a:lnSpc>
+                <a:spcPct val="112000"/>
+              </a:lnSpc>
+              <a:spcBef>
+                <a:spcPts val="0"/>
+              </a:spcBef>
+              <a:spcAft>
+                <a:spcPts val="0"/>
+              </a:spcAft>
+            </a:pPr>
+            <a:r>
+              <a:rPr sz="1100" b="0">
+                <a:solidFill>
+                  <a:srgbClr val="E6EDF3"/>
+                </a:solidFill>
+                <a:latin typeface="Courier New"/>
+              </a:rPr>
+              <a:t xml:space="preserve">            )</a:t>
             </a:r>
           </a:p>
         </p:txBody>
@@ -26680,7 +26827,7 @@
               </a:spcAft>
             </a:pPr>
             <a:r>
-              <a:rPr sz="1200" b="0">
+              <a:rPr sz="1100" b="0">
                 <a:solidFill>
                   <a:srgbClr val="E6EDF3"/>
                 </a:solidFill>
@@ -26702,7 +26849,7 @@
               </a:spcAft>
             </a:pPr>
             <a:r>
-              <a:rPr sz="1200" b="0">
+              <a:rPr sz="1100" b="0">
                 <a:solidFill>
                   <a:srgbClr val="E6EDF3"/>
                 </a:solidFill>
@@ -26724,13 +26871,13 @@
               </a:spcAft>
             </a:pPr>
             <a:r>
-              <a:rPr sz="1200" b="0">
+              <a:rPr sz="1100" b="0">
                 <a:solidFill>
                   <a:srgbClr val="E6EDF3"/>
                 </a:solidFill>
                 <a:latin typeface="Courier New"/>
               </a:rPr>
-              <a:t xml:space="preserve">        streaming=True, available_tools=[])</a:t>
+              <a:t xml:space="preserve">        streaming=True,</a:t>
             </a:r>
           </a:p>
           <a:p>
@@ -26746,13 +26893,13 @@
               </a:spcAft>
             </a:pPr>
             <a:r>
-              <a:rPr sz="1200" b="0">
+              <a:rPr sz="1100" b="0">
                 <a:solidFill>
                   <a:srgbClr val="E6EDF3"/>
                 </a:solidFill>
                 <a:latin typeface="Courier New"/>
               </a:rPr>
-              <a:t xml:space="preserve">    unsubscribe = session.on(on_event)</a:t>
+              <a:t xml:space="preserve">        available_tools=[],</a:t>
             </a:r>
           </a:p>
           <a:p>
@@ -26768,13 +26915,13 @@
               </a:spcAft>
             </a:pPr>
             <a:r>
-              <a:rPr sz="1200" b="0">
+              <a:rPr sz="1100" b="0">
                 <a:solidFill>
                   <a:srgbClr val="E6EDF3"/>
                 </a:solidFill>
                 <a:latin typeface="Courier New"/>
               </a:rPr>
-              <a:t xml:space="preserve">    reply = await session.send_and_wait(</a:t>
+              <a:t xml:space="preserve">    )</a:t>
             </a:r>
           </a:p>
           <a:p>
@@ -26790,13 +26937,13 @@
               </a:spcAft>
             </a:pPr>
             <a:r>
-              <a:rPr sz="1200" b="0">
+              <a:rPr sz="1100" b="0">
                 <a:solidFill>
                   <a:srgbClr val="E6EDF3"/>
                 </a:solidFill>
                 <a:latin typeface="Courier New"/>
               </a:rPr>
-              <a:t xml:space="preserve">        "Explain the SDK briefly.", timeout=60)</a:t>
+              <a:t xml:space="preserve">    unsubscribe = session.on(on_event)</a:t>
             </a:r>
           </a:p>
           <a:p>
@@ -26812,13 +26959,13 @@
               </a:spcAft>
             </a:pPr>
             <a:r>
-              <a:rPr sz="1200" b="0">
+              <a:rPr sz="1100" b="0">
                 <a:solidFill>
                   <a:srgbClr val="E6EDF3"/>
                 </a:solidFill>
                 <a:latin typeface="Courier New"/>
               </a:rPr>
-              <a:t xml:space="preserve">    if reply is None:</a:t>
+              <a:t xml:space="preserve">    reply = await session.send_and_wait(</a:t>
             </a:r>
           </a:p>
           <a:p>
@@ -26834,13 +26981,13 @@
               </a:spcAft>
             </a:pPr>
             <a:r>
-              <a:rPr sz="1200" b="0">
+              <a:rPr sz="1100" b="0">
                 <a:solidFill>
                   <a:srgbClr val="E6EDF3"/>
                 </a:solidFill>
                 <a:latin typeface="Courier New"/>
               </a:rPr>
-              <a:t xml:space="preserve">        raise RuntimeError("No final message")</a:t>
+              <a:t xml:space="preserve">        "Explain the SDK briefly.",</a:t>
             </a:r>
           </a:p>
           <a:p>
@@ -26856,7 +27003,139 @@
               </a:spcAft>
             </a:pPr>
             <a:r>
-              <a:rPr sz="1200" b="0">
+              <a:rPr sz="1100" b="0">
+                <a:solidFill>
+                  <a:srgbClr val="E6EDF3"/>
+                </a:solidFill>
+                <a:latin typeface="Courier New"/>
+              </a:rPr>
+              <a:t xml:space="preserve">        timeout=60,</a:t>
+            </a:r>
+          </a:p>
+          <a:p>
+            <a:pPr>
+              <a:lnSpc>
+                <a:spcPct val="112000"/>
+              </a:lnSpc>
+              <a:spcBef>
+                <a:spcPts val="0"/>
+              </a:spcBef>
+              <a:spcAft>
+                <a:spcPts val="0"/>
+              </a:spcAft>
+            </a:pPr>
+            <a:r>
+              <a:rPr sz="1100" b="0">
+                <a:solidFill>
+                  <a:srgbClr val="E6EDF3"/>
+                </a:solidFill>
+                <a:latin typeface="Courier New"/>
+              </a:rPr>
+              <a:t xml:space="preserve">    )</a:t>
+            </a:r>
+          </a:p>
+          <a:p>
+            <a:pPr>
+              <a:lnSpc>
+                <a:spcPct val="112000"/>
+              </a:lnSpc>
+              <a:spcBef>
+                <a:spcPts val="0"/>
+              </a:spcBef>
+              <a:spcAft>
+                <a:spcPts val="0"/>
+              </a:spcAft>
+            </a:pPr>
+            <a:r>
+              <a:rPr sz="1100" b="0">
+                <a:solidFill>
+                  <a:srgbClr val="E6EDF3"/>
+                </a:solidFill>
+                <a:latin typeface="Courier New"/>
+              </a:rPr>
+              <a:t xml:space="preserve">    if reply is None:</a:t>
+            </a:r>
+          </a:p>
+          <a:p>
+            <a:pPr>
+              <a:lnSpc>
+                <a:spcPct val="112000"/>
+              </a:lnSpc>
+              <a:spcBef>
+                <a:spcPts val="0"/>
+              </a:spcBef>
+              <a:spcAft>
+                <a:spcPts val="0"/>
+              </a:spcAft>
+            </a:pPr>
+            <a:r>
+              <a:rPr sz="1100" b="0">
+                <a:solidFill>
+                  <a:srgbClr val="E6EDF3"/>
+                </a:solidFill>
+                <a:latin typeface="Courier New"/>
+              </a:rPr>
+              <a:t xml:space="preserve">        raise RuntimeError(</a:t>
+            </a:r>
+          </a:p>
+          <a:p>
+            <a:pPr>
+              <a:lnSpc>
+                <a:spcPct val="112000"/>
+              </a:lnSpc>
+              <a:spcBef>
+                <a:spcPts val="0"/>
+              </a:spcBef>
+              <a:spcAft>
+                <a:spcPts val="0"/>
+              </a:spcAft>
+            </a:pPr>
+            <a:r>
+              <a:rPr sz="1100" b="0">
+                <a:solidFill>
+                  <a:srgbClr val="E6EDF3"/>
+                </a:solidFill>
+                <a:latin typeface="Courier New"/>
+              </a:rPr>
+              <a:t xml:space="preserve">            "No final message"</a:t>
+            </a:r>
+          </a:p>
+          <a:p>
+            <a:pPr>
+              <a:lnSpc>
+                <a:spcPct val="112000"/>
+              </a:lnSpc>
+              <a:spcBef>
+                <a:spcPts val="0"/>
+              </a:spcBef>
+              <a:spcAft>
+                <a:spcPts val="0"/>
+              </a:spcAft>
+            </a:pPr>
+            <a:r>
+              <a:rPr sz="1100" b="0">
+                <a:solidFill>
+                  <a:srgbClr val="E6EDF3"/>
+                </a:solidFill>
+                <a:latin typeface="Courier New"/>
+              </a:rPr>
+              <a:t xml:space="preserve">        )</a:t>
+            </a:r>
+          </a:p>
+          <a:p>
+            <a:pPr>
+              <a:lnSpc>
+                <a:spcPct val="112000"/>
+              </a:lnSpc>
+              <a:spcBef>
+                <a:spcPts val="0"/>
+              </a:spcBef>
+              <a:spcAft>
+                <a:spcPts val="0"/>
+              </a:spcAft>
+            </a:pPr>
+            <a:r>
+              <a:rPr sz="1100" b="0">
                 <a:solidFill>
                   <a:srgbClr val="E6EDF3"/>
                 </a:solidFill>
@@ -28296,7 +28575,7 @@
                 </a:solidFill>
                 <a:latin typeface="Calibri"/>
               </a:rPr>
-              <a:t>Exposure is not approval. Approval is not containment.</a:t>
+              <a:t>Tool exposure, authorization, and containment are independent controls.</a:t>
             </a:r>
           </a:p>
         </p:txBody>
@@ -28600,13 +28879,57 @@
               </a:spcAft>
             </a:pPr>
             <a:r>
-              <a:rPr sz="1250" b="0">
+              <a:rPr sz="1200" b="0">
                 <a:solidFill>
                   <a:srgbClr val="E6EDF3"/>
                 </a:solidFill>
                 <a:latin typeface="Courier New"/>
               </a:rPr>
-              <a:t>ToolSet().add_builtin("view")</a:t>
+              <a:t>ToolSet().add_builtin(</a:t>
+            </a:r>
+          </a:p>
+          <a:p>
+            <a:pPr>
+              <a:lnSpc>
+                <a:spcPct val="112000"/>
+              </a:lnSpc>
+              <a:spcBef>
+                <a:spcPts val="0"/>
+              </a:spcBef>
+              <a:spcAft>
+                <a:spcPts val="0"/>
+              </a:spcAft>
+            </a:pPr>
+            <a:r>
+              <a:rPr sz="1200" b="0">
+                <a:solidFill>
+                  <a:srgbClr val="E6EDF3"/>
+                </a:solidFill>
+                <a:latin typeface="Courier New"/>
+              </a:rPr>
+              <a:t xml:space="preserve">    "view"</a:t>
+            </a:r>
+          </a:p>
+          <a:p>
+            <a:pPr>
+              <a:lnSpc>
+                <a:spcPct val="112000"/>
+              </a:lnSpc>
+              <a:spcBef>
+                <a:spcPts val="0"/>
+              </a:spcBef>
+              <a:spcAft>
+                <a:spcPts val="0"/>
+              </a:spcAft>
+            </a:pPr>
+            <a:r>
+              <a:rPr sz="1200" b="0">
+                <a:solidFill>
+                  <a:srgbClr val="E6EDF3"/>
+                </a:solidFill>
+                <a:latin typeface="Courier New"/>
+              </a:rPr>
+              <a:t>)</a:t>
             </a:r>
           </a:p>
         </p:txBody>
@@ -29264,13 +29587,13 @@
               </a:spcAft>
             </a:pPr>
             <a:r>
-              <a:rPr sz="1250" b="0">
+              <a:rPr sz="1200" b="0">
                 <a:solidFill>
                   <a:srgbClr val="E6EDF3"/>
                 </a:solidFill>
                 <a:latin typeface="Courier New"/>
               </a:rPr>
-              <a:t>SandboxConfig(enabled=True,</a:t>
+              <a:t>SandboxConfig(</a:t>
             </a:r>
           </a:p>
           <a:p>
@@ -29286,13 +29609,57 @@
               </a:spcAft>
             </a:pPr>
             <a:r>
-              <a:rPr sz="1250" b="0">
+              <a:rPr sz="1200" b="0">
                 <a:solidFill>
                   <a:srgbClr val="E6EDF3"/>
                 </a:solidFill>
                 <a:latin typeface="Courier New"/>
               </a:rPr>
-              <a:t xml:space="preserve">              allow_bypass=False)</a:t>
+              <a:t xml:space="preserve">    enabled=True,</a:t>
+            </a:r>
+          </a:p>
+          <a:p>
+            <a:pPr>
+              <a:lnSpc>
+                <a:spcPct val="112000"/>
+              </a:lnSpc>
+              <a:spcBef>
+                <a:spcPts val="0"/>
+              </a:spcBef>
+              <a:spcAft>
+                <a:spcPts val="0"/>
+              </a:spcAft>
+            </a:pPr>
+            <a:r>
+              <a:rPr sz="1200" b="0">
+                <a:solidFill>
+                  <a:srgbClr val="E6EDF3"/>
+                </a:solidFill>
+                <a:latin typeface="Courier New"/>
+              </a:rPr>
+              <a:t xml:space="preserve">    allow_bypass=False,</a:t>
+            </a:r>
+          </a:p>
+          <a:p>
+            <a:pPr>
+              <a:lnSpc>
+                <a:spcPct val="112000"/>
+              </a:lnSpc>
+              <a:spcBef>
+                <a:spcPts val="0"/>
+              </a:spcBef>
+              <a:spcAft>
+                <a:spcPts val="0"/>
+              </a:spcAft>
+            </a:pPr>
+            <a:r>
+              <a:rPr sz="1200" b="0">
+                <a:solidFill>
+                  <a:srgbClr val="E6EDF3"/>
+                </a:solidFill>
+                <a:latin typeface="Courier New"/>
+              </a:rPr>
+              <a:t>)</a:t>
             </a:r>
           </a:p>
         </p:txBody>
@@ -29451,7 +29818,7 @@
                 </a:solidFill>
                 <a:latin typeface="Calibri"/>
               </a:rPr>
-              <a:t>Same runtime engine and JSON-RPC protocol; different product boundary</a:t>
+              <a:t>Same runtime and JSON-RPC protocol; different UI, lifecycle, and ownership</a:t>
             </a:r>
           </a:p>
         </p:txBody>
